--- a/lect00_AI_intro.pptx
+++ b/lect00_AI_intro.pptx
@@ -5,24 +5,26 @@
     <p:sldMasterId id="2147483659" r:id="rId1"/>
   </p:sldMasterIdLst>
   <p:notesMasterIdLst>
-    <p:notesMasterId r:id="rId17"/>
+    <p:notesMasterId r:id="rId19"/>
   </p:notesMasterIdLst>
   <p:sldIdLst>
     <p:sldId id="256" r:id="rId2"/>
-    <p:sldId id="362" r:id="rId3"/>
+    <p:sldId id="257" r:id="rId3"/>
     <p:sldId id="309" r:id="rId4"/>
-    <p:sldId id="366" r:id="rId5"/>
-    <p:sldId id="367" r:id="rId6"/>
-    <p:sldId id="268" r:id="rId7"/>
-    <p:sldId id="259" r:id="rId8"/>
-    <p:sldId id="364" r:id="rId9"/>
-    <p:sldId id="361" r:id="rId10"/>
-    <p:sldId id="365" r:id="rId11"/>
-    <p:sldId id="260" r:id="rId12"/>
-    <p:sldId id="368" r:id="rId13"/>
-    <p:sldId id="266" r:id="rId14"/>
-    <p:sldId id="311" r:id="rId15"/>
-    <p:sldId id="312" r:id="rId16"/>
+    <p:sldId id="362" r:id="rId5"/>
+    <p:sldId id="366" r:id="rId6"/>
+    <p:sldId id="259" r:id="rId7"/>
+    <p:sldId id="367" r:id="rId8"/>
+    <p:sldId id="268" r:id="rId9"/>
+    <p:sldId id="369" r:id="rId10"/>
+    <p:sldId id="310" r:id="rId11"/>
+    <p:sldId id="361" r:id="rId12"/>
+    <p:sldId id="365" r:id="rId13"/>
+    <p:sldId id="260" r:id="rId14"/>
+    <p:sldId id="368" r:id="rId15"/>
+    <p:sldId id="266" r:id="rId16"/>
+    <p:sldId id="311" r:id="rId17"/>
+    <p:sldId id="312" r:id="rId18"/>
   </p:sldIdLst>
   <p:sldSz cx="12192000" cy="6858000"/>
   <p:notesSz cx="6858000" cy="9144000"/>
@@ -1557,6 +1559,311 @@
   <p:cSld>
     <p:spTree>
       <p:nvGrpSpPr>
+        <p:cNvPr id="1" name="Shape 102"/>
+        <p:cNvGrpSpPr/>
+        <p:nvPr/>
+      </p:nvGrpSpPr>
+      <p:grpSpPr>
+        <a:xfrm>
+          <a:off x="0" y="0"/>
+          <a:ext cx="0" cy="0"/>
+          <a:chOff x="0" y="0"/>
+          <a:chExt cx="0" cy="0"/>
+        </a:xfrm>
+      </p:grpSpPr>
+      <p:sp>
+        <p:nvSpPr>
+          <p:cNvPr id="103" name="Google Shape;103;g3803b8d742_0_15:notes"/>
+          <p:cNvSpPr>
+            <a:spLocks noGrp="1" noRot="1" noChangeAspect="1"/>
+          </p:cNvSpPr>
+          <p:nvPr>
+            <p:ph type="sldImg" idx="2"/>
+          </p:nvPr>
+        </p:nvSpPr>
+        <p:spPr>
+          <a:xfrm>
+            <a:off x="685800" y="1143000"/>
+            <a:ext cx="5486400" cy="3086100"/>
+          </a:xfrm>
+          <a:custGeom>
+            <a:avLst/>
+            <a:gdLst/>
+            <a:ahLst/>
+            <a:cxnLst/>
+            <a:rect l="l" t="t" r="r" b="b"/>
+            <a:pathLst>
+              <a:path w="120000" h="120000" extrusionOk="0">
+                <a:moveTo>
+                  <a:pt x="0" y="0"/>
+                </a:moveTo>
+                <a:lnTo>
+                  <a:pt x="120000" y="0"/>
+                </a:lnTo>
+                <a:lnTo>
+                  <a:pt x="120000" y="120000"/>
+                </a:lnTo>
+                <a:lnTo>
+                  <a:pt x="0" y="120000"/>
+                </a:lnTo>
+                <a:close/>
+              </a:path>
+            </a:pathLst>
+          </a:custGeom>
+        </p:spPr>
+      </p:sp>
+      <p:sp>
+        <p:nvSpPr>
+          <p:cNvPr id="104" name="Google Shape;104;g3803b8d742_0_15:notes"/>
+          <p:cNvSpPr txBox="1">
+            <a:spLocks noGrp="1"/>
+          </p:cNvSpPr>
+          <p:nvPr>
+            <p:ph type="body" idx="1"/>
+          </p:nvPr>
+        </p:nvSpPr>
+        <p:spPr>
+          <a:xfrm>
+            <a:off x="685800" y="4400550"/>
+            <a:ext cx="5486400" cy="3600600"/>
+          </a:xfrm>
+          <a:prstGeom prst="rect">
+            <a:avLst/>
+          </a:prstGeom>
+        </p:spPr>
+        <p:txBody>
+          <a:bodyPr spcFirstLastPara="1" wrap="square" lIns="91425" tIns="91425" rIns="91425" bIns="91425" anchor="t" anchorCtr="0">
+            <a:noAutofit/>
+          </a:bodyPr>
+          <a:lstStyle/>
+          <a:p>
+            <a:pPr marL="0" lvl="0" indent="0" algn="l" rtl="0">
+              <a:spcBef>
+                <a:spcPts val="0"/>
+              </a:spcBef>
+              <a:spcAft>
+                <a:spcPts val="0"/>
+              </a:spcAft>
+              <a:buNone/>
+            </a:pPr>
+            <a:endParaRPr/>
+          </a:p>
+        </p:txBody>
+      </p:sp>
+      <p:sp>
+        <p:nvSpPr>
+          <p:cNvPr id="105" name="Google Shape;105;g3803b8d742_0_15:notes"/>
+          <p:cNvSpPr txBox="1">
+            <a:spLocks noGrp="1"/>
+          </p:cNvSpPr>
+          <p:nvPr>
+            <p:ph type="sldNum" idx="12"/>
+          </p:nvPr>
+        </p:nvSpPr>
+        <p:spPr>
+          <a:xfrm>
+            <a:off x="3884613" y="8685213"/>
+            <a:ext cx="2971800" cy="458700"/>
+          </a:xfrm>
+          <a:prstGeom prst="rect">
+            <a:avLst/>
+          </a:prstGeom>
+        </p:spPr>
+        <p:txBody>
+          <a:bodyPr spcFirstLastPara="1" wrap="square" lIns="91425" tIns="45700" rIns="91425" bIns="45700" anchor="b" anchorCtr="0">
+            <a:noAutofit/>
+          </a:bodyPr>
+          <a:lstStyle/>
+          <a:p>
+            <a:pPr marL="0" lvl="0" indent="0" algn="r" rtl="0">
+              <a:spcBef>
+                <a:spcPts val="0"/>
+              </a:spcBef>
+              <a:spcAft>
+                <a:spcPts val="0"/>
+              </a:spcAft>
+              <a:buClr>
+                <a:srgbClr val="000000"/>
+              </a:buClr>
+              <a:buFont typeface="Arial"/>
+              <a:buNone/>
+            </a:pPr>
+            <a:fld id="{00000000-1234-1234-1234-123412341234}" type="slidenum">
+              <a:rPr lang="en-US"/>
+              <a:t>12</a:t>
+            </a:fld>
+            <a:endParaRPr/>
+          </a:p>
+        </p:txBody>
+      </p:sp>
+    </p:spTree>
+    <p:extLst>
+      <p:ext uri="{BB962C8B-B14F-4D97-AF65-F5344CB8AC3E}">
+        <p14:creationId xmlns:p14="http://schemas.microsoft.com/office/powerpoint/2010/main" val="22345759"/>
+      </p:ext>
+    </p:extLst>
+  </p:cSld>
+  <p:clrMapOvr>
+    <a:masterClrMapping/>
+  </p:clrMapOvr>
+</p:notes>
+</file>
+
+<file path=ppt/notesSlides/notesSlide11.xml><?xml version="1.0" encoding="utf-8"?>
+<p:notes xmlns:a="http://schemas.openxmlformats.org/drawingml/2006/main" xmlns:r="http://schemas.openxmlformats.org/officeDocument/2006/relationships" xmlns:p="http://schemas.openxmlformats.org/presentationml/2006/main" showMasterSp="0" showMasterPhAnim="0">
+  <p:cSld>
+    <p:spTree>
+      <p:nvGrpSpPr>
+        <p:cNvPr id="1" name="Shape 109"/>
+        <p:cNvGrpSpPr/>
+        <p:nvPr/>
+      </p:nvGrpSpPr>
+      <p:grpSpPr>
+        <a:xfrm>
+          <a:off x="0" y="0"/>
+          <a:ext cx="0" cy="0"/>
+          <a:chOff x="0" y="0"/>
+          <a:chExt cx="0" cy="0"/>
+        </a:xfrm>
+      </p:grpSpPr>
+      <p:sp>
+        <p:nvSpPr>
+          <p:cNvPr id="110" name="Google Shape;110;g3c45024941_0_7:notes"/>
+          <p:cNvSpPr>
+            <a:spLocks noGrp="1" noRot="1" noChangeAspect="1"/>
+          </p:cNvSpPr>
+          <p:nvPr>
+            <p:ph type="sldImg" idx="2"/>
+          </p:nvPr>
+        </p:nvSpPr>
+        <p:spPr>
+          <a:xfrm>
+            <a:off x="685800" y="1143000"/>
+            <a:ext cx="5486400" cy="3086100"/>
+          </a:xfrm>
+          <a:custGeom>
+            <a:avLst/>
+            <a:gdLst/>
+            <a:ahLst/>
+            <a:cxnLst/>
+            <a:rect l="l" t="t" r="r" b="b"/>
+            <a:pathLst>
+              <a:path w="120000" h="120000" extrusionOk="0">
+                <a:moveTo>
+                  <a:pt x="0" y="0"/>
+                </a:moveTo>
+                <a:lnTo>
+                  <a:pt x="120000" y="0"/>
+                </a:lnTo>
+                <a:lnTo>
+                  <a:pt x="120000" y="120000"/>
+                </a:lnTo>
+                <a:lnTo>
+                  <a:pt x="0" y="120000"/>
+                </a:lnTo>
+                <a:close/>
+              </a:path>
+            </a:pathLst>
+          </a:custGeom>
+        </p:spPr>
+      </p:sp>
+      <p:sp>
+        <p:nvSpPr>
+          <p:cNvPr id="111" name="Google Shape;111;g3c45024941_0_7:notes"/>
+          <p:cNvSpPr txBox="1">
+            <a:spLocks noGrp="1"/>
+          </p:cNvSpPr>
+          <p:nvPr>
+            <p:ph type="body" idx="1"/>
+          </p:nvPr>
+        </p:nvSpPr>
+        <p:spPr>
+          <a:xfrm>
+            <a:off x="685800" y="4400550"/>
+            <a:ext cx="5486400" cy="3600600"/>
+          </a:xfrm>
+          <a:prstGeom prst="rect">
+            <a:avLst/>
+          </a:prstGeom>
+        </p:spPr>
+        <p:txBody>
+          <a:bodyPr spcFirstLastPara="1" wrap="square" lIns="91425" tIns="91425" rIns="91425" bIns="91425" anchor="t" anchorCtr="0">
+            <a:noAutofit/>
+          </a:bodyPr>
+          <a:lstStyle/>
+          <a:p>
+            <a:pPr marL="0" lvl="0" indent="0" algn="l" rtl="0">
+              <a:spcBef>
+                <a:spcPts val="0"/>
+              </a:spcBef>
+              <a:spcAft>
+                <a:spcPts val="0"/>
+              </a:spcAft>
+              <a:buNone/>
+            </a:pPr>
+            <a:endParaRPr/>
+          </a:p>
+        </p:txBody>
+      </p:sp>
+      <p:sp>
+        <p:nvSpPr>
+          <p:cNvPr id="112" name="Google Shape;112;g3c45024941_0_7:notes"/>
+          <p:cNvSpPr txBox="1">
+            <a:spLocks noGrp="1"/>
+          </p:cNvSpPr>
+          <p:nvPr>
+            <p:ph type="sldNum" idx="12"/>
+          </p:nvPr>
+        </p:nvSpPr>
+        <p:spPr>
+          <a:xfrm>
+            <a:off x="3884613" y="8685213"/>
+            <a:ext cx="2971800" cy="458700"/>
+          </a:xfrm>
+          <a:prstGeom prst="rect">
+            <a:avLst/>
+          </a:prstGeom>
+        </p:spPr>
+        <p:txBody>
+          <a:bodyPr spcFirstLastPara="1" wrap="square" lIns="91425" tIns="45700" rIns="91425" bIns="45700" anchor="b" anchorCtr="0">
+            <a:noAutofit/>
+          </a:bodyPr>
+          <a:lstStyle/>
+          <a:p>
+            <a:pPr marL="0" lvl="0" indent="0" algn="r" rtl="0">
+              <a:spcBef>
+                <a:spcPts val="0"/>
+              </a:spcBef>
+              <a:spcAft>
+                <a:spcPts val="0"/>
+              </a:spcAft>
+              <a:buClr>
+                <a:srgbClr val="000000"/>
+              </a:buClr>
+              <a:buFont typeface="Arial"/>
+              <a:buNone/>
+            </a:pPr>
+            <a:fld id="{00000000-1234-1234-1234-123412341234}" type="slidenum">
+              <a:rPr lang="en-US"/>
+              <a:t>13</a:t>
+            </a:fld>
+            <a:endParaRPr/>
+          </a:p>
+        </p:txBody>
+      </p:sp>
+    </p:spTree>
+  </p:cSld>
+  <p:clrMapOvr>
+    <a:masterClrMapping/>
+  </p:clrMapOvr>
+</p:notes>
+</file>
+
+<file path=ppt/notesSlides/notesSlide12.xml><?xml version="1.0" encoding="utf-8"?>
+<p:notes xmlns:a="http://schemas.openxmlformats.org/drawingml/2006/main" xmlns:r="http://schemas.openxmlformats.org/officeDocument/2006/relationships" xmlns:p="http://schemas.openxmlformats.org/presentationml/2006/main" showMasterSp="0" showMasterPhAnim="0">
+  <p:cSld>
+    <p:spTree>
+      <p:nvGrpSpPr>
         <p:cNvPr id="1" name="Shape 84"/>
         <p:cNvGrpSpPr/>
         <p:nvPr/>
@@ -1649,311 +1956,6 @@
         </p:spPr>
       </p:sp>
     </p:spTree>
-  </p:cSld>
-  <p:clrMapOvr>
-    <a:masterClrMapping/>
-  </p:clrMapOvr>
-</p:notes>
-</file>
-
-<file path=ppt/notesSlides/notesSlide11.xml><?xml version="1.0" encoding="utf-8"?>
-<p:notes xmlns:a="http://schemas.openxmlformats.org/drawingml/2006/main" xmlns:r="http://schemas.openxmlformats.org/officeDocument/2006/relationships" xmlns:p="http://schemas.openxmlformats.org/presentationml/2006/main" showMasterSp="0" showMasterPhAnim="0">
-  <p:cSld>
-    <p:spTree>
-      <p:nvGrpSpPr>
-        <p:cNvPr id="1" name="Shape 164"/>
-        <p:cNvGrpSpPr/>
-        <p:nvPr/>
-      </p:nvGrpSpPr>
-      <p:grpSpPr>
-        <a:xfrm>
-          <a:off x="0" y="0"/>
-          <a:ext cx="0" cy="0"/>
-          <a:chOff x="0" y="0"/>
-          <a:chExt cx="0" cy="0"/>
-        </a:xfrm>
-      </p:grpSpPr>
-      <p:sp>
-        <p:nvSpPr>
-          <p:cNvPr id="165" name="Google Shape;165;g3c45024941_0_14:notes"/>
-          <p:cNvSpPr>
-            <a:spLocks noGrp="1" noRot="1" noChangeAspect="1"/>
-          </p:cNvSpPr>
-          <p:nvPr>
-            <p:ph type="sldImg" idx="2"/>
-          </p:nvPr>
-        </p:nvSpPr>
-        <p:spPr>
-          <a:xfrm>
-            <a:off x="685800" y="1143000"/>
-            <a:ext cx="5486400" cy="3086100"/>
-          </a:xfrm>
-          <a:custGeom>
-            <a:avLst/>
-            <a:gdLst/>
-            <a:ahLst/>
-            <a:cxnLst/>
-            <a:rect l="l" t="t" r="r" b="b"/>
-            <a:pathLst>
-              <a:path w="120000" h="120000" extrusionOk="0">
-                <a:moveTo>
-                  <a:pt x="0" y="0"/>
-                </a:moveTo>
-                <a:lnTo>
-                  <a:pt x="120000" y="0"/>
-                </a:lnTo>
-                <a:lnTo>
-                  <a:pt x="120000" y="120000"/>
-                </a:lnTo>
-                <a:lnTo>
-                  <a:pt x="0" y="120000"/>
-                </a:lnTo>
-                <a:close/>
-              </a:path>
-            </a:pathLst>
-          </a:custGeom>
-        </p:spPr>
-      </p:sp>
-      <p:sp>
-        <p:nvSpPr>
-          <p:cNvPr id="166" name="Google Shape;166;g3c45024941_0_14:notes"/>
-          <p:cNvSpPr txBox="1">
-            <a:spLocks noGrp="1"/>
-          </p:cNvSpPr>
-          <p:nvPr>
-            <p:ph type="body" idx="1"/>
-          </p:nvPr>
-        </p:nvSpPr>
-        <p:spPr>
-          <a:xfrm>
-            <a:off x="685800" y="4400550"/>
-            <a:ext cx="5486400" cy="3600600"/>
-          </a:xfrm>
-          <a:prstGeom prst="rect">
-            <a:avLst/>
-          </a:prstGeom>
-        </p:spPr>
-        <p:txBody>
-          <a:bodyPr spcFirstLastPara="1" wrap="square" lIns="91425" tIns="91425" rIns="91425" bIns="91425" anchor="t" anchorCtr="0">
-            <a:noAutofit/>
-          </a:bodyPr>
-          <a:lstStyle/>
-          <a:p>
-            <a:pPr marL="0" lvl="0" indent="0" algn="l" rtl="0">
-              <a:spcBef>
-                <a:spcPts val="0"/>
-              </a:spcBef>
-              <a:spcAft>
-                <a:spcPts val="0"/>
-              </a:spcAft>
-              <a:buNone/>
-            </a:pPr>
-            <a:endParaRPr/>
-          </a:p>
-        </p:txBody>
-      </p:sp>
-      <p:sp>
-        <p:nvSpPr>
-          <p:cNvPr id="167" name="Google Shape;167;g3c45024941_0_14:notes"/>
-          <p:cNvSpPr txBox="1">
-            <a:spLocks noGrp="1"/>
-          </p:cNvSpPr>
-          <p:nvPr>
-            <p:ph type="sldNum" idx="12"/>
-          </p:nvPr>
-        </p:nvSpPr>
-        <p:spPr>
-          <a:xfrm>
-            <a:off x="3884613" y="8685213"/>
-            <a:ext cx="2971800" cy="458700"/>
-          </a:xfrm>
-          <a:prstGeom prst="rect">
-            <a:avLst/>
-          </a:prstGeom>
-        </p:spPr>
-        <p:txBody>
-          <a:bodyPr spcFirstLastPara="1" wrap="square" lIns="91425" tIns="45700" rIns="91425" bIns="45700" anchor="b" anchorCtr="0">
-            <a:noAutofit/>
-          </a:bodyPr>
-          <a:lstStyle/>
-          <a:p>
-            <a:pPr marL="0" lvl="0" indent="0" algn="r" rtl="0">
-              <a:spcBef>
-                <a:spcPts val="0"/>
-              </a:spcBef>
-              <a:spcAft>
-                <a:spcPts val="0"/>
-              </a:spcAft>
-              <a:buClr>
-                <a:srgbClr val="000000"/>
-              </a:buClr>
-              <a:buFont typeface="Arial"/>
-              <a:buNone/>
-            </a:pPr>
-            <a:fld id="{00000000-1234-1234-1234-123412341234}" type="slidenum">
-              <a:rPr lang="en-US"/>
-              <a:t>13</a:t>
-            </a:fld>
-            <a:endParaRPr/>
-          </a:p>
-        </p:txBody>
-      </p:sp>
-    </p:spTree>
-  </p:cSld>
-  <p:clrMapOvr>
-    <a:masterClrMapping/>
-  </p:clrMapOvr>
-</p:notes>
-</file>
-
-<file path=ppt/notesSlides/notesSlide12.xml><?xml version="1.0" encoding="utf-8"?>
-<p:notes xmlns:a="http://schemas.openxmlformats.org/drawingml/2006/main" xmlns:r="http://schemas.openxmlformats.org/officeDocument/2006/relationships" xmlns:p="http://schemas.openxmlformats.org/presentationml/2006/main" showMasterSp="0" showMasterPhAnim="0">
-  <p:cSld>
-    <p:spTree>
-      <p:nvGrpSpPr>
-        <p:cNvPr id="1" name="Shape 164"/>
-        <p:cNvGrpSpPr/>
-        <p:nvPr/>
-      </p:nvGrpSpPr>
-      <p:grpSpPr>
-        <a:xfrm>
-          <a:off x="0" y="0"/>
-          <a:ext cx="0" cy="0"/>
-          <a:chOff x="0" y="0"/>
-          <a:chExt cx="0" cy="0"/>
-        </a:xfrm>
-      </p:grpSpPr>
-      <p:sp>
-        <p:nvSpPr>
-          <p:cNvPr id="165" name="Google Shape;165;g3c45024941_0_14:notes"/>
-          <p:cNvSpPr>
-            <a:spLocks noGrp="1" noRot="1" noChangeAspect="1"/>
-          </p:cNvSpPr>
-          <p:nvPr>
-            <p:ph type="sldImg" idx="2"/>
-          </p:nvPr>
-        </p:nvSpPr>
-        <p:spPr>
-          <a:xfrm>
-            <a:off x="685800" y="1143000"/>
-            <a:ext cx="5486400" cy="3086100"/>
-          </a:xfrm>
-          <a:custGeom>
-            <a:avLst/>
-            <a:gdLst/>
-            <a:ahLst/>
-            <a:cxnLst/>
-            <a:rect l="l" t="t" r="r" b="b"/>
-            <a:pathLst>
-              <a:path w="120000" h="120000" extrusionOk="0">
-                <a:moveTo>
-                  <a:pt x="0" y="0"/>
-                </a:moveTo>
-                <a:lnTo>
-                  <a:pt x="120000" y="0"/>
-                </a:lnTo>
-                <a:lnTo>
-                  <a:pt x="120000" y="120000"/>
-                </a:lnTo>
-                <a:lnTo>
-                  <a:pt x="0" y="120000"/>
-                </a:lnTo>
-                <a:close/>
-              </a:path>
-            </a:pathLst>
-          </a:custGeom>
-        </p:spPr>
-      </p:sp>
-      <p:sp>
-        <p:nvSpPr>
-          <p:cNvPr id="166" name="Google Shape;166;g3c45024941_0_14:notes"/>
-          <p:cNvSpPr txBox="1">
-            <a:spLocks noGrp="1"/>
-          </p:cNvSpPr>
-          <p:nvPr>
-            <p:ph type="body" idx="1"/>
-          </p:nvPr>
-        </p:nvSpPr>
-        <p:spPr>
-          <a:xfrm>
-            <a:off x="685800" y="4400550"/>
-            <a:ext cx="5486400" cy="3600600"/>
-          </a:xfrm>
-          <a:prstGeom prst="rect">
-            <a:avLst/>
-          </a:prstGeom>
-        </p:spPr>
-        <p:txBody>
-          <a:bodyPr spcFirstLastPara="1" wrap="square" lIns="91425" tIns="91425" rIns="91425" bIns="91425" anchor="t" anchorCtr="0">
-            <a:noAutofit/>
-          </a:bodyPr>
-          <a:lstStyle/>
-          <a:p>
-            <a:pPr marL="0" lvl="0" indent="0" algn="l" rtl="0">
-              <a:spcBef>
-                <a:spcPts val="0"/>
-              </a:spcBef>
-              <a:spcAft>
-                <a:spcPts val="0"/>
-              </a:spcAft>
-              <a:buNone/>
-            </a:pPr>
-            <a:endParaRPr/>
-          </a:p>
-        </p:txBody>
-      </p:sp>
-      <p:sp>
-        <p:nvSpPr>
-          <p:cNvPr id="167" name="Google Shape;167;g3c45024941_0_14:notes"/>
-          <p:cNvSpPr txBox="1">
-            <a:spLocks noGrp="1"/>
-          </p:cNvSpPr>
-          <p:nvPr>
-            <p:ph type="sldNum" idx="12"/>
-          </p:nvPr>
-        </p:nvSpPr>
-        <p:spPr>
-          <a:xfrm>
-            <a:off x="3884613" y="8685213"/>
-            <a:ext cx="2971800" cy="458700"/>
-          </a:xfrm>
-          <a:prstGeom prst="rect">
-            <a:avLst/>
-          </a:prstGeom>
-        </p:spPr>
-        <p:txBody>
-          <a:bodyPr spcFirstLastPara="1" wrap="square" lIns="91425" tIns="45700" rIns="91425" bIns="45700" anchor="b" anchorCtr="0">
-            <a:noAutofit/>
-          </a:bodyPr>
-          <a:lstStyle/>
-          <a:p>
-            <a:pPr marL="0" lvl="0" indent="0" algn="r" rtl="0">
-              <a:spcBef>
-                <a:spcPts val="0"/>
-              </a:spcBef>
-              <a:spcAft>
-                <a:spcPts val="0"/>
-              </a:spcAft>
-              <a:buClr>
-                <a:srgbClr val="000000"/>
-              </a:buClr>
-              <a:buFont typeface="Arial"/>
-              <a:buNone/>
-            </a:pPr>
-            <a:fld id="{00000000-1234-1234-1234-123412341234}" type="slidenum">
-              <a:rPr lang="en-US"/>
-              <a:t>14</a:t>
-            </a:fld>
-            <a:endParaRPr/>
-          </a:p>
-        </p:txBody>
-      </p:sp>
-    </p:spTree>
-    <p:extLst>
-      <p:ext uri="{BB962C8B-B14F-4D97-AF65-F5344CB8AC3E}">
-        <p14:creationId xmlns:p14="http://schemas.microsoft.com/office/powerpoint/2010/main" val="1702292109"/>
-      </p:ext>
-    </p:extLst>
   </p:cSld>
   <p:clrMapOvr>
     <a:masterClrMapping/>
@@ -2104,6 +2106,311 @@
         </p:txBody>
       </p:sp>
     </p:spTree>
+  </p:cSld>
+  <p:clrMapOvr>
+    <a:masterClrMapping/>
+  </p:clrMapOvr>
+</p:notes>
+</file>
+
+<file path=ppt/notesSlides/notesSlide14.xml><?xml version="1.0" encoding="utf-8"?>
+<p:notes xmlns:a="http://schemas.openxmlformats.org/drawingml/2006/main" xmlns:r="http://schemas.openxmlformats.org/officeDocument/2006/relationships" xmlns:p="http://schemas.openxmlformats.org/presentationml/2006/main" showMasterSp="0" showMasterPhAnim="0">
+  <p:cSld>
+    <p:spTree>
+      <p:nvGrpSpPr>
+        <p:cNvPr id="1" name="Shape 164"/>
+        <p:cNvGrpSpPr/>
+        <p:nvPr/>
+      </p:nvGrpSpPr>
+      <p:grpSpPr>
+        <a:xfrm>
+          <a:off x="0" y="0"/>
+          <a:ext cx="0" cy="0"/>
+          <a:chOff x="0" y="0"/>
+          <a:chExt cx="0" cy="0"/>
+        </a:xfrm>
+      </p:grpSpPr>
+      <p:sp>
+        <p:nvSpPr>
+          <p:cNvPr id="165" name="Google Shape;165;g3c45024941_0_14:notes"/>
+          <p:cNvSpPr>
+            <a:spLocks noGrp="1" noRot="1" noChangeAspect="1"/>
+          </p:cNvSpPr>
+          <p:nvPr>
+            <p:ph type="sldImg" idx="2"/>
+          </p:nvPr>
+        </p:nvSpPr>
+        <p:spPr>
+          <a:xfrm>
+            <a:off x="685800" y="1143000"/>
+            <a:ext cx="5486400" cy="3086100"/>
+          </a:xfrm>
+          <a:custGeom>
+            <a:avLst/>
+            <a:gdLst/>
+            <a:ahLst/>
+            <a:cxnLst/>
+            <a:rect l="l" t="t" r="r" b="b"/>
+            <a:pathLst>
+              <a:path w="120000" h="120000" extrusionOk="0">
+                <a:moveTo>
+                  <a:pt x="0" y="0"/>
+                </a:moveTo>
+                <a:lnTo>
+                  <a:pt x="120000" y="0"/>
+                </a:lnTo>
+                <a:lnTo>
+                  <a:pt x="120000" y="120000"/>
+                </a:lnTo>
+                <a:lnTo>
+                  <a:pt x="0" y="120000"/>
+                </a:lnTo>
+                <a:close/>
+              </a:path>
+            </a:pathLst>
+          </a:custGeom>
+        </p:spPr>
+      </p:sp>
+      <p:sp>
+        <p:nvSpPr>
+          <p:cNvPr id="166" name="Google Shape;166;g3c45024941_0_14:notes"/>
+          <p:cNvSpPr txBox="1">
+            <a:spLocks noGrp="1"/>
+          </p:cNvSpPr>
+          <p:nvPr>
+            <p:ph type="body" idx="1"/>
+          </p:nvPr>
+        </p:nvSpPr>
+        <p:spPr>
+          <a:xfrm>
+            <a:off x="685800" y="4400550"/>
+            <a:ext cx="5486400" cy="3600600"/>
+          </a:xfrm>
+          <a:prstGeom prst="rect">
+            <a:avLst/>
+          </a:prstGeom>
+        </p:spPr>
+        <p:txBody>
+          <a:bodyPr spcFirstLastPara="1" wrap="square" lIns="91425" tIns="91425" rIns="91425" bIns="91425" anchor="t" anchorCtr="0">
+            <a:noAutofit/>
+          </a:bodyPr>
+          <a:lstStyle/>
+          <a:p>
+            <a:pPr marL="0" lvl="0" indent="0" algn="l" rtl="0">
+              <a:spcBef>
+                <a:spcPts val="0"/>
+              </a:spcBef>
+              <a:spcAft>
+                <a:spcPts val="0"/>
+              </a:spcAft>
+              <a:buNone/>
+            </a:pPr>
+            <a:endParaRPr/>
+          </a:p>
+        </p:txBody>
+      </p:sp>
+      <p:sp>
+        <p:nvSpPr>
+          <p:cNvPr id="167" name="Google Shape;167;g3c45024941_0_14:notes"/>
+          <p:cNvSpPr txBox="1">
+            <a:spLocks noGrp="1"/>
+          </p:cNvSpPr>
+          <p:nvPr>
+            <p:ph type="sldNum" idx="12"/>
+          </p:nvPr>
+        </p:nvSpPr>
+        <p:spPr>
+          <a:xfrm>
+            <a:off x="3884613" y="8685213"/>
+            <a:ext cx="2971800" cy="458700"/>
+          </a:xfrm>
+          <a:prstGeom prst="rect">
+            <a:avLst/>
+          </a:prstGeom>
+        </p:spPr>
+        <p:txBody>
+          <a:bodyPr spcFirstLastPara="1" wrap="square" lIns="91425" tIns="45700" rIns="91425" bIns="45700" anchor="b" anchorCtr="0">
+            <a:noAutofit/>
+          </a:bodyPr>
+          <a:lstStyle/>
+          <a:p>
+            <a:pPr marL="0" lvl="0" indent="0" algn="r" rtl="0">
+              <a:spcBef>
+                <a:spcPts val="0"/>
+              </a:spcBef>
+              <a:spcAft>
+                <a:spcPts val="0"/>
+              </a:spcAft>
+              <a:buClr>
+                <a:srgbClr val="000000"/>
+              </a:buClr>
+              <a:buFont typeface="Arial"/>
+              <a:buNone/>
+            </a:pPr>
+            <a:fld id="{00000000-1234-1234-1234-123412341234}" type="slidenum">
+              <a:rPr lang="en-US"/>
+              <a:t>16</a:t>
+            </a:fld>
+            <a:endParaRPr/>
+          </a:p>
+        </p:txBody>
+      </p:sp>
+    </p:spTree>
+    <p:extLst>
+      <p:ext uri="{BB962C8B-B14F-4D97-AF65-F5344CB8AC3E}">
+        <p14:creationId xmlns:p14="http://schemas.microsoft.com/office/powerpoint/2010/main" val="1702292109"/>
+      </p:ext>
+    </p:extLst>
+  </p:cSld>
+  <p:clrMapOvr>
+    <a:masterClrMapping/>
+  </p:clrMapOvr>
+</p:notes>
+</file>
+
+<file path=ppt/notesSlides/notesSlide15.xml><?xml version="1.0" encoding="utf-8"?>
+<p:notes xmlns:a="http://schemas.openxmlformats.org/drawingml/2006/main" xmlns:r="http://schemas.openxmlformats.org/officeDocument/2006/relationships" xmlns:p="http://schemas.openxmlformats.org/presentationml/2006/main" showMasterSp="0" showMasterPhAnim="0">
+  <p:cSld>
+    <p:spTree>
+      <p:nvGrpSpPr>
+        <p:cNvPr id="1" name="Shape 164"/>
+        <p:cNvGrpSpPr/>
+        <p:nvPr/>
+      </p:nvGrpSpPr>
+      <p:grpSpPr>
+        <a:xfrm>
+          <a:off x="0" y="0"/>
+          <a:ext cx="0" cy="0"/>
+          <a:chOff x="0" y="0"/>
+          <a:chExt cx="0" cy="0"/>
+        </a:xfrm>
+      </p:grpSpPr>
+      <p:sp>
+        <p:nvSpPr>
+          <p:cNvPr id="165" name="Google Shape;165;g3c45024941_0_14:notes"/>
+          <p:cNvSpPr>
+            <a:spLocks noGrp="1" noRot="1" noChangeAspect="1"/>
+          </p:cNvSpPr>
+          <p:nvPr>
+            <p:ph type="sldImg" idx="2"/>
+          </p:nvPr>
+        </p:nvSpPr>
+        <p:spPr>
+          <a:xfrm>
+            <a:off x="685800" y="1143000"/>
+            <a:ext cx="5486400" cy="3086100"/>
+          </a:xfrm>
+          <a:custGeom>
+            <a:avLst/>
+            <a:gdLst/>
+            <a:ahLst/>
+            <a:cxnLst/>
+            <a:rect l="l" t="t" r="r" b="b"/>
+            <a:pathLst>
+              <a:path w="120000" h="120000" extrusionOk="0">
+                <a:moveTo>
+                  <a:pt x="0" y="0"/>
+                </a:moveTo>
+                <a:lnTo>
+                  <a:pt x="120000" y="0"/>
+                </a:lnTo>
+                <a:lnTo>
+                  <a:pt x="120000" y="120000"/>
+                </a:lnTo>
+                <a:lnTo>
+                  <a:pt x="0" y="120000"/>
+                </a:lnTo>
+                <a:close/>
+              </a:path>
+            </a:pathLst>
+          </a:custGeom>
+        </p:spPr>
+      </p:sp>
+      <p:sp>
+        <p:nvSpPr>
+          <p:cNvPr id="166" name="Google Shape;166;g3c45024941_0_14:notes"/>
+          <p:cNvSpPr txBox="1">
+            <a:spLocks noGrp="1"/>
+          </p:cNvSpPr>
+          <p:nvPr>
+            <p:ph type="body" idx="1"/>
+          </p:nvPr>
+        </p:nvSpPr>
+        <p:spPr>
+          <a:xfrm>
+            <a:off x="685800" y="4400550"/>
+            <a:ext cx="5486400" cy="3600600"/>
+          </a:xfrm>
+          <a:prstGeom prst="rect">
+            <a:avLst/>
+          </a:prstGeom>
+        </p:spPr>
+        <p:txBody>
+          <a:bodyPr spcFirstLastPara="1" wrap="square" lIns="91425" tIns="91425" rIns="91425" bIns="91425" anchor="t" anchorCtr="0">
+            <a:noAutofit/>
+          </a:bodyPr>
+          <a:lstStyle/>
+          <a:p>
+            <a:pPr marL="0" lvl="0" indent="0" algn="l" rtl="0">
+              <a:spcBef>
+                <a:spcPts val="0"/>
+              </a:spcBef>
+              <a:spcAft>
+                <a:spcPts val="0"/>
+              </a:spcAft>
+              <a:buNone/>
+            </a:pPr>
+            <a:endParaRPr/>
+          </a:p>
+        </p:txBody>
+      </p:sp>
+      <p:sp>
+        <p:nvSpPr>
+          <p:cNvPr id="167" name="Google Shape;167;g3c45024941_0_14:notes"/>
+          <p:cNvSpPr txBox="1">
+            <a:spLocks noGrp="1"/>
+          </p:cNvSpPr>
+          <p:nvPr>
+            <p:ph type="sldNum" idx="12"/>
+          </p:nvPr>
+        </p:nvSpPr>
+        <p:spPr>
+          <a:xfrm>
+            <a:off x="3884613" y="8685213"/>
+            <a:ext cx="2971800" cy="458700"/>
+          </a:xfrm>
+          <a:prstGeom prst="rect">
+            <a:avLst/>
+          </a:prstGeom>
+        </p:spPr>
+        <p:txBody>
+          <a:bodyPr spcFirstLastPara="1" wrap="square" lIns="91425" tIns="45700" rIns="91425" bIns="45700" anchor="b" anchorCtr="0">
+            <a:noAutofit/>
+          </a:bodyPr>
+          <a:lstStyle/>
+          <a:p>
+            <a:pPr marL="0" lvl="0" indent="0" algn="r" rtl="0">
+              <a:spcBef>
+                <a:spcPts val="0"/>
+              </a:spcBef>
+              <a:spcAft>
+                <a:spcPts val="0"/>
+              </a:spcAft>
+              <a:buClr>
+                <a:srgbClr val="000000"/>
+              </a:buClr>
+              <a:buFont typeface="Arial"/>
+              <a:buNone/>
+            </a:pPr>
+            <a:fld id="{00000000-1234-1234-1234-123412341234}" type="slidenum">
+              <a:rPr lang="en-US"/>
+              <a:t>17</a:t>
+            </a:fld>
+            <a:endParaRPr/>
+          </a:p>
+        </p:txBody>
+      </p:sp>
+    </p:spTree>
     <p:extLst>
       <p:ext uri="{BB962C8B-B14F-4D97-AF65-F5344CB8AC3E}">
         <p14:creationId xmlns:p14="http://schemas.microsoft.com/office/powerpoint/2010/main" val="1055643188"/>
@@ -2117,6 +2424,110 @@
 </file>
 
 <file path=ppt/notesSlides/notesSlide2.xml><?xml version="1.0" encoding="utf-8"?>
+<p:notes xmlns:a="http://schemas.openxmlformats.org/drawingml/2006/main" xmlns:r="http://schemas.openxmlformats.org/officeDocument/2006/relationships" xmlns:p="http://schemas.openxmlformats.org/presentationml/2006/main" showMasterSp="0" showMasterPhAnim="0">
+  <p:cSld>
+    <p:spTree>
+      <p:nvGrpSpPr>
+        <p:cNvPr id="1" name="Shape 91"/>
+        <p:cNvGrpSpPr/>
+        <p:nvPr/>
+      </p:nvGrpSpPr>
+      <p:grpSpPr>
+        <a:xfrm>
+          <a:off x="0" y="0"/>
+          <a:ext cx="0" cy="0"/>
+          <a:chOff x="0" y="0"/>
+          <a:chExt cx="0" cy="0"/>
+        </a:xfrm>
+      </p:grpSpPr>
+      <p:sp>
+        <p:nvSpPr>
+          <p:cNvPr id="92" name="Google Shape;92;p4:notes"/>
+          <p:cNvSpPr txBox="1">
+            <a:spLocks noGrp="1"/>
+          </p:cNvSpPr>
+          <p:nvPr>
+            <p:ph type="body" idx="1"/>
+          </p:nvPr>
+        </p:nvSpPr>
+        <p:spPr>
+          <a:xfrm>
+            <a:off x="685800" y="4400550"/>
+            <a:ext cx="5486400" cy="3600450"/>
+          </a:xfrm>
+          <a:prstGeom prst="rect">
+            <a:avLst/>
+          </a:prstGeom>
+        </p:spPr>
+        <p:txBody>
+          <a:bodyPr spcFirstLastPara="1" wrap="square" lIns="91425" tIns="91425" rIns="91425" bIns="91425" anchor="t" anchorCtr="0">
+            <a:noAutofit/>
+          </a:bodyPr>
+          <a:lstStyle/>
+          <a:p>
+            <a:pPr marL="0" lvl="0" indent="0" algn="l" rtl="0">
+              <a:spcBef>
+                <a:spcPts val="0"/>
+              </a:spcBef>
+              <a:spcAft>
+                <a:spcPts val="0"/>
+              </a:spcAft>
+              <a:buNone/>
+            </a:pPr>
+            <a:endParaRPr/>
+          </a:p>
+        </p:txBody>
+      </p:sp>
+      <p:sp>
+        <p:nvSpPr>
+          <p:cNvPr id="93" name="Google Shape;93;p4:notes"/>
+          <p:cNvSpPr>
+            <a:spLocks noGrp="1" noRot="1" noChangeAspect="1"/>
+          </p:cNvSpPr>
+          <p:nvPr>
+            <p:ph type="sldImg" idx="2"/>
+          </p:nvPr>
+        </p:nvSpPr>
+        <p:spPr>
+          <a:xfrm>
+            <a:off x="685800" y="1143000"/>
+            <a:ext cx="5486400" cy="3086100"/>
+          </a:xfrm>
+          <a:custGeom>
+            <a:avLst/>
+            <a:gdLst/>
+            <a:ahLst/>
+            <a:cxnLst/>
+            <a:rect l="l" t="t" r="r" b="b"/>
+            <a:pathLst>
+              <a:path w="120000" h="120000" extrusionOk="0">
+                <a:moveTo>
+                  <a:pt x="0" y="0"/>
+                </a:moveTo>
+                <a:lnTo>
+                  <a:pt x="120000" y="0"/>
+                </a:lnTo>
+                <a:lnTo>
+                  <a:pt x="120000" y="120000"/>
+                </a:lnTo>
+                <a:lnTo>
+                  <a:pt x="0" y="120000"/>
+                </a:lnTo>
+                <a:close/>
+              </a:path>
+            </a:pathLst>
+          </a:custGeom>
+        </p:spPr>
+      </p:sp>
+    </p:spTree>
+  </p:cSld>
+  <p:clrMapOvr>
+    <a:masterClrMapping/>
+  </p:clrMapOvr>
+</p:notes>
+</file>
+
+<file path=ppt/notesSlides/notesSlide3.xml><?xml version="1.0" encoding="utf-8"?>
 <p:notes xmlns:a="http://schemas.openxmlformats.org/drawingml/2006/main" xmlns:r="http://schemas.openxmlformats.org/officeDocument/2006/relationships" xmlns:p="http://schemas.openxmlformats.org/presentationml/2006/main" showMasterSp="0" showMasterPhAnim="0">
   <p:cSld>
     <p:spTree>
@@ -2225,7 +2636,7 @@
 </p:notes>
 </file>
 
-<file path=ppt/notesSlides/notesSlide3.xml><?xml version="1.0" encoding="utf-8"?>
+<file path=ppt/notesSlides/notesSlide4.xml><?xml version="1.0" encoding="utf-8"?>
 <p:notes xmlns:a="http://schemas.openxmlformats.org/drawingml/2006/main" xmlns:r="http://schemas.openxmlformats.org/officeDocument/2006/relationships" xmlns:p="http://schemas.openxmlformats.org/presentationml/2006/main" showMasterSp="0" showMasterPhAnim="0">
   <p:cSld>
     <p:spTree>
@@ -2361,7 +2772,7 @@
             </a:pPr>
             <a:fld id="{00000000-1234-1234-1234-123412341234}" type="slidenum">
               <a:rPr lang="en-US"/>
-              <a:t>4</a:t>
+              <a:t>5</a:t>
             </a:fld>
             <a:endParaRPr/>
           </a:p>
@@ -2371,161 +2782,6 @@
     <p:extLst>
       <p:ext uri="{BB962C8B-B14F-4D97-AF65-F5344CB8AC3E}">
         <p14:creationId xmlns:p14="http://schemas.microsoft.com/office/powerpoint/2010/main" val="1639478359"/>
-      </p:ext>
-    </p:extLst>
-  </p:cSld>
-  <p:clrMapOvr>
-    <a:masterClrMapping/>
-  </p:clrMapOvr>
-</p:notes>
-</file>
-
-<file path=ppt/notesSlides/notesSlide4.xml><?xml version="1.0" encoding="utf-8"?>
-<p:notes xmlns:a="http://schemas.openxmlformats.org/drawingml/2006/main" xmlns:r="http://schemas.openxmlformats.org/officeDocument/2006/relationships" xmlns:p="http://schemas.openxmlformats.org/presentationml/2006/main" showMasterSp="0" showMasterPhAnim="0">
-  <p:cSld>
-    <p:spTree>
-      <p:nvGrpSpPr>
-        <p:cNvPr id="1" name="Shape 164"/>
-        <p:cNvGrpSpPr/>
-        <p:nvPr/>
-      </p:nvGrpSpPr>
-      <p:grpSpPr>
-        <a:xfrm>
-          <a:off x="0" y="0"/>
-          <a:ext cx="0" cy="0"/>
-          <a:chOff x="0" y="0"/>
-          <a:chExt cx="0" cy="0"/>
-        </a:xfrm>
-      </p:grpSpPr>
-      <p:sp>
-        <p:nvSpPr>
-          <p:cNvPr id="165" name="Google Shape;165;g3c45024941_0_14:notes"/>
-          <p:cNvSpPr>
-            <a:spLocks noGrp="1" noRot="1" noChangeAspect="1"/>
-          </p:cNvSpPr>
-          <p:nvPr>
-            <p:ph type="sldImg" idx="2"/>
-          </p:nvPr>
-        </p:nvSpPr>
-        <p:spPr>
-          <a:xfrm>
-            <a:off x="685800" y="1143000"/>
-            <a:ext cx="5486400" cy="3086100"/>
-          </a:xfrm>
-          <a:custGeom>
-            <a:avLst/>
-            <a:gdLst/>
-            <a:ahLst/>
-            <a:cxnLst/>
-            <a:rect l="l" t="t" r="r" b="b"/>
-            <a:pathLst>
-              <a:path w="120000" h="120000" extrusionOk="0">
-                <a:moveTo>
-                  <a:pt x="0" y="0"/>
-                </a:moveTo>
-                <a:lnTo>
-                  <a:pt x="120000" y="0"/>
-                </a:lnTo>
-                <a:lnTo>
-                  <a:pt x="120000" y="120000"/>
-                </a:lnTo>
-                <a:lnTo>
-                  <a:pt x="0" y="120000"/>
-                </a:lnTo>
-                <a:close/>
-              </a:path>
-            </a:pathLst>
-          </a:custGeom>
-        </p:spPr>
-      </p:sp>
-      <p:sp>
-        <p:nvSpPr>
-          <p:cNvPr id="166" name="Google Shape;166;g3c45024941_0_14:notes"/>
-          <p:cNvSpPr txBox="1">
-            <a:spLocks noGrp="1"/>
-          </p:cNvSpPr>
-          <p:nvPr>
-            <p:ph type="body" idx="1"/>
-          </p:nvPr>
-        </p:nvSpPr>
-        <p:spPr>
-          <a:xfrm>
-            <a:off x="685800" y="4400550"/>
-            <a:ext cx="5486400" cy="3600600"/>
-          </a:xfrm>
-          <a:prstGeom prst="rect">
-            <a:avLst/>
-          </a:prstGeom>
-        </p:spPr>
-        <p:txBody>
-          <a:bodyPr spcFirstLastPara="1" wrap="square" lIns="91425" tIns="91425" rIns="91425" bIns="91425" anchor="t" anchorCtr="0">
-            <a:noAutofit/>
-          </a:bodyPr>
-          <a:lstStyle/>
-          <a:p>
-            <a:pPr marL="0" lvl="0" indent="0" algn="l" rtl="0">
-              <a:spcBef>
-                <a:spcPts val="0"/>
-              </a:spcBef>
-              <a:spcAft>
-                <a:spcPts val="0"/>
-              </a:spcAft>
-              <a:buNone/>
-            </a:pPr>
-            <a:endParaRPr/>
-          </a:p>
-        </p:txBody>
-      </p:sp>
-      <p:sp>
-        <p:nvSpPr>
-          <p:cNvPr id="167" name="Google Shape;167;g3c45024941_0_14:notes"/>
-          <p:cNvSpPr txBox="1">
-            <a:spLocks noGrp="1"/>
-          </p:cNvSpPr>
-          <p:nvPr>
-            <p:ph type="sldNum" idx="12"/>
-          </p:nvPr>
-        </p:nvSpPr>
-        <p:spPr>
-          <a:xfrm>
-            <a:off x="3884613" y="8685213"/>
-            <a:ext cx="2971800" cy="458700"/>
-          </a:xfrm>
-          <a:prstGeom prst="rect">
-            <a:avLst/>
-          </a:prstGeom>
-        </p:spPr>
-        <p:txBody>
-          <a:bodyPr spcFirstLastPara="1" wrap="square" lIns="91425" tIns="45700" rIns="91425" bIns="45700" anchor="b" anchorCtr="0">
-            <a:noAutofit/>
-          </a:bodyPr>
-          <a:lstStyle/>
-          <a:p>
-            <a:pPr marL="0" lvl="0" indent="0" algn="r" rtl="0">
-              <a:spcBef>
-                <a:spcPts val="0"/>
-              </a:spcBef>
-              <a:spcAft>
-                <a:spcPts val="0"/>
-              </a:spcAft>
-              <a:buClr>
-                <a:srgbClr val="000000"/>
-              </a:buClr>
-              <a:buFont typeface="Arial"/>
-              <a:buNone/>
-            </a:pPr>
-            <a:fld id="{00000000-1234-1234-1234-123412341234}" type="slidenum">
-              <a:rPr lang="en-US"/>
-              <a:t>6</a:t>
-            </a:fld>
-            <a:endParaRPr/>
-          </a:p>
-        </p:txBody>
-      </p:sp>
-    </p:spTree>
-    <p:extLst>
-      <p:ext uri="{BB962C8B-B14F-4D97-AF65-F5344CB8AC3E}">
-        <p14:creationId xmlns:p14="http://schemas.microsoft.com/office/powerpoint/2010/main" val="1585040694"/>
       </p:ext>
     </p:extLst>
   </p:cSld>
@@ -2671,7 +2927,7 @@
             </a:pPr>
             <a:fld id="{00000000-1234-1234-1234-123412341234}" type="slidenum">
               <a:rPr lang="en-US"/>
-              <a:t>7</a:t>
+              <a:t>6</a:t>
             </a:fld>
             <a:endParaRPr/>
           </a:p>
@@ -2686,6 +2942,161 @@
 </file>
 
 <file path=ppt/notesSlides/notesSlide6.xml><?xml version="1.0" encoding="utf-8"?>
+<p:notes xmlns:a="http://schemas.openxmlformats.org/drawingml/2006/main" xmlns:r="http://schemas.openxmlformats.org/officeDocument/2006/relationships" xmlns:p="http://schemas.openxmlformats.org/presentationml/2006/main" showMasterSp="0" showMasterPhAnim="0">
+  <p:cSld>
+    <p:spTree>
+      <p:nvGrpSpPr>
+        <p:cNvPr id="1" name="Shape 164"/>
+        <p:cNvGrpSpPr/>
+        <p:nvPr/>
+      </p:nvGrpSpPr>
+      <p:grpSpPr>
+        <a:xfrm>
+          <a:off x="0" y="0"/>
+          <a:ext cx="0" cy="0"/>
+          <a:chOff x="0" y="0"/>
+          <a:chExt cx="0" cy="0"/>
+        </a:xfrm>
+      </p:grpSpPr>
+      <p:sp>
+        <p:nvSpPr>
+          <p:cNvPr id="165" name="Google Shape;165;g3c45024941_0_14:notes"/>
+          <p:cNvSpPr>
+            <a:spLocks noGrp="1" noRot="1" noChangeAspect="1"/>
+          </p:cNvSpPr>
+          <p:nvPr>
+            <p:ph type="sldImg" idx="2"/>
+          </p:nvPr>
+        </p:nvSpPr>
+        <p:spPr>
+          <a:xfrm>
+            <a:off x="685800" y="1143000"/>
+            <a:ext cx="5486400" cy="3086100"/>
+          </a:xfrm>
+          <a:custGeom>
+            <a:avLst/>
+            <a:gdLst/>
+            <a:ahLst/>
+            <a:cxnLst/>
+            <a:rect l="l" t="t" r="r" b="b"/>
+            <a:pathLst>
+              <a:path w="120000" h="120000" extrusionOk="0">
+                <a:moveTo>
+                  <a:pt x="0" y="0"/>
+                </a:moveTo>
+                <a:lnTo>
+                  <a:pt x="120000" y="0"/>
+                </a:lnTo>
+                <a:lnTo>
+                  <a:pt x="120000" y="120000"/>
+                </a:lnTo>
+                <a:lnTo>
+                  <a:pt x="0" y="120000"/>
+                </a:lnTo>
+                <a:close/>
+              </a:path>
+            </a:pathLst>
+          </a:custGeom>
+        </p:spPr>
+      </p:sp>
+      <p:sp>
+        <p:nvSpPr>
+          <p:cNvPr id="166" name="Google Shape;166;g3c45024941_0_14:notes"/>
+          <p:cNvSpPr txBox="1">
+            <a:spLocks noGrp="1"/>
+          </p:cNvSpPr>
+          <p:nvPr>
+            <p:ph type="body" idx="1"/>
+          </p:nvPr>
+        </p:nvSpPr>
+        <p:spPr>
+          <a:xfrm>
+            <a:off x="685800" y="4400550"/>
+            <a:ext cx="5486400" cy="3600600"/>
+          </a:xfrm>
+          <a:prstGeom prst="rect">
+            <a:avLst/>
+          </a:prstGeom>
+        </p:spPr>
+        <p:txBody>
+          <a:bodyPr spcFirstLastPara="1" wrap="square" lIns="91425" tIns="91425" rIns="91425" bIns="91425" anchor="t" anchorCtr="0">
+            <a:noAutofit/>
+          </a:bodyPr>
+          <a:lstStyle/>
+          <a:p>
+            <a:pPr marL="0" lvl="0" indent="0" algn="l" rtl="0">
+              <a:spcBef>
+                <a:spcPts val="0"/>
+              </a:spcBef>
+              <a:spcAft>
+                <a:spcPts val="0"/>
+              </a:spcAft>
+              <a:buNone/>
+            </a:pPr>
+            <a:endParaRPr/>
+          </a:p>
+        </p:txBody>
+      </p:sp>
+      <p:sp>
+        <p:nvSpPr>
+          <p:cNvPr id="167" name="Google Shape;167;g3c45024941_0_14:notes"/>
+          <p:cNvSpPr txBox="1">
+            <a:spLocks noGrp="1"/>
+          </p:cNvSpPr>
+          <p:nvPr>
+            <p:ph type="sldNum" idx="12"/>
+          </p:nvPr>
+        </p:nvSpPr>
+        <p:spPr>
+          <a:xfrm>
+            <a:off x="3884613" y="8685213"/>
+            <a:ext cx="2971800" cy="458700"/>
+          </a:xfrm>
+          <a:prstGeom prst="rect">
+            <a:avLst/>
+          </a:prstGeom>
+        </p:spPr>
+        <p:txBody>
+          <a:bodyPr spcFirstLastPara="1" wrap="square" lIns="91425" tIns="45700" rIns="91425" bIns="45700" anchor="b" anchorCtr="0">
+            <a:noAutofit/>
+          </a:bodyPr>
+          <a:lstStyle/>
+          <a:p>
+            <a:pPr marL="0" lvl="0" indent="0" algn="r" rtl="0">
+              <a:spcBef>
+                <a:spcPts val="0"/>
+              </a:spcBef>
+              <a:spcAft>
+                <a:spcPts val="0"/>
+              </a:spcAft>
+              <a:buClr>
+                <a:srgbClr val="000000"/>
+              </a:buClr>
+              <a:buFont typeface="Arial"/>
+              <a:buNone/>
+            </a:pPr>
+            <a:fld id="{00000000-1234-1234-1234-123412341234}" type="slidenum">
+              <a:rPr lang="en-US"/>
+              <a:t>8</a:t>
+            </a:fld>
+            <a:endParaRPr/>
+          </a:p>
+        </p:txBody>
+      </p:sp>
+    </p:spTree>
+    <p:extLst>
+      <p:ext uri="{BB962C8B-B14F-4D97-AF65-F5344CB8AC3E}">
+        <p14:creationId xmlns:p14="http://schemas.microsoft.com/office/powerpoint/2010/main" val="1585040694"/>
+      </p:ext>
+    </p:extLst>
+  </p:cSld>
+  <p:clrMapOvr>
+    <a:masterClrMapping/>
+  </p:clrMapOvr>
+</p:notes>
+</file>
+
+<file path=ppt/notesSlides/notesSlide7.xml><?xml version="1.0" encoding="utf-8"?>
 <p:notes xmlns:a="http://schemas.openxmlformats.org/drawingml/2006/main" xmlns:r="http://schemas.openxmlformats.org/officeDocument/2006/relationships" xmlns:p="http://schemas.openxmlformats.org/presentationml/2006/main" showMasterSp="0" showMasterPhAnim="0">
   <p:cSld>
     <p:spTree>
@@ -2821,7 +3232,7 @@
             </a:pPr>
             <a:fld id="{00000000-1234-1234-1234-123412341234}" type="slidenum">
               <a:rPr lang="en-US"/>
-              <a:t>8</a:t>
+              <a:t>9</a:t>
             </a:fld>
             <a:endParaRPr/>
           </a:p>
@@ -2830,7 +3241,7 @@
     </p:spTree>
     <p:extLst>
       <p:ext uri="{BB962C8B-B14F-4D97-AF65-F5344CB8AC3E}">
-        <p14:creationId xmlns:p14="http://schemas.microsoft.com/office/powerpoint/2010/main" val="1084832465"/>
+        <p14:creationId xmlns:p14="http://schemas.microsoft.com/office/powerpoint/2010/main" val="3185140277"/>
       </p:ext>
     </p:extLst>
   </p:cSld>
@@ -2840,7 +3251,116 @@
 </p:notes>
 </file>
 
-<file path=ppt/notesSlides/notesSlide7.xml><?xml version="1.0" encoding="utf-8"?>
+<file path=ppt/notesSlides/notesSlide8.xml><?xml version="1.0" encoding="utf-8"?>
+<p:notes xmlns:a="http://schemas.openxmlformats.org/drawingml/2006/main" xmlns:r="http://schemas.openxmlformats.org/officeDocument/2006/relationships" xmlns:p="http://schemas.openxmlformats.org/presentationml/2006/main" showMasterSp="0" showMasterPhAnim="0">
+  <p:cSld>
+    <p:spTree>
+      <p:nvGrpSpPr>
+        <p:cNvPr id="1" name="Shape 84"/>
+        <p:cNvGrpSpPr/>
+        <p:nvPr/>
+      </p:nvGrpSpPr>
+      <p:grpSpPr>
+        <a:xfrm>
+          <a:off x="0" y="0"/>
+          <a:ext cx="0" cy="0"/>
+          <a:chOff x="0" y="0"/>
+          <a:chExt cx="0" cy="0"/>
+        </a:xfrm>
+      </p:grpSpPr>
+      <p:sp>
+        <p:nvSpPr>
+          <p:cNvPr id="85" name="Google Shape;85;p3:notes"/>
+          <p:cNvSpPr txBox="1">
+            <a:spLocks noGrp="1"/>
+          </p:cNvSpPr>
+          <p:nvPr>
+            <p:ph type="body" idx="1"/>
+          </p:nvPr>
+        </p:nvSpPr>
+        <p:spPr>
+          <a:xfrm>
+            <a:off x="685800" y="4400550"/>
+            <a:ext cx="5486400" cy="3600450"/>
+          </a:xfrm>
+          <a:prstGeom prst="rect">
+            <a:avLst/>
+          </a:prstGeom>
+        </p:spPr>
+        <p:txBody>
+          <a:bodyPr spcFirstLastPara="1" wrap="square" lIns="91425" tIns="91425" rIns="91425" bIns="91425" anchor="t" anchorCtr="0">
+            <a:noAutofit/>
+          </a:bodyPr>
+          <a:lstStyle/>
+          <a:p>
+            <a:pPr marL="0" lvl="0" indent="0" algn="l" rtl="0">
+              <a:spcBef>
+                <a:spcPts val="0"/>
+              </a:spcBef>
+              <a:spcAft>
+                <a:spcPts val="0"/>
+              </a:spcAft>
+              <a:buNone/>
+            </a:pPr>
+            <a:endParaRPr/>
+          </a:p>
+        </p:txBody>
+      </p:sp>
+      <p:sp>
+        <p:nvSpPr>
+          <p:cNvPr id="86" name="Google Shape;86;p3:notes"/>
+          <p:cNvSpPr>
+            <a:spLocks noGrp="1" noRot="1" noChangeAspect="1"/>
+          </p:cNvSpPr>
+          <p:nvPr>
+            <p:ph type="sldImg" idx="2"/>
+          </p:nvPr>
+        </p:nvSpPr>
+        <p:spPr>
+          <a:xfrm>
+            <a:off x="685800" y="1143000"/>
+            <a:ext cx="5486400" cy="3086100"/>
+          </a:xfrm>
+          <a:custGeom>
+            <a:avLst/>
+            <a:gdLst/>
+            <a:ahLst/>
+            <a:cxnLst/>
+            <a:rect l="l" t="t" r="r" b="b"/>
+            <a:pathLst>
+              <a:path w="120000" h="120000" extrusionOk="0">
+                <a:moveTo>
+                  <a:pt x="0" y="0"/>
+                </a:moveTo>
+                <a:lnTo>
+                  <a:pt x="120000" y="0"/>
+                </a:lnTo>
+                <a:lnTo>
+                  <a:pt x="120000" y="120000"/>
+                </a:lnTo>
+                <a:lnTo>
+                  <a:pt x="0" y="120000"/>
+                </a:lnTo>
+                <a:close/>
+              </a:path>
+            </a:pathLst>
+          </a:custGeom>
+        </p:spPr>
+      </p:sp>
+    </p:spTree>
+    <p:extLst>
+      <p:ext uri="{BB962C8B-B14F-4D97-AF65-F5344CB8AC3E}">
+        <p14:creationId xmlns:p14="http://schemas.microsoft.com/office/powerpoint/2010/main" val="2615628838"/>
+      </p:ext>
+    </p:extLst>
+  </p:cSld>
+  <p:clrMapOvr>
+    <a:masterClrMapping/>
+  </p:clrMapOvr>
+</p:notes>
+</file>
+
+<file path=ppt/notesSlides/notesSlide9.xml><?xml version="1.0" encoding="utf-8"?>
 <p:notes xmlns:a="http://schemas.openxmlformats.org/drawingml/2006/main" xmlns:r="http://schemas.openxmlformats.org/officeDocument/2006/relationships" xmlns:p="http://schemas.openxmlformats.org/presentationml/2006/main" showMasterSp="0" showMasterPhAnim="0">
   <p:cSld>
     <p:spTree>
@@ -2939,311 +3459,6 @@
       <p:sp>
         <p:nvSpPr>
           <p:cNvPr id="137" name="Google Shape;137;g3803b8d742_0_4:notes"/>
-          <p:cNvSpPr txBox="1">
-            <a:spLocks noGrp="1"/>
-          </p:cNvSpPr>
-          <p:nvPr>
-            <p:ph type="sldNum" idx="12"/>
-          </p:nvPr>
-        </p:nvSpPr>
-        <p:spPr>
-          <a:xfrm>
-            <a:off x="3884613" y="8685213"/>
-            <a:ext cx="2971800" cy="458700"/>
-          </a:xfrm>
-          <a:prstGeom prst="rect">
-            <a:avLst/>
-          </a:prstGeom>
-        </p:spPr>
-        <p:txBody>
-          <a:bodyPr spcFirstLastPara="1" wrap="square" lIns="91425" tIns="45700" rIns="91425" bIns="45700" anchor="b" anchorCtr="0">
-            <a:noAutofit/>
-          </a:bodyPr>
-          <a:lstStyle/>
-          <a:p>
-            <a:pPr marL="0" lvl="0" indent="0" algn="r" rtl="0">
-              <a:spcBef>
-                <a:spcPts val="0"/>
-              </a:spcBef>
-              <a:spcAft>
-                <a:spcPts val="0"/>
-              </a:spcAft>
-              <a:buClr>
-                <a:srgbClr val="000000"/>
-              </a:buClr>
-              <a:buFont typeface="Arial"/>
-              <a:buNone/>
-            </a:pPr>
-            <a:fld id="{00000000-1234-1234-1234-123412341234}" type="slidenum">
-              <a:rPr lang="en-US"/>
-              <a:t>9</a:t>
-            </a:fld>
-            <a:endParaRPr/>
-          </a:p>
-        </p:txBody>
-      </p:sp>
-    </p:spTree>
-  </p:cSld>
-  <p:clrMapOvr>
-    <a:masterClrMapping/>
-  </p:clrMapOvr>
-</p:notes>
-</file>
-
-<file path=ppt/notesSlides/notesSlide8.xml><?xml version="1.0" encoding="utf-8"?>
-<p:notes xmlns:a="http://schemas.openxmlformats.org/drawingml/2006/main" xmlns:r="http://schemas.openxmlformats.org/officeDocument/2006/relationships" xmlns:p="http://schemas.openxmlformats.org/presentationml/2006/main" showMasterSp="0" showMasterPhAnim="0">
-  <p:cSld>
-    <p:spTree>
-      <p:nvGrpSpPr>
-        <p:cNvPr id="1" name="Shape 102"/>
-        <p:cNvGrpSpPr/>
-        <p:nvPr/>
-      </p:nvGrpSpPr>
-      <p:grpSpPr>
-        <a:xfrm>
-          <a:off x="0" y="0"/>
-          <a:ext cx="0" cy="0"/>
-          <a:chOff x="0" y="0"/>
-          <a:chExt cx="0" cy="0"/>
-        </a:xfrm>
-      </p:grpSpPr>
-      <p:sp>
-        <p:nvSpPr>
-          <p:cNvPr id="103" name="Google Shape;103;g3803b8d742_0_15:notes"/>
-          <p:cNvSpPr>
-            <a:spLocks noGrp="1" noRot="1" noChangeAspect="1"/>
-          </p:cNvSpPr>
-          <p:nvPr>
-            <p:ph type="sldImg" idx="2"/>
-          </p:nvPr>
-        </p:nvSpPr>
-        <p:spPr>
-          <a:xfrm>
-            <a:off x="685800" y="1143000"/>
-            <a:ext cx="5486400" cy="3086100"/>
-          </a:xfrm>
-          <a:custGeom>
-            <a:avLst/>
-            <a:gdLst/>
-            <a:ahLst/>
-            <a:cxnLst/>
-            <a:rect l="l" t="t" r="r" b="b"/>
-            <a:pathLst>
-              <a:path w="120000" h="120000" extrusionOk="0">
-                <a:moveTo>
-                  <a:pt x="0" y="0"/>
-                </a:moveTo>
-                <a:lnTo>
-                  <a:pt x="120000" y="0"/>
-                </a:lnTo>
-                <a:lnTo>
-                  <a:pt x="120000" y="120000"/>
-                </a:lnTo>
-                <a:lnTo>
-                  <a:pt x="0" y="120000"/>
-                </a:lnTo>
-                <a:close/>
-              </a:path>
-            </a:pathLst>
-          </a:custGeom>
-        </p:spPr>
-      </p:sp>
-      <p:sp>
-        <p:nvSpPr>
-          <p:cNvPr id="104" name="Google Shape;104;g3803b8d742_0_15:notes"/>
-          <p:cNvSpPr txBox="1">
-            <a:spLocks noGrp="1"/>
-          </p:cNvSpPr>
-          <p:nvPr>
-            <p:ph type="body" idx="1"/>
-          </p:nvPr>
-        </p:nvSpPr>
-        <p:spPr>
-          <a:xfrm>
-            <a:off x="685800" y="4400550"/>
-            <a:ext cx="5486400" cy="3600600"/>
-          </a:xfrm>
-          <a:prstGeom prst="rect">
-            <a:avLst/>
-          </a:prstGeom>
-        </p:spPr>
-        <p:txBody>
-          <a:bodyPr spcFirstLastPara="1" wrap="square" lIns="91425" tIns="91425" rIns="91425" bIns="91425" anchor="t" anchorCtr="0">
-            <a:noAutofit/>
-          </a:bodyPr>
-          <a:lstStyle/>
-          <a:p>
-            <a:pPr marL="0" lvl="0" indent="0" algn="l" rtl="0">
-              <a:spcBef>
-                <a:spcPts val="0"/>
-              </a:spcBef>
-              <a:spcAft>
-                <a:spcPts val="0"/>
-              </a:spcAft>
-              <a:buNone/>
-            </a:pPr>
-            <a:endParaRPr/>
-          </a:p>
-        </p:txBody>
-      </p:sp>
-      <p:sp>
-        <p:nvSpPr>
-          <p:cNvPr id="105" name="Google Shape;105;g3803b8d742_0_15:notes"/>
-          <p:cNvSpPr txBox="1">
-            <a:spLocks noGrp="1"/>
-          </p:cNvSpPr>
-          <p:nvPr>
-            <p:ph type="sldNum" idx="12"/>
-          </p:nvPr>
-        </p:nvSpPr>
-        <p:spPr>
-          <a:xfrm>
-            <a:off x="3884613" y="8685213"/>
-            <a:ext cx="2971800" cy="458700"/>
-          </a:xfrm>
-          <a:prstGeom prst="rect">
-            <a:avLst/>
-          </a:prstGeom>
-        </p:spPr>
-        <p:txBody>
-          <a:bodyPr spcFirstLastPara="1" wrap="square" lIns="91425" tIns="45700" rIns="91425" bIns="45700" anchor="b" anchorCtr="0">
-            <a:noAutofit/>
-          </a:bodyPr>
-          <a:lstStyle/>
-          <a:p>
-            <a:pPr marL="0" lvl="0" indent="0" algn="r" rtl="0">
-              <a:spcBef>
-                <a:spcPts val="0"/>
-              </a:spcBef>
-              <a:spcAft>
-                <a:spcPts val="0"/>
-              </a:spcAft>
-              <a:buClr>
-                <a:srgbClr val="000000"/>
-              </a:buClr>
-              <a:buFont typeface="Arial"/>
-              <a:buNone/>
-            </a:pPr>
-            <a:fld id="{00000000-1234-1234-1234-123412341234}" type="slidenum">
-              <a:rPr lang="en-US"/>
-              <a:t>10</a:t>
-            </a:fld>
-            <a:endParaRPr/>
-          </a:p>
-        </p:txBody>
-      </p:sp>
-    </p:spTree>
-    <p:extLst>
-      <p:ext uri="{BB962C8B-B14F-4D97-AF65-F5344CB8AC3E}">
-        <p14:creationId xmlns:p14="http://schemas.microsoft.com/office/powerpoint/2010/main" val="22345759"/>
-      </p:ext>
-    </p:extLst>
-  </p:cSld>
-  <p:clrMapOvr>
-    <a:masterClrMapping/>
-  </p:clrMapOvr>
-</p:notes>
-</file>
-
-<file path=ppt/notesSlides/notesSlide9.xml><?xml version="1.0" encoding="utf-8"?>
-<p:notes xmlns:a="http://schemas.openxmlformats.org/drawingml/2006/main" xmlns:r="http://schemas.openxmlformats.org/officeDocument/2006/relationships" xmlns:p="http://schemas.openxmlformats.org/presentationml/2006/main" showMasterSp="0" showMasterPhAnim="0">
-  <p:cSld>
-    <p:spTree>
-      <p:nvGrpSpPr>
-        <p:cNvPr id="1" name="Shape 109"/>
-        <p:cNvGrpSpPr/>
-        <p:nvPr/>
-      </p:nvGrpSpPr>
-      <p:grpSpPr>
-        <a:xfrm>
-          <a:off x="0" y="0"/>
-          <a:ext cx="0" cy="0"/>
-          <a:chOff x="0" y="0"/>
-          <a:chExt cx="0" cy="0"/>
-        </a:xfrm>
-      </p:grpSpPr>
-      <p:sp>
-        <p:nvSpPr>
-          <p:cNvPr id="110" name="Google Shape;110;g3c45024941_0_7:notes"/>
-          <p:cNvSpPr>
-            <a:spLocks noGrp="1" noRot="1" noChangeAspect="1"/>
-          </p:cNvSpPr>
-          <p:nvPr>
-            <p:ph type="sldImg" idx="2"/>
-          </p:nvPr>
-        </p:nvSpPr>
-        <p:spPr>
-          <a:xfrm>
-            <a:off x="685800" y="1143000"/>
-            <a:ext cx="5486400" cy="3086100"/>
-          </a:xfrm>
-          <a:custGeom>
-            <a:avLst/>
-            <a:gdLst/>
-            <a:ahLst/>
-            <a:cxnLst/>
-            <a:rect l="l" t="t" r="r" b="b"/>
-            <a:pathLst>
-              <a:path w="120000" h="120000" extrusionOk="0">
-                <a:moveTo>
-                  <a:pt x="0" y="0"/>
-                </a:moveTo>
-                <a:lnTo>
-                  <a:pt x="120000" y="0"/>
-                </a:lnTo>
-                <a:lnTo>
-                  <a:pt x="120000" y="120000"/>
-                </a:lnTo>
-                <a:lnTo>
-                  <a:pt x="0" y="120000"/>
-                </a:lnTo>
-                <a:close/>
-              </a:path>
-            </a:pathLst>
-          </a:custGeom>
-        </p:spPr>
-      </p:sp>
-      <p:sp>
-        <p:nvSpPr>
-          <p:cNvPr id="111" name="Google Shape;111;g3c45024941_0_7:notes"/>
-          <p:cNvSpPr txBox="1">
-            <a:spLocks noGrp="1"/>
-          </p:cNvSpPr>
-          <p:nvPr>
-            <p:ph type="body" idx="1"/>
-          </p:nvPr>
-        </p:nvSpPr>
-        <p:spPr>
-          <a:xfrm>
-            <a:off x="685800" y="4400550"/>
-            <a:ext cx="5486400" cy="3600600"/>
-          </a:xfrm>
-          <a:prstGeom prst="rect">
-            <a:avLst/>
-          </a:prstGeom>
-        </p:spPr>
-        <p:txBody>
-          <a:bodyPr spcFirstLastPara="1" wrap="square" lIns="91425" tIns="91425" rIns="91425" bIns="91425" anchor="t" anchorCtr="0">
-            <a:noAutofit/>
-          </a:bodyPr>
-          <a:lstStyle/>
-          <a:p>
-            <a:pPr marL="0" lvl="0" indent="0" algn="l" rtl="0">
-              <a:spcBef>
-                <a:spcPts val="0"/>
-              </a:spcBef>
-              <a:spcAft>
-                <a:spcPts val="0"/>
-              </a:spcAft>
-              <a:buNone/>
-            </a:pPr>
-            <a:endParaRPr/>
-          </a:p>
-        </p:txBody>
-      </p:sp>
-      <p:sp>
-        <p:nvSpPr>
-          <p:cNvPr id="112" name="Google Shape;112;g3c45024941_0_7:notes"/>
           <p:cNvSpPr txBox="1">
             <a:spLocks noGrp="1"/>
           </p:cNvSpPr>
@@ -16221,8 +16436,8 @@
         </p:nvSpPr>
         <p:spPr>
           <a:xfrm>
-            <a:off x="3047147" y="2279791"/>
-            <a:ext cx="5674500" cy="1149209"/>
+            <a:off x="3047147" y="2006522"/>
+            <a:ext cx="5674500" cy="2050471"/>
           </a:xfrm>
           <a:prstGeom prst="rect">
             <a:avLst/>
@@ -16257,8 +16472,40 @@
                 <a:cs typeface="Calibri"/>
                 <a:sym typeface="Calibri"/>
               </a:rPr>
-              <a:t>What  Is  AI</a:t>
-            </a:r>
+              <a:t>AI</a:t>
+            </a:r>
+          </a:p>
+          <a:p>
+            <a:pPr marL="0" marR="0" lvl="0" indent="0" algn="ctr" rtl="0">
+              <a:spcBef>
+                <a:spcPts val="0"/>
+              </a:spcBef>
+              <a:spcAft>
+                <a:spcPts val="0"/>
+              </a:spcAft>
+              <a:buNone/>
+            </a:pPr>
+            <a:r>
+              <a:rPr lang="en-US" sz="6600" b="1" dirty="0">
+                <a:solidFill>
+                  <a:schemeClr val="dk1"/>
+                </a:solidFill>
+                <a:latin typeface="Calibri"/>
+                <a:ea typeface="Calibri"/>
+                <a:cs typeface="Calibri"/>
+                <a:sym typeface="Calibri"/>
+              </a:rPr>
+              <a:t>Introduction</a:t>
+            </a:r>
+            <a:endParaRPr lang="en-US" sz="6600" b="1" i="0" u="none" strike="noStrike" cap="none" dirty="0">
+              <a:solidFill>
+                <a:schemeClr val="dk1"/>
+              </a:solidFill>
+              <a:latin typeface="Calibri"/>
+              <a:ea typeface="Calibri"/>
+              <a:cs typeface="Calibri"/>
+              <a:sym typeface="Calibri"/>
+            </a:endParaRPr>
           </a:p>
         </p:txBody>
       </p:sp>
@@ -16271,6 +16518,1520 @@
 </file>
 
 <file path=ppt/slides/slide10.xml><?xml version="1.0" encoding="utf-8"?>
+<p:sld xmlns:a="http://schemas.openxmlformats.org/drawingml/2006/main" xmlns:r="http://schemas.openxmlformats.org/officeDocument/2006/relationships" xmlns:p="http://schemas.openxmlformats.org/presentationml/2006/main">
+  <p:cSld>
+    <p:spTree>
+      <p:nvGrpSpPr>
+        <p:cNvPr id="1" name="Shape 87"/>
+        <p:cNvGrpSpPr/>
+        <p:nvPr/>
+      </p:nvGrpSpPr>
+      <p:grpSpPr>
+        <a:xfrm>
+          <a:off x="0" y="0"/>
+          <a:ext cx="0" cy="0"/>
+          <a:chOff x="0" y="0"/>
+          <a:chExt cx="0" cy="0"/>
+        </a:xfrm>
+      </p:grpSpPr>
+      <p:sp>
+        <p:nvSpPr>
+          <p:cNvPr id="88" name="Google Shape;88;p13"/>
+          <p:cNvSpPr txBox="1"/>
+          <p:nvPr/>
+        </p:nvSpPr>
+        <p:spPr>
+          <a:xfrm>
+            <a:off x="36815" y="613888"/>
+            <a:ext cx="9424989" cy="1332408"/>
+          </a:xfrm>
+          <a:prstGeom prst="rect">
+            <a:avLst/>
+          </a:prstGeom>
+          <a:noFill/>
+          <a:ln>
+            <a:noFill/>
+          </a:ln>
+        </p:spPr>
+        <p:txBody>
+          <a:bodyPr spcFirstLastPara="1" wrap="square" lIns="91425" tIns="45700" rIns="91425" bIns="45700" anchor="t" anchorCtr="0">
+            <a:noAutofit/>
+          </a:bodyPr>
+          <a:lstStyle/>
+          <a:p>
+            <a:pPr lvl="0"/>
+            <a:r>
+              <a:rPr lang="en-US" sz="1600" dirty="0">
+                <a:solidFill>
+                  <a:schemeClr val="dk1"/>
+                </a:solidFill>
+                <a:latin typeface="Calibri"/>
+                <a:ea typeface="Calibri"/>
+                <a:cs typeface="Calibri"/>
+                <a:sym typeface="Calibri"/>
+              </a:rPr>
+              <a:t>Modern Neural Networks has become big – up to 175 Billion parameters (GPT-3, in 2020).</a:t>
+            </a:r>
+          </a:p>
+          <a:p>
+            <a:pPr marL="0" marR="0" lvl="0" indent="0" algn="l" rtl="0">
+              <a:spcBef>
+                <a:spcPts val="0"/>
+              </a:spcBef>
+              <a:spcAft>
+                <a:spcPts val="0"/>
+              </a:spcAft>
+              <a:buNone/>
+            </a:pPr>
+            <a:r>
+              <a:rPr lang="en-US" sz="1600" dirty="0">
+                <a:solidFill>
+                  <a:schemeClr val="dk1"/>
+                </a:solidFill>
+                <a:latin typeface="Calibri"/>
+                <a:ea typeface="Calibri"/>
+                <a:cs typeface="Calibri"/>
+                <a:sym typeface="Calibri"/>
+              </a:rPr>
+              <a:t>Common practice today is to split big NNs to train separately (in parallel on multiple computers). </a:t>
+            </a:r>
+            <a:endParaRPr sz="1600" dirty="0"/>
+          </a:p>
+          <a:p>
+            <a:pPr marL="0" marR="0" lvl="0" indent="0" algn="l" rtl="0">
+              <a:spcBef>
+                <a:spcPts val="0"/>
+              </a:spcBef>
+              <a:spcAft>
+                <a:spcPts val="0"/>
+              </a:spcAft>
+              <a:buNone/>
+            </a:pPr>
+            <a:r>
+              <a:rPr lang="en-US" sz="1600" dirty="0">
+                <a:solidFill>
+                  <a:schemeClr val="dk1"/>
+                </a:solidFill>
+                <a:latin typeface="Calibri"/>
+                <a:ea typeface="Calibri"/>
+                <a:cs typeface="Calibri"/>
+                <a:sym typeface="Calibri"/>
+              </a:rPr>
+              <a:t>Inference can also be parallelized.</a:t>
+            </a:r>
+          </a:p>
+        </p:txBody>
+      </p:sp>
+      <p:sp>
+        <p:nvSpPr>
+          <p:cNvPr id="89" name="Google Shape;89;p13"/>
+          <p:cNvSpPr txBox="1"/>
+          <p:nvPr/>
+        </p:nvSpPr>
+        <p:spPr>
+          <a:xfrm>
+            <a:off x="7744666" y="3035135"/>
+            <a:ext cx="1508288" cy="463041"/>
+          </a:xfrm>
+          <a:prstGeom prst="rect">
+            <a:avLst/>
+          </a:prstGeom>
+          <a:noFill/>
+          <a:ln>
+            <a:noFill/>
+          </a:ln>
+        </p:spPr>
+        <p:txBody>
+          <a:bodyPr spcFirstLastPara="1" wrap="square" lIns="91425" tIns="45700" rIns="91425" bIns="45700" anchor="t" anchorCtr="0">
+            <a:noAutofit/>
+          </a:bodyPr>
+          <a:lstStyle>
+            <a:defPPr marR="0" lvl="0" algn="l" rtl="0">
+              <a:lnSpc>
+                <a:spcPct val="100000"/>
+              </a:lnSpc>
+              <a:spcBef>
+                <a:spcPts val="0"/>
+              </a:spcBef>
+              <a:spcAft>
+                <a:spcPts val="0"/>
+              </a:spcAft>
+              <a:defRPr/>
+            </a:defPPr>
+            <a:lvl1pPr marL="0" indent="0">
+              <a:buNone/>
+              <a:defRPr>
+                <a:solidFill>
+                  <a:srgbClr val="0070C0"/>
+                </a:solidFill>
+                <a:latin typeface="Arial" panose="020B0604020202020204" pitchFamily="34" charset="0"/>
+                <a:ea typeface="Calibri"/>
+                <a:cs typeface="Arial" panose="020B0604020202020204" pitchFamily="34" charset="0"/>
+              </a:defRPr>
+            </a:lvl1pPr>
+          </a:lstStyle>
+          <a:p>
+            <a:r>
+              <a:rPr lang="en-US" dirty="0">
+                <a:sym typeface="Calibri"/>
+              </a:rPr>
+              <a:t>Intel </a:t>
+            </a:r>
+            <a:r>
+              <a:rPr lang="en-US" dirty="0" err="1">
+                <a:sym typeface="Calibri"/>
+              </a:rPr>
+              <a:t>Nervana</a:t>
+            </a:r>
+            <a:endParaRPr dirty="0">
+              <a:sym typeface="Calibri"/>
+            </a:endParaRPr>
+          </a:p>
+        </p:txBody>
+      </p:sp>
+      <p:pic>
+        <p:nvPicPr>
+          <p:cNvPr id="90" name="Google Shape;90;p13"/>
+          <p:cNvPicPr preferRelativeResize="0"/>
+          <p:nvPr/>
+        </p:nvPicPr>
+        <p:blipFill rotWithShape="1">
+          <a:blip r:embed="rId3" cstate="email">
+            <a:alphaModFix/>
+            <a:extLst>
+              <a:ext uri="{28A0092B-C50C-407E-A947-70E740481C1C}">
+                <a14:useLocalDpi xmlns:a14="http://schemas.microsoft.com/office/drawing/2010/main"/>
+              </a:ext>
+            </a:extLst>
+          </a:blip>
+          <a:srcRect l="9992" r="7552"/>
+          <a:stretch/>
+        </p:blipFill>
+        <p:spPr>
+          <a:xfrm>
+            <a:off x="253542" y="1621825"/>
+            <a:ext cx="2109789" cy="835668"/>
+          </a:xfrm>
+          <a:prstGeom prst="rect">
+            <a:avLst/>
+          </a:prstGeom>
+          <a:noFill/>
+          <a:ln>
+            <a:noFill/>
+          </a:ln>
+        </p:spPr>
+      </p:pic>
+      <p:sp>
+        <p:nvSpPr>
+          <p:cNvPr id="91" name="Google Shape;91;p13"/>
+          <p:cNvSpPr txBox="1"/>
+          <p:nvPr/>
+        </p:nvSpPr>
+        <p:spPr>
+          <a:xfrm>
+            <a:off x="253542" y="2457493"/>
+            <a:ext cx="1954113" cy="335012"/>
+          </a:xfrm>
+          <a:prstGeom prst="rect">
+            <a:avLst/>
+          </a:prstGeom>
+          <a:noFill/>
+          <a:ln>
+            <a:noFill/>
+          </a:ln>
+        </p:spPr>
+        <p:txBody>
+          <a:bodyPr spcFirstLastPara="1" wrap="square" lIns="91425" tIns="45700" rIns="91425" bIns="45700" anchor="t" anchorCtr="0">
+            <a:noAutofit/>
+          </a:bodyPr>
+          <a:lstStyle/>
+          <a:p>
+            <a:pPr marL="0" marR="0" lvl="0" indent="0" rtl="0">
+              <a:spcBef>
+                <a:spcPts val="0"/>
+              </a:spcBef>
+              <a:spcAft>
+                <a:spcPts val="0"/>
+              </a:spcAft>
+              <a:buNone/>
+            </a:pPr>
+            <a:r>
+              <a:rPr lang="en-US" dirty="0">
+                <a:solidFill>
+                  <a:srgbClr val="0070C0"/>
+                </a:solidFill>
+                <a:latin typeface="Arial" panose="020B0604020202020204" pitchFamily="34" charset="0"/>
+                <a:ea typeface="Calibri"/>
+                <a:cs typeface="Arial" panose="020B0604020202020204" pitchFamily="34" charset="0"/>
+                <a:sym typeface="Calibri"/>
+              </a:rPr>
+              <a:t>GPU (NVIDIA, CUDA)</a:t>
+            </a:r>
+            <a:endParaRPr dirty="0">
+              <a:solidFill>
+                <a:srgbClr val="0070C0"/>
+              </a:solidFill>
+              <a:latin typeface="Arial" panose="020B0604020202020204" pitchFamily="34" charset="0"/>
+              <a:ea typeface="Calibri"/>
+              <a:cs typeface="Arial" panose="020B0604020202020204" pitchFamily="34" charset="0"/>
+              <a:sym typeface="Calibri"/>
+            </a:endParaRPr>
+          </a:p>
+        </p:txBody>
+      </p:sp>
+      <p:sp>
+        <p:nvSpPr>
+          <p:cNvPr id="92" name="Google Shape;92;p13"/>
+          <p:cNvSpPr txBox="1"/>
+          <p:nvPr/>
+        </p:nvSpPr>
+        <p:spPr>
+          <a:xfrm>
+            <a:off x="2436185" y="3325442"/>
+            <a:ext cx="2666450" cy="1657116"/>
+          </a:xfrm>
+          <a:prstGeom prst="rect">
+            <a:avLst/>
+          </a:prstGeom>
+          <a:noFill/>
+          <a:ln>
+            <a:noFill/>
+          </a:ln>
+        </p:spPr>
+        <p:txBody>
+          <a:bodyPr spcFirstLastPara="1" wrap="square" lIns="91425" tIns="45700" rIns="91425" bIns="45700" anchor="t" anchorCtr="0">
+            <a:noAutofit/>
+          </a:bodyPr>
+          <a:lstStyle>
+            <a:defPPr marR="0" lvl="0" algn="l" rtl="0">
+              <a:lnSpc>
+                <a:spcPct val="100000"/>
+              </a:lnSpc>
+              <a:spcBef>
+                <a:spcPts val="0"/>
+              </a:spcBef>
+              <a:spcAft>
+                <a:spcPts val="0"/>
+              </a:spcAft>
+            </a:defPPr>
+            <a:lvl1pPr marL="0" indent="0">
+              <a:buNone/>
+              <a:defRPr>
+                <a:solidFill>
+                  <a:srgbClr val="0070C0"/>
+                </a:solidFill>
+                <a:latin typeface="Arial" panose="020B0604020202020204" pitchFamily="34" charset="0"/>
+                <a:ea typeface="Calibri"/>
+                <a:cs typeface="Arial" panose="020B0604020202020204" pitchFamily="34" charset="0"/>
+              </a:defRPr>
+            </a:lvl1pPr>
+          </a:lstStyle>
+          <a:p>
+            <a:r>
+              <a:rPr lang="en-US" dirty="0">
+                <a:sym typeface="Calibri"/>
+              </a:rPr>
+              <a:t>Google TPU v4  (2021)</a:t>
+            </a:r>
+            <a:endParaRPr dirty="0"/>
+          </a:p>
+          <a:p>
+            <a:r>
+              <a:rPr lang="en-US" dirty="0">
+                <a:sym typeface="Calibri"/>
+              </a:rPr>
+              <a:t>(Tensor Processing Unit)</a:t>
+            </a:r>
+            <a:endParaRPr dirty="0">
+              <a:sym typeface="Calibri"/>
+            </a:endParaRPr>
+          </a:p>
+          <a:p>
+            <a:r>
+              <a:rPr lang="en-US" dirty="0"/>
+              <a:t>A single v4 pod contains 4,096 v4 chips, and can deliver more than one </a:t>
+            </a:r>
+            <a:r>
+              <a:rPr lang="en-US" dirty="0" err="1"/>
+              <a:t>exaFLOPS</a:t>
+            </a:r>
+            <a:r>
+              <a:rPr lang="en-US" dirty="0"/>
+              <a:t> (1018 Floating Point Operations per sec)</a:t>
+            </a:r>
+            <a:endParaRPr dirty="0">
+              <a:sym typeface="Calibri"/>
+            </a:endParaRPr>
+          </a:p>
+        </p:txBody>
+      </p:sp>
+      <p:pic>
+        <p:nvPicPr>
+          <p:cNvPr id="93" name="Google Shape;93;p13"/>
+          <p:cNvPicPr preferRelativeResize="0"/>
+          <p:nvPr/>
+        </p:nvPicPr>
+        <p:blipFill rotWithShape="1">
+          <a:blip r:embed="rId4" cstate="email">
+            <a:alphaModFix/>
+            <a:extLst>
+              <a:ext uri="{28A0092B-C50C-407E-A947-70E740481C1C}">
+                <a14:useLocalDpi xmlns:a14="http://schemas.microsoft.com/office/drawing/2010/main"/>
+              </a:ext>
+            </a:extLst>
+          </a:blip>
+          <a:srcRect/>
+          <a:stretch/>
+        </p:blipFill>
+        <p:spPr>
+          <a:xfrm>
+            <a:off x="7424761" y="1630599"/>
+            <a:ext cx="2084228" cy="1288560"/>
+          </a:xfrm>
+          <a:prstGeom prst="rect">
+            <a:avLst/>
+          </a:prstGeom>
+          <a:noFill/>
+          <a:ln>
+            <a:noFill/>
+          </a:ln>
+        </p:spPr>
+      </p:pic>
+      <p:sp>
+        <p:nvSpPr>
+          <p:cNvPr id="94" name="Google Shape;94;p13"/>
+          <p:cNvSpPr txBox="1"/>
+          <p:nvPr/>
+        </p:nvSpPr>
+        <p:spPr>
+          <a:xfrm>
+            <a:off x="8246847" y="4302767"/>
+            <a:ext cx="3017935" cy="2413338"/>
+          </a:xfrm>
+          <a:prstGeom prst="rect">
+            <a:avLst/>
+          </a:prstGeom>
+          <a:noFill/>
+          <a:ln>
+            <a:noFill/>
+          </a:ln>
+        </p:spPr>
+        <p:txBody>
+          <a:bodyPr spcFirstLastPara="1" wrap="square" lIns="91425" tIns="45700" rIns="91425" bIns="45700" anchor="t" anchorCtr="0">
+            <a:noAutofit/>
+          </a:bodyPr>
+          <a:lstStyle/>
+          <a:p>
+            <a:pPr marL="0" marR="0" lvl="0" indent="0" algn="l" rtl="0">
+              <a:spcBef>
+                <a:spcPts val="0"/>
+              </a:spcBef>
+              <a:spcAft>
+                <a:spcPts val="0"/>
+              </a:spcAft>
+              <a:buNone/>
+            </a:pPr>
+            <a:r>
+              <a:rPr lang="en-US" b="1" dirty="0">
+                <a:solidFill>
+                  <a:schemeClr val="dk1"/>
+                </a:solidFill>
+                <a:latin typeface="Calibri"/>
+                <a:ea typeface="Calibri"/>
+                <a:cs typeface="Calibri"/>
+                <a:sym typeface="Calibri"/>
+              </a:rPr>
+              <a:t>There are also many other vendors:</a:t>
+            </a:r>
+          </a:p>
+          <a:p>
+            <a:pPr marL="285750" marR="0" lvl="0" indent="-285750" algn="l" rtl="0">
+              <a:spcBef>
+                <a:spcPts val="0"/>
+              </a:spcBef>
+              <a:spcAft>
+                <a:spcPts val="0"/>
+              </a:spcAft>
+              <a:buFont typeface="Arial" panose="020B0604020202020204" pitchFamily="34" charset="0"/>
+              <a:buChar char="•"/>
+            </a:pPr>
+            <a:r>
+              <a:rPr lang="en-US" dirty="0">
+                <a:solidFill>
+                  <a:schemeClr val="dk1"/>
+                </a:solidFill>
+                <a:latin typeface="Calibri"/>
+                <a:ea typeface="Calibri"/>
+                <a:cs typeface="Calibri"/>
+                <a:sym typeface="Calibri"/>
+              </a:rPr>
+              <a:t>QUALCOMM</a:t>
+            </a:r>
+          </a:p>
+          <a:p>
+            <a:pPr marL="285750" marR="0" lvl="0" indent="-285750" algn="l" rtl="0">
+              <a:spcBef>
+                <a:spcPts val="0"/>
+              </a:spcBef>
+              <a:spcAft>
+                <a:spcPts val="0"/>
+              </a:spcAft>
+              <a:buFont typeface="Arial" panose="020B0604020202020204" pitchFamily="34" charset="0"/>
+              <a:buChar char="•"/>
+            </a:pPr>
+            <a:r>
+              <a:rPr lang="en-US" dirty="0">
+                <a:solidFill>
+                  <a:schemeClr val="dk1"/>
+                </a:solidFill>
+                <a:latin typeface="Calibri"/>
+                <a:ea typeface="Calibri"/>
+                <a:cs typeface="Calibri"/>
+                <a:sym typeface="Calibri"/>
+              </a:rPr>
+              <a:t>AMD</a:t>
+            </a:r>
+          </a:p>
+          <a:p>
+            <a:pPr marL="285750" marR="0" lvl="0" indent="-285750" algn="l" rtl="0">
+              <a:spcBef>
+                <a:spcPts val="0"/>
+              </a:spcBef>
+              <a:spcAft>
+                <a:spcPts val="0"/>
+              </a:spcAft>
+              <a:buFont typeface="Arial" panose="020B0604020202020204" pitchFamily="34" charset="0"/>
+              <a:buChar char="•"/>
+            </a:pPr>
+            <a:r>
+              <a:rPr lang="en-US" dirty="0">
+                <a:solidFill>
+                  <a:schemeClr val="dk1"/>
+                </a:solidFill>
+                <a:latin typeface="Calibri"/>
+                <a:ea typeface="Calibri"/>
+                <a:cs typeface="Calibri"/>
+                <a:sym typeface="Calibri"/>
+              </a:rPr>
+              <a:t>APPLE</a:t>
+            </a:r>
+          </a:p>
+          <a:p>
+            <a:pPr marL="285750" marR="0" lvl="0" indent="-285750" algn="l" rtl="0">
+              <a:spcBef>
+                <a:spcPts val="0"/>
+              </a:spcBef>
+              <a:spcAft>
+                <a:spcPts val="0"/>
+              </a:spcAft>
+              <a:buFont typeface="Arial" panose="020B0604020202020204" pitchFamily="34" charset="0"/>
+              <a:buChar char="•"/>
+            </a:pPr>
+            <a:r>
+              <a:rPr lang="en-US" dirty="0">
+                <a:solidFill>
+                  <a:schemeClr val="dk1"/>
+                </a:solidFill>
+                <a:latin typeface="Calibri"/>
+                <a:ea typeface="Calibri"/>
+                <a:cs typeface="Calibri"/>
+                <a:sym typeface="Calibri"/>
+              </a:rPr>
+              <a:t>Xilinx</a:t>
+            </a:r>
+          </a:p>
+          <a:p>
+            <a:pPr marL="285750" marR="0" lvl="0" indent="-285750" algn="l" rtl="0">
+              <a:spcBef>
+                <a:spcPts val="0"/>
+              </a:spcBef>
+              <a:spcAft>
+                <a:spcPts val="0"/>
+              </a:spcAft>
+              <a:buFont typeface="Arial" panose="020B0604020202020204" pitchFamily="34" charset="0"/>
+              <a:buChar char="•"/>
+            </a:pPr>
+            <a:r>
+              <a:rPr lang="en-US" dirty="0">
+                <a:solidFill>
+                  <a:schemeClr val="dk1"/>
+                </a:solidFill>
+                <a:latin typeface="Calibri"/>
+                <a:ea typeface="Calibri"/>
+                <a:cs typeface="Calibri"/>
+                <a:sym typeface="Calibri"/>
+              </a:rPr>
+              <a:t>IBM</a:t>
+            </a:r>
+          </a:p>
+          <a:p>
+            <a:pPr marL="285750" marR="0" lvl="0" indent="-285750" algn="l" rtl="0">
+              <a:spcBef>
+                <a:spcPts val="0"/>
+              </a:spcBef>
+              <a:spcAft>
+                <a:spcPts val="0"/>
+              </a:spcAft>
+              <a:buFont typeface="Arial" panose="020B0604020202020204" pitchFamily="34" charset="0"/>
+              <a:buChar char="•"/>
+            </a:pPr>
+            <a:r>
+              <a:rPr lang="en-US" dirty="0" err="1">
+                <a:solidFill>
+                  <a:schemeClr val="dk1"/>
+                </a:solidFill>
+                <a:latin typeface="Calibri"/>
+                <a:ea typeface="Calibri"/>
+                <a:cs typeface="Calibri"/>
+                <a:sym typeface="Calibri"/>
+              </a:rPr>
+              <a:t>HiSilicon</a:t>
+            </a:r>
+            <a:endParaRPr lang="en-US" dirty="0">
+              <a:solidFill>
+                <a:schemeClr val="dk1"/>
+              </a:solidFill>
+              <a:latin typeface="Calibri"/>
+              <a:ea typeface="Calibri"/>
+              <a:cs typeface="Calibri"/>
+              <a:sym typeface="Calibri"/>
+            </a:endParaRPr>
+          </a:p>
+          <a:p>
+            <a:pPr marL="285750" marR="0" lvl="0" indent="-285750" algn="l" rtl="0">
+              <a:spcBef>
+                <a:spcPts val="0"/>
+              </a:spcBef>
+              <a:spcAft>
+                <a:spcPts val="0"/>
+              </a:spcAft>
+              <a:buFont typeface="Arial" panose="020B0604020202020204" pitchFamily="34" charset="0"/>
+              <a:buChar char="•"/>
+            </a:pPr>
+            <a:r>
+              <a:rPr lang="en-US" dirty="0">
+                <a:solidFill>
+                  <a:schemeClr val="dk1"/>
+                </a:solidFill>
+                <a:latin typeface="Calibri"/>
+                <a:ea typeface="Calibri"/>
+                <a:cs typeface="Calibri"/>
+                <a:sym typeface="Calibri"/>
+              </a:rPr>
+              <a:t>Amazon (</a:t>
+            </a:r>
+            <a:r>
+              <a:rPr lang="en-US" b="1" dirty="0">
+                <a:solidFill>
+                  <a:schemeClr val="dk1"/>
+                </a:solidFill>
+                <a:latin typeface="Calibri"/>
+                <a:ea typeface="Calibri"/>
+                <a:cs typeface="Calibri"/>
+                <a:sym typeface="Calibri"/>
+              </a:rPr>
+              <a:t>FPGAs</a:t>
+            </a:r>
+            <a:r>
+              <a:rPr lang="en-US" dirty="0">
+                <a:solidFill>
+                  <a:schemeClr val="dk1"/>
+                </a:solidFill>
+                <a:latin typeface="Calibri"/>
+                <a:ea typeface="Calibri"/>
+                <a:cs typeface="Calibri"/>
+                <a:sym typeface="Calibri"/>
+              </a:rPr>
+              <a:t>)</a:t>
+            </a:r>
+          </a:p>
+          <a:p>
+            <a:pPr marL="285750" marR="0" lvl="0" indent="-285750" algn="l" rtl="0">
+              <a:spcBef>
+                <a:spcPts val="0"/>
+              </a:spcBef>
+              <a:spcAft>
+                <a:spcPts val="0"/>
+              </a:spcAft>
+              <a:buFont typeface="Arial" panose="020B0604020202020204" pitchFamily="34" charset="0"/>
+              <a:buChar char="•"/>
+            </a:pPr>
+            <a:r>
+              <a:rPr lang="en-US" dirty="0">
+                <a:solidFill>
+                  <a:schemeClr val="dk1"/>
+                </a:solidFill>
+                <a:latin typeface="Calibri"/>
+                <a:ea typeface="Calibri"/>
+                <a:cs typeface="Calibri"/>
+                <a:sym typeface="Calibri"/>
+              </a:rPr>
+              <a:t>Microsoft (</a:t>
+            </a:r>
+            <a:r>
+              <a:rPr lang="en-US" b="1" dirty="0">
+                <a:solidFill>
+                  <a:schemeClr val="dk1"/>
+                </a:solidFill>
+                <a:latin typeface="Calibri"/>
+                <a:ea typeface="Calibri"/>
+                <a:cs typeface="Calibri"/>
+                <a:sym typeface="Calibri"/>
+              </a:rPr>
+              <a:t>FPGAs</a:t>
+            </a:r>
+            <a:r>
+              <a:rPr lang="en-US" dirty="0">
+                <a:solidFill>
+                  <a:schemeClr val="dk1"/>
+                </a:solidFill>
+                <a:latin typeface="Calibri"/>
+                <a:ea typeface="Calibri"/>
+                <a:cs typeface="Calibri"/>
+                <a:sym typeface="Calibri"/>
+              </a:rPr>
+              <a:t>)</a:t>
+            </a:r>
+          </a:p>
+          <a:p>
+            <a:pPr marL="285750" marR="0" lvl="0" indent="-285750" algn="l" rtl="0">
+              <a:spcBef>
+                <a:spcPts val="0"/>
+              </a:spcBef>
+              <a:spcAft>
+                <a:spcPts val="0"/>
+              </a:spcAft>
+              <a:buFont typeface="Arial" panose="020B0604020202020204" pitchFamily="34" charset="0"/>
+              <a:buChar char="•"/>
+            </a:pPr>
+            <a:r>
+              <a:rPr lang="en-US" dirty="0">
+                <a:solidFill>
+                  <a:schemeClr val="dk1"/>
+                </a:solidFill>
+                <a:latin typeface="Calibri"/>
+                <a:ea typeface="Calibri"/>
+                <a:cs typeface="Calibri"/>
+                <a:sym typeface="Calibri"/>
+              </a:rPr>
+              <a:t>and many more</a:t>
+            </a:r>
+          </a:p>
+        </p:txBody>
+      </p:sp>
+      <p:pic>
+        <p:nvPicPr>
+          <p:cNvPr id="95" name="Google Shape;95;p13"/>
+          <p:cNvPicPr preferRelativeResize="0"/>
+          <p:nvPr/>
+        </p:nvPicPr>
+        <p:blipFill rotWithShape="1">
+          <a:blip r:embed="rId5">
+            <a:alphaModFix/>
+          </a:blip>
+          <a:srcRect/>
+          <a:stretch/>
+        </p:blipFill>
+        <p:spPr>
+          <a:xfrm>
+            <a:off x="9810373" y="1509605"/>
+            <a:ext cx="2244710" cy="1516313"/>
+          </a:xfrm>
+          <a:prstGeom prst="rect">
+            <a:avLst/>
+          </a:prstGeom>
+          <a:noFill/>
+          <a:ln>
+            <a:noFill/>
+          </a:ln>
+        </p:spPr>
+      </p:pic>
+      <p:sp>
+        <p:nvSpPr>
+          <p:cNvPr id="96" name="Google Shape;96;p13"/>
+          <p:cNvSpPr txBox="1"/>
+          <p:nvPr/>
+        </p:nvSpPr>
+        <p:spPr>
+          <a:xfrm>
+            <a:off x="10210492" y="3051276"/>
+            <a:ext cx="1444473" cy="446900"/>
+          </a:xfrm>
+          <a:prstGeom prst="rect">
+            <a:avLst/>
+          </a:prstGeom>
+          <a:noFill/>
+          <a:ln>
+            <a:noFill/>
+          </a:ln>
+        </p:spPr>
+        <p:txBody>
+          <a:bodyPr spcFirstLastPara="1" wrap="square" lIns="91425" tIns="45700" rIns="91425" bIns="45700" anchor="t" anchorCtr="0">
+            <a:noAutofit/>
+          </a:bodyPr>
+          <a:lstStyle>
+            <a:defPPr marR="0" lvl="0" algn="l" rtl="0">
+              <a:lnSpc>
+                <a:spcPct val="100000"/>
+              </a:lnSpc>
+              <a:spcBef>
+                <a:spcPts val="0"/>
+              </a:spcBef>
+              <a:spcAft>
+                <a:spcPts val="0"/>
+              </a:spcAft>
+              <a:defRPr/>
+            </a:defPPr>
+            <a:lvl1pPr marL="0" indent="0">
+              <a:buNone/>
+              <a:defRPr>
+                <a:solidFill>
+                  <a:srgbClr val="0070C0"/>
+                </a:solidFill>
+                <a:latin typeface="Arial" panose="020B0604020202020204" pitchFamily="34" charset="0"/>
+                <a:ea typeface="Calibri"/>
+                <a:cs typeface="Arial" panose="020B0604020202020204" pitchFamily="34" charset="0"/>
+              </a:defRPr>
+            </a:lvl1pPr>
+          </a:lstStyle>
+          <a:p>
+            <a:r>
+              <a:rPr lang="en-US" dirty="0">
+                <a:sym typeface="Calibri"/>
+              </a:rPr>
+              <a:t>Tesla &amp; AMD</a:t>
+            </a:r>
+            <a:endParaRPr dirty="0"/>
+          </a:p>
+        </p:txBody>
+      </p:sp>
+      <p:pic>
+        <p:nvPicPr>
+          <p:cNvPr id="99" name="Google Shape;99;p13"/>
+          <p:cNvPicPr preferRelativeResize="0"/>
+          <p:nvPr/>
+        </p:nvPicPr>
+        <p:blipFill>
+          <a:blip r:embed="rId6" cstate="email">
+            <a:alphaModFix/>
+            <a:extLst>
+              <a:ext uri="{28A0092B-C50C-407E-A947-70E740481C1C}">
+                <a14:useLocalDpi xmlns:a14="http://schemas.microsoft.com/office/drawing/2010/main"/>
+              </a:ext>
+            </a:extLst>
+          </a:blip>
+          <a:stretch>
+            <a:fillRect/>
+          </a:stretch>
+        </p:blipFill>
+        <p:spPr>
+          <a:xfrm>
+            <a:off x="2436185" y="1630598"/>
+            <a:ext cx="2666450" cy="1657116"/>
+          </a:xfrm>
+          <a:prstGeom prst="rect">
+            <a:avLst/>
+          </a:prstGeom>
+          <a:noFill/>
+          <a:ln>
+            <a:noFill/>
+          </a:ln>
+        </p:spPr>
+      </p:pic>
+      <p:pic>
+        <p:nvPicPr>
+          <p:cNvPr id="2" name="Picture 1">
+            <a:extLst>
+              <a:ext uri="{FF2B5EF4-FFF2-40B4-BE49-F238E27FC236}">
+                <a16:creationId xmlns:a16="http://schemas.microsoft.com/office/drawing/2014/main" id="{2CBC2368-8E51-C84A-99B4-F5699B57558E}"/>
+              </a:ext>
+            </a:extLst>
+          </p:cNvPr>
+          <p:cNvPicPr>
+            <a:picLocks noChangeAspect="1"/>
+          </p:cNvPicPr>
+          <p:nvPr/>
+        </p:nvPicPr>
+        <p:blipFill>
+          <a:blip r:embed="rId7" cstate="email">
+            <a:extLst>
+              <a:ext uri="{28A0092B-C50C-407E-A947-70E740481C1C}">
+                <a14:useLocalDpi xmlns:a14="http://schemas.microsoft.com/office/drawing/2010/main"/>
+              </a:ext>
+            </a:extLst>
+          </a:blip>
+          <a:stretch>
+            <a:fillRect/>
+          </a:stretch>
+        </p:blipFill>
+        <p:spPr>
+          <a:xfrm>
+            <a:off x="5368466" y="1745737"/>
+            <a:ext cx="1638300" cy="1231900"/>
+          </a:xfrm>
+          <a:prstGeom prst="rect">
+            <a:avLst/>
+          </a:prstGeom>
+        </p:spPr>
+      </p:pic>
+      <p:sp>
+        <p:nvSpPr>
+          <p:cNvPr id="3" name="TextBox 2">
+            <a:extLst>
+              <a:ext uri="{FF2B5EF4-FFF2-40B4-BE49-F238E27FC236}">
+                <a16:creationId xmlns:a16="http://schemas.microsoft.com/office/drawing/2014/main" id="{5161AA33-3E80-DE43-BCD6-8FB23D0229DC}"/>
+              </a:ext>
+            </a:extLst>
+          </p:cNvPr>
+          <p:cNvSpPr txBox="1"/>
+          <p:nvPr/>
+        </p:nvSpPr>
+        <p:spPr>
+          <a:xfrm>
+            <a:off x="5290275" y="2998805"/>
+            <a:ext cx="1926314" cy="523220"/>
+          </a:xfrm>
+          <a:prstGeom prst="rect">
+            <a:avLst/>
+          </a:prstGeom>
+          <a:noFill/>
+          <a:ln>
+            <a:noFill/>
+          </a:ln>
+        </p:spPr>
+        <p:txBody>
+          <a:bodyPr spcFirstLastPara="1" wrap="square" lIns="91425" tIns="45700" rIns="91425" bIns="45700" anchor="t" anchorCtr="0">
+            <a:noAutofit/>
+          </a:bodyPr>
+          <a:lstStyle>
+            <a:defPPr marR="0" lvl="0" algn="l" rtl="0">
+              <a:lnSpc>
+                <a:spcPct val="100000"/>
+              </a:lnSpc>
+              <a:spcBef>
+                <a:spcPts val="0"/>
+              </a:spcBef>
+              <a:spcAft>
+                <a:spcPts val="0"/>
+              </a:spcAft>
+              <a:defRPr/>
+            </a:defPPr>
+            <a:lvl1pPr marL="0" indent="0">
+              <a:buNone/>
+              <a:defRPr>
+                <a:solidFill>
+                  <a:srgbClr val="0070C0"/>
+                </a:solidFill>
+                <a:latin typeface="Arial" panose="020B0604020202020204" pitchFamily="34" charset="0"/>
+                <a:ea typeface="Calibri"/>
+                <a:cs typeface="Arial" panose="020B0604020202020204" pitchFamily="34" charset="0"/>
+              </a:defRPr>
+            </a:lvl1pPr>
+          </a:lstStyle>
+          <a:p>
+            <a:r>
+              <a:rPr lang="en-US" dirty="0"/>
+              <a:t>Facebook Zion Accelerator Platform</a:t>
+            </a:r>
+          </a:p>
+        </p:txBody>
+      </p:sp>
+      <p:sp>
+        <p:nvSpPr>
+          <p:cNvPr id="16" name="Google Shape;88;p13">
+            <a:extLst>
+              <a:ext uri="{FF2B5EF4-FFF2-40B4-BE49-F238E27FC236}">
+                <a16:creationId xmlns:a16="http://schemas.microsoft.com/office/drawing/2014/main" id="{95270EE8-073A-9144-90CC-23DF4BDA55DA}"/>
+              </a:ext>
+            </a:extLst>
+          </p:cNvPr>
+          <p:cNvSpPr txBox="1"/>
+          <p:nvPr/>
+        </p:nvSpPr>
+        <p:spPr>
+          <a:xfrm>
+            <a:off x="0" y="37478"/>
+            <a:ext cx="5190565" cy="536645"/>
+          </a:xfrm>
+          <a:prstGeom prst="rect">
+            <a:avLst/>
+          </a:prstGeom>
+          <a:noFill/>
+          <a:ln>
+            <a:noFill/>
+          </a:ln>
+        </p:spPr>
+        <p:txBody>
+          <a:bodyPr spcFirstLastPara="1" wrap="square" lIns="91425" tIns="45700" rIns="91425" bIns="45700" anchor="t" anchorCtr="0">
+            <a:noAutofit/>
+          </a:bodyPr>
+          <a:lstStyle/>
+          <a:p>
+            <a:pPr marL="0" marR="0" lvl="0" indent="0" algn="l" rtl="0">
+              <a:spcBef>
+                <a:spcPts val="0"/>
+              </a:spcBef>
+              <a:spcAft>
+                <a:spcPts val="0"/>
+              </a:spcAft>
+              <a:buNone/>
+            </a:pPr>
+            <a:r>
+              <a:rPr lang="en-US" sz="2800" b="1" i="0" u="none" strike="noStrike" cap="none" dirty="0">
+                <a:solidFill>
+                  <a:schemeClr val="dk1"/>
+                </a:solidFill>
+                <a:latin typeface="+mn-lt"/>
+                <a:ea typeface="Calibri"/>
+                <a:cs typeface="Calibri"/>
+                <a:sym typeface="Calibri"/>
+              </a:rPr>
+              <a:t>Specialized </a:t>
+            </a:r>
+            <a:r>
+              <a:rPr lang="en-US" sz="2800" b="1" u="none" strike="noStrike" cap="none" dirty="0">
+                <a:solidFill>
+                  <a:schemeClr val="dk1"/>
+                </a:solidFill>
+                <a:latin typeface="+mn-lt"/>
+                <a:ea typeface="Calibri"/>
+                <a:cs typeface="Arial" panose="020B0604020202020204" pitchFamily="34" charset="0"/>
+                <a:sym typeface="Calibri"/>
+              </a:rPr>
+              <a:t>hardware</a:t>
+            </a:r>
+            <a:r>
+              <a:rPr lang="en-US" sz="2800" b="1" i="0" u="none" strike="noStrike" cap="none" dirty="0">
+                <a:solidFill>
+                  <a:schemeClr val="dk1"/>
+                </a:solidFill>
+                <a:latin typeface="+mn-lt"/>
+                <a:ea typeface="Calibri"/>
+                <a:cs typeface="Calibri"/>
+                <a:sym typeface="Calibri"/>
+              </a:rPr>
+              <a:t>.</a:t>
+            </a:r>
+            <a:endParaRPr sz="2800" b="1" dirty="0">
+              <a:solidFill>
+                <a:schemeClr val="dk1"/>
+              </a:solidFill>
+              <a:latin typeface="+mn-lt"/>
+              <a:ea typeface="Calibri"/>
+              <a:cs typeface="Calibri"/>
+              <a:sym typeface="Calibri"/>
+            </a:endParaRPr>
+          </a:p>
+        </p:txBody>
+      </p:sp>
+      <p:sp>
+        <p:nvSpPr>
+          <p:cNvPr id="5" name="TextBox 4">
+            <a:extLst>
+              <a:ext uri="{FF2B5EF4-FFF2-40B4-BE49-F238E27FC236}">
+                <a16:creationId xmlns:a16="http://schemas.microsoft.com/office/drawing/2014/main" id="{F4B9E3B5-EB6E-524C-AB0E-AB5EAFD032F9}"/>
+              </a:ext>
+            </a:extLst>
+          </p:cNvPr>
+          <p:cNvSpPr txBox="1"/>
+          <p:nvPr/>
+        </p:nvSpPr>
+        <p:spPr>
+          <a:xfrm>
+            <a:off x="199587" y="5632733"/>
+            <a:ext cx="3703081" cy="738664"/>
+          </a:xfrm>
+          <a:prstGeom prst="rect">
+            <a:avLst/>
+          </a:prstGeom>
+          <a:noFill/>
+        </p:spPr>
+        <p:txBody>
+          <a:bodyPr wrap="square" rtlCol="0">
+            <a:spAutoFit/>
+          </a:bodyPr>
+          <a:lstStyle/>
+          <a:p>
+            <a:r>
+              <a:rPr lang="en-US" dirty="0">
+                <a:solidFill>
+                  <a:schemeClr val="dk1"/>
+                </a:solidFill>
+                <a:latin typeface="+mn-lt"/>
+                <a:ea typeface="Calibri"/>
+                <a:cs typeface="Calibri"/>
+                <a:sym typeface="Calibri"/>
+              </a:rPr>
+              <a:t>HPC = High-Performance Computing InfiniBand = fast communication</a:t>
+            </a:r>
+          </a:p>
+          <a:p>
+            <a:r>
+              <a:rPr lang="en-US" dirty="0">
+                <a:solidFill>
+                  <a:schemeClr val="dk1"/>
+                </a:solidFill>
+                <a:latin typeface="+mn-lt"/>
+                <a:ea typeface="Calibri"/>
+                <a:cs typeface="Calibri"/>
+                <a:sym typeface="Calibri"/>
+              </a:rPr>
+              <a:t>FPGA = Field-Programmable Gate Array</a:t>
+            </a:r>
+          </a:p>
+        </p:txBody>
+      </p:sp>
+    </p:spTree>
+    <p:extLst>
+      <p:ext uri="{BB962C8B-B14F-4D97-AF65-F5344CB8AC3E}">
+        <p14:creationId xmlns:p14="http://schemas.microsoft.com/office/powerpoint/2010/main" val="2091030064"/>
+      </p:ext>
+    </p:extLst>
+  </p:cSld>
+  <p:clrMapOvr>
+    <a:masterClrMapping/>
+  </p:clrMapOvr>
+</p:sld>
+</file>
+
+<file path=ppt/slides/slide11.xml><?xml version="1.0" encoding="utf-8"?>
+<p:sld xmlns:a="http://schemas.openxmlformats.org/drawingml/2006/main" xmlns:r="http://schemas.openxmlformats.org/officeDocument/2006/relationships" xmlns:p="http://schemas.openxmlformats.org/presentationml/2006/main">
+  <p:cSld>
+    <p:spTree>
+      <p:nvGrpSpPr>
+        <p:cNvPr id="1" name="Shape 138"/>
+        <p:cNvGrpSpPr/>
+        <p:nvPr/>
+      </p:nvGrpSpPr>
+      <p:grpSpPr>
+        <a:xfrm>
+          <a:off x="0" y="0"/>
+          <a:ext cx="0" cy="0"/>
+          <a:chOff x="0" y="0"/>
+          <a:chExt cx="0" cy="0"/>
+        </a:xfrm>
+      </p:grpSpPr>
+      <p:sp>
+        <p:nvSpPr>
+          <p:cNvPr id="4" name="Google Shape;139;p20">
+            <a:extLst>
+              <a:ext uri="{FF2B5EF4-FFF2-40B4-BE49-F238E27FC236}">
+                <a16:creationId xmlns:a16="http://schemas.microsoft.com/office/drawing/2014/main" id="{DE6E0AA3-369A-B244-9270-7EECD576DD1F}"/>
+              </a:ext>
+            </a:extLst>
+          </p:cNvPr>
+          <p:cNvSpPr txBox="1"/>
+          <p:nvPr/>
+        </p:nvSpPr>
+        <p:spPr>
+          <a:xfrm>
+            <a:off x="106350" y="1658651"/>
+            <a:ext cx="11929706" cy="4903894"/>
+          </a:xfrm>
+          <a:prstGeom prst="rect">
+            <a:avLst/>
+          </a:prstGeom>
+          <a:noFill/>
+          <a:ln>
+            <a:noFill/>
+          </a:ln>
+        </p:spPr>
+        <p:txBody>
+          <a:bodyPr spcFirstLastPara="1" wrap="square" lIns="91425" tIns="91425" rIns="91425" bIns="91425" anchor="t" anchorCtr="0">
+            <a:noAutofit/>
+          </a:bodyPr>
+          <a:lstStyle/>
+          <a:p>
+            <a:pPr marL="285750" lvl="0" indent="-285750" algn="l" rtl="0">
+              <a:spcBef>
+                <a:spcPts val="0"/>
+              </a:spcBef>
+              <a:spcAft>
+                <a:spcPts val="0"/>
+              </a:spcAft>
+              <a:buFont typeface="Arial" panose="020B0604020202020204" pitchFamily="34" charset="0"/>
+              <a:buChar char="•"/>
+            </a:pPr>
+            <a:r>
+              <a:rPr lang="en-US" sz="1800" dirty="0"/>
+              <a:t>predictions (predictive analytics, forecasting, trends, investments, elections, sport &amp; weather, news, etc.)</a:t>
+            </a:r>
+          </a:p>
+          <a:p>
+            <a:pPr marL="285750" lvl="0" indent="-285750" algn="l" rtl="0">
+              <a:spcBef>
+                <a:spcPts val="0"/>
+              </a:spcBef>
+              <a:spcAft>
+                <a:spcPts val="0"/>
+              </a:spcAft>
+              <a:buFont typeface="Arial" panose="020B0604020202020204" pitchFamily="34" charset="0"/>
+              <a:buChar char="•"/>
+            </a:pPr>
+            <a:r>
+              <a:rPr lang="en-US" sz="1800" dirty="0"/>
+              <a:t>optimization of business processes, reducing costs</a:t>
+            </a:r>
+          </a:p>
+          <a:p>
+            <a:pPr marL="285750" lvl="0" indent="-285750" algn="l" rtl="0">
+              <a:spcBef>
+                <a:spcPts val="0"/>
+              </a:spcBef>
+              <a:spcAft>
+                <a:spcPts val="0"/>
+              </a:spcAft>
+              <a:buFont typeface="Arial" panose="020B0604020202020204" pitchFamily="34" charset="0"/>
+              <a:buChar char="•"/>
+            </a:pPr>
+            <a:r>
+              <a:rPr lang="en-US" sz="1800" dirty="0"/>
+              <a:t>extracting information from text, fuzzy deduplication</a:t>
+            </a:r>
+          </a:p>
+          <a:p>
+            <a:pPr marL="285750" lvl="0" indent="-285750" algn="l" rtl="0">
+              <a:spcBef>
+                <a:spcPts val="0"/>
+              </a:spcBef>
+              <a:spcAft>
+                <a:spcPts val="0"/>
+              </a:spcAft>
+              <a:buFont typeface="Arial" panose="020B0604020202020204" pitchFamily="34" charset="0"/>
+              <a:buChar char="•"/>
+            </a:pPr>
+            <a:r>
+              <a:rPr lang="en-US" sz="1800" dirty="0"/>
+              <a:t>image and face recognition</a:t>
+            </a:r>
+          </a:p>
+          <a:p>
+            <a:pPr marL="285750" lvl="0" indent="-285750" algn="l" rtl="0">
+              <a:spcBef>
+                <a:spcPts val="0"/>
+              </a:spcBef>
+              <a:spcAft>
+                <a:spcPts val="0"/>
+              </a:spcAft>
+              <a:buFont typeface="Arial" panose="020B0604020202020204" pitchFamily="34" charset="0"/>
+              <a:buChar char="•"/>
+            </a:pPr>
+            <a:r>
+              <a:rPr lang="en-US" sz="1800" dirty="0"/>
+              <a:t>recommender systems</a:t>
+            </a:r>
+            <a:endParaRPr sz="1800" dirty="0"/>
+          </a:p>
+          <a:p>
+            <a:pPr marL="285750" lvl="0" indent="-285750" algn="l" rtl="0">
+              <a:spcBef>
+                <a:spcPts val="0"/>
+              </a:spcBef>
+              <a:spcAft>
+                <a:spcPts val="0"/>
+              </a:spcAft>
+              <a:buFont typeface="Arial" panose="020B0604020202020204" pitchFamily="34" charset="0"/>
+              <a:buChar char="•"/>
+            </a:pPr>
+            <a:r>
+              <a:rPr lang="en-US" sz="1800" dirty="0"/>
+              <a:t>detection (anomaly, fraud, crime, terrorism, climate change, etc.)</a:t>
+            </a:r>
+            <a:endParaRPr sz="1800" dirty="0"/>
+          </a:p>
+          <a:p>
+            <a:pPr marL="285750" lvl="0" indent="-285750" algn="l" rtl="0">
+              <a:spcBef>
+                <a:spcPts val="0"/>
+              </a:spcBef>
+              <a:spcAft>
+                <a:spcPts val="0"/>
+              </a:spcAft>
+              <a:buFont typeface="Arial" panose="020B0604020202020204" pitchFamily="34" charset="0"/>
+              <a:buChar char="•"/>
+            </a:pPr>
+            <a:r>
+              <a:rPr lang="en-US" sz="1800" dirty="0"/>
+              <a:t>self-driving cars (planes, boats, drones, construction/rescue machines, etc.)</a:t>
+            </a:r>
+            <a:endParaRPr sz="1800" dirty="0"/>
+          </a:p>
+          <a:p>
+            <a:pPr marL="285750" lvl="0" indent="-285750" algn="l" rtl="0">
+              <a:spcBef>
+                <a:spcPts val="0"/>
+              </a:spcBef>
+              <a:spcAft>
+                <a:spcPts val="0"/>
+              </a:spcAft>
+              <a:buFont typeface="Arial" panose="020B0604020202020204" pitchFamily="34" charset="0"/>
+              <a:buChar char="•"/>
+            </a:pPr>
+            <a:r>
+              <a:rPr lang="en-US" sz="1800" dirty="0"/>
+              <a:t>robots (at home &amp; at work), </a:t>
+            </a:r>
+            <a:r>
+              <a:rPr lang="en-US" sz="1800" dirty="0">
+                <a:solidFill>
+                  <a:schemeClr val="dk1"/>
+                </a:solidFill>
+              </a:rPr>
+              <a:t>manufacturing robots</a:t>
+            </a:r>
+            <a:endParaRPr sz="1800" dirty="0"/>
+          </a:p>
+          <a:p>
+            <a:pPr marL="285750" lvl="0" indent="-285750" algn="l" rtl="0">
+              <a:spcBef>
+                <a:spcPts val="0"/>
+              </a:spcBef>
+              <a:spcAft>
+                <a:spcPts val="0"/>
+              </a:spcAft>
+              <a:buFont typeface="Arial" panose="020B0604020202020204" pitchFamily="34" charset="0"/>
+              <a:buChar char="•"/>
+            </a:pPr>
+            <a:r>
+              <a:rPr lang="en-US" sz="1800" dirty="0"/>
+              <a:t>universal language translator, language understanding, concepts learning</a:t>
+            </a:r>
+            <a:endParaRPr sz="1800" dirty="0"/>
+          </a:p>
+          <a:p>
+            <a:pPr marL="285750" lvl="0" indent="-285750" algn="l" rtl="0">
+              <a:spcBef>
+                <a:spcPts val="0"/>
+              </a:spcBef>
+              <a:spcAft>
+                <a:spcPts val="0"/>
+              </a:spcAft>
+              <a:buFont typeface="Arial" panose="020B0604020202020204" pitchFamily="34" charset="0"/>
+              <a:buChar char="•"/>
+            </a:pPr>
+            <a:r>
+              <a:rPr lang="en-US" sz="1800" dirty="0"/>
+              <a:t>music &amp;  literature composition, games and math.</a:t>
+            </a:r>
+            <a:endParaRPr sz="1800" dirty="0"/>
+          </a:p>
+          <a:p>
+            <a:pPr marL="285750" lvl="0" indent="-285750" algn="l" rtl="0">
+              <a:spcBef>
+                <a:spcPts val="0"/>
+              </a:spcBef>
+              <a:spcAft>
+                <a:spcPts val="0"/>
+              </a:spcAft>
+              <a:buFont typeface="Arial" panose="020B0604020202020204" pitchFamily="34" charset="0"/>
+              <a:buChar char="•"/>
+            </a:pPr>
+            <a:r>
+              <a:rPr lang="en-US" sz="1800" dirty="0"/>
+              <a:t>medical diagnostics (using genomic, phenotypic, social, etc. data), surgery</a:t>
+            </a:r>
+            <a:endParaRPr sz="1800" dirty="0"/>
+          </a:p>
+          <a:p>
+            <a:pPr marL="285750" lvl="0" indent="-285750" algn="l" rtl="0">
+              <a:spcBef>
+                <a:spcPts val="0"/>
+              </a:spcBef>
+              <a:spcAft>
+                <a:spcPts val="0"/>
+              </a:spcAft>
+              <a:buFont typeface="Arial" panose="020B0604020202020204" pitchFamily="34" charset="0"/>
+              <a:buChar char="•"/>
+            </a:pPr>
+            <a:r>
+              <a:rPr lang="en-US" sz="1800" dirty="0"/>
+              <a:t>intelligent secretary/helper, process management, t</a:t>
+            </a:r>
+            <a:r>
+              <a:rPr lang="en-US" sz="1800" dirty="0">
+                <a:solidFill>
+                  <a:schemeClr val="dk1"/>
+                </a:solidFill>
+              </a:rPr>
+              <a:t>raffic management</a:t>
+            </a:r>
+            <a:endParaRPr sz="1800" dirty="0"/>
+          </a:p>
+          <a:p>
+            <a:pPr marL="285750" lvl="0" indent="-285750" algn="l" rtl="0">
+              <a:spcBef>
+                <a:spcPts val="0"/>
+              </a:spcBef>
+              <a:spcAft>
+                <a:spcPts val="0"/>
+              </a:spcAft>
+              <a:buFont typeface="Arial" panose="020B0604020202020204" pitchFamily="34" charset="0"/>
+              <a:buChar char="•"/>
+            </a:pPr>
+            <a:r>
+              <a:rPr lang="en-US" sz="1800" dirty="0"/>
+              <a:t>agriculture (pooling weeds, watering, etc.)</a:t>
+            </a:r>
+            <a:endParaRPr sz="1800" dirty="0"/>
+          </a:p>
+          <a:p>
+            <a:pPr marL="285750" lvl="0" indent="-285750" algn="l" rtl="0">
+              <a:spcBef>
+                <a:spcPts val="0"/>
+              </a:spcBef>
+              <a:spcAft>
+                <a:spcPts val="0"/>
+              </a:spcAft>
+              <a:buFont typeface="Arial" panose="020B0604020202020204" pitchFamily="34" charset="0"/>
+              <a:buChar char="•"/>
+            </a:pPr>
+            <a:r>
+              <a:rPr lang="en-US" sz="1800" dirty="0"/>
+              <a:t>toys, military</a:t>
+            </a:r>
+            <a:endParaRPr sz="1800" dirty="0"/>
+          </a:p>
+          <a:p>
+            <a:pPr marL="285750" lvl="0" indent="-285750" algn="l" rtl="0">
+              <a:spcBef>
+                <a:spcPts val="0"/>
+              </a:spcBef>
+              <a:spcAft>
+                <a:spcPts val="0"/>
+              </a:spcAft>
+              <a:buFont typeface="Arial" panose="020B0604020202020204" pitchFamily="34" charset="0"/>
+              <a:buChar char="•"/>
+            </a:pPr>
+            <a:r>
+              <a:rPr lang="en-US" sz="1800" dirty="0"/>
+              <a:t>combining AI with Virtual Reality and 3D printing</a:t>
+            </a:r>
+            <a:endParaRPr sz="1800" dirty="0"/>
+          </a:p>
+          <a:p>
+            <a:pPr marL="285750" lvl="0" indent="-285750" algn="l" rtl="0">
+              <a:spcBef>
+                <a:spcPts val="0"/>
+              </a:spcBef>
+              <a:spcAft>
+                <a:spcPts val="0"/>
+              </a:spcAft>
+              <a:buFont typeface="Arial" panose="020B0604020202020204" pitchFamily="34" charset="0"/>
+              <a:buChar char="•"/>
+            </a:pPr>
+            <a:r>
+              <a:rPr lang="en-US" sz="1800" dirty="0"/>
+              <a:t>effective direct interface with human brain</a:t>
+            </a:r>
+          </a:p>
+          <a:p>
+            <a:pPr marL="285750" lvl="0" indent="-285750" algn="l" rtl="0">
+              <a:spcBef>
+                <a:spcPts val="0"/>
+              </a:spcBef>
+              <a:spcAft>
+                <a:spcPts val="0"/>
+              </a:spcAft>
+              <a:buFont typeface="Arial" panose="020B0604020202020204" pitchFamily="34" charset="0"/>
+              <a:buChar char="•"/>
+            </a:pPr>
+            <a:r>
+              <a:rPr lang="en-US" sz="1800" dirty="0"/>
+              <a:t>etc. etc. etc.</a:t>
+            </a:r>
+            <a:endParaRPr sz="1800" dirty="0"/>
+          </a:p>
+        </p:txBody>
+      </p:sp>
+      <p:sp>
+        <p:nvSpPr>
+          <p:cNvPr id="5" name="Google Shape;140;p20">
+            <a:extLst>
+              <a:ext uri="{FF2B5EF4-FFF2-40B4-BE49-F238E27FC236}">
+                <a16:creationId xmlns:a16="http://schemas.microsoft.com/office/drawing/2014/main" id="{415A9191-F14B-8648-B0A8-EB10013B9142}"/>
+              </a:ext>
+            </a:extLst>
+          </p:cNvPr>
+          <p:cNvSpPr txBox="1"/>
+          <p:nvPr/>
+        </p:nvSpPr>
+        <p:spPr>
+          <a:xfrm>
+            <a:off x="106350" y="22949"/>
+            <a:ext cx="7924467" cy="1328773"/>
+          </a:xfrm>
+          <a:prstGeom prst="rect">
+            <a:avLst/>
+          </a:prstGeom>
+          <a:noFill/>
+          <a:ln>
+            <a:noFill/>
+          </a:ln>
+        </p:spPr>
+        <p:txBody>
+          <a:bodyPr spcFirstLastPara="1" wrap="square" lIns="91425" tIns="91425" rIns="91425" bIns="91425" anchor="t" anchorCtr="0">
+            <a:noAutofit/>
+          </a:bodyPr>
+          <a:lstStyle/>
+          <a:p>
+            <a:r>
+              <a:rPr lang="en-US" sz="2800" b="1" dirty="0"/>
+              <a:t>Where and How ML &amp; AI are used ?</a:t>
+            </a:r>
+          </a:p>
+          <a:p>
+            <a:pPr marL="0" lvl="0" indent="0" algn="l" rtl="0">
+              <a:spcBef>
+                <a:spcPts val="0"/>
+              </a:spcBef>
+              <a:spcAft>
+                <a:spcPts val="0"/>
+              </a:spcAft>
+              <a:buNone/>
+            </a:pPr>
+            <a:endParaRPr lang="en-US" b="1" dirty="0"/>
+          </a:p>
+          <a:p>
+            <a:pPr marL="0" lvl="0" indent="0" algn="l" rtl="0">
+              <a:spcBef>
+                <a:spcPts val="0"/>
+              </a:spcBef>
+              <a:spcAft>
+                <a:spcPts val="0"/>
+              </a:spcAft>
+              <a:buNone/>
+            </a:pPr>
+            <a:r>
+              <a:rPr lang="en-US" sz="1800" b="1" dirty="0"/>
+              <a:t>ML = Machine Learning</a:t>
+            </a:r>
+          </a:p>
+          <a:p>
+            <a:pPr marL="0" lvl="0" indent="0" algn="l" rtl="0">
+              <a:spcBef>
+                <a:spcPts val="0"/>
+              </a:spcBef>
+              <a:spcAft>
+                <a:spcPts val="0"/>
+              </a:spcAft>
+              <a:buNone/>
+            </a:pPr>
+            <a:r>
+              <a:rPr lang="en-US" sz="1800" b="1" dirty="0"/>
+              <a:t>AI = Artificial Intelligence</a:t>
+            </a:r>
+          </a:p>
+        </p:txBody>
+      </p:sp>
+    </p:spTree>
+  </p:cSld>
+  <p:clrMapOvr>
+    <a:masterClrMapping/>
+  </p:clrMapOvr>
+</p:sld>
+</file>
+
+<file path=ppt/slides/slide12.xml><?xml version="1.0" encoding="utf-8"?>
 <p:sld xmlns:a="http://schemas.openxmlformats.org/drawingml/2006/main" xmlns:r="http://schemas.openxmlformats.org/officeDocument/2006/relationships" xmlns:p="http://schemas.openxmlformats.org/presentationml/2006/main">
   <p:cSld>
     <p:spTree>
@@ -17987,7 +19748,7 @@
 </p:sld>
 </file>
 
-<file path=ppt/slides/slide11.xml><?xml version="1.0" encoding="utf-8"?>
+<file path=ppt/slides/slide13.xml><?xml version="1.0" encoding="utf-8"?>
 <p:sld xmlns:a="http://schemas.openxmlformats.org/drawingml/2006/main" xmlns:r="http://schemas.openxmlformats.org/officeDocument/2006/relationships" xmlns:p="http://schemas.openxmlformats.org/presentationml/2006/main">
   <p:cSld>
     <p:spTree>
@@ -18136,7 +19897,7 @@
 </p:sld>
 </file>
 
-<file path=ppt/slides/slide12.xml><?xml version="1.0" encoding="utf-8"?>
+<file path=ppt/slides/slide14.xml><?xml version="1.0" encoding="utf-8"?>
 <p:sld xmlns:a="http://schemas.openxmlformats.org/drawingml/2006/main" xmlns:r="http://schemas.openxmlformats.org/officeDocument/2006/relationships" xmlns:p="http://schemas.openxmlformats.org/presentationml/2006/main">
   <p:cSld>
     <p:spTree>
@@ -18363,7 +20124,7 @@
 </p:sld>
 </file>
 
-<file path=ppt/slides/slide13.xml><?xml version="1.0" encoding="utf-8"?>
+<file path=ppt/slides/slide15.xml><?xml version="1.0" encoding="utf-8"?>
 <p:sld xmlns:a="http://schemas.openxmlformats.org/drawingml/2006/main" xmlns:r="http://schemas.openxmlformats.org/officeDocument/2006/relationships" xmlns:p="http://schemas.openxmlformats.org/presentationml/2006/main">
   <p:cSld>
     <p:spTree>
@@ -18439,8 +20200,8 @@
         </p:nvSpPr>
         <p:spPr>
           <a:xfrm>
-            <a:off x="1131342" y="1615968"/>
-            <a:ext cx="9988451" cy="3084988"/>
+            <a:off x="486577" y="1527691"/>
+            <a:ext cx="11218845" cy="3044309"/>
           </a:xfrm>
           <a:prstGeom prst="rect">
             <a:avLst/>
@@ -18467,42 +20228,20 @@
               <a:buChar char="•"/>
             </a:pPr>
             <a:r>
+              <a:rPr lang="en-US" sz="2000" b="1" dirty="0">
+                <a:solidFill>
+                  <a:srgbClr val="FF0000"/>
+                </a:solidFill>
+              </a:rPr>
+              <a:t>AI staff</a:t>
+            </a:r>
+            <a:r>
               <a:rPr lang="en-US" sz="2000" dirty="0">
                 <a:solidFill>
                   <a:schemeClr val="dk1"/>
                 </a:solidFill>
               </a:rPr>
-              <a:t>Create an AI department if you don't have one yet. </a:t>
-            </a:r>
-            <a:br>
-              <a:rPr lang="en-US" sz="2000" dirty="0">
-                <a:solidFill>
-                  <a:schemeClr val="dk1"/>
-                </a:solidFill>
-              </a:rPr>
-            </a:br>
-            <a:r>
-              <a:rPr lang="en-US" sz="2000" dirty="0">
-                <a:solidFill>
-                  <a:schemeClr val="dk1"/>
-                </a:solidFill>
-              </a:rPr>
-              <a:t>Host AI conferences and training. </a:t>
-            </a:r>
-            <a:br>
-              <a:rPr lang="en-US" sz="2000" dirty="0">
-                <a:solidFill>
-                  <a:schemeClr val="dk1"/>
-                </a:solidFill>
-              </a:rPr>
-            </a:br>
-            <a:r>
-              <a:rPr lang="en-US" sz="2000" dirty="0">
-                <a:solidFill>
-                  <a:schemeClr val="dk1"/>
-                </a:solidFill>
-              </a:rPr>
-              <a:t>Invite the best AI talent.</a:t>
+              <a:t> - create an AI department, host AI conferences and training, invite the best AI talent</a:t>
             </a:r>
           </a:p>
           <a:p>
@@ -18517,18 +20256,21 @@
               <a:buChar char="•"/>
             </a:pPr>
             <a:r>
+              <a:rPr lang="en-US" sz="2000" b="1" dirty="0">
+                <a:solidFill>
+                  <a:srgbClr val="FF0000"/>
+                </a:solidFill>
+              </a:rPr>
+              <a:t>Data</a:t>
+            </a:r>
+            <a:r>
               <a:rPr lang="en-US" sz="2000" dirty="0">
                 <a:solidFill>
                   <a:schemeClr val="dk1"/>
                 </a:solidFill>
               </a:rPr>
-              <a:t>Get serious about collecting, cleaning, and labeling data.</a:t>
-            </a:r>
-            <a:endParaRPr sz="2000" dirty="0">
-              <a:solidFill>
-                <a:schemeClr val="dk1"/>
-              </a:solidFill>
-            </a:endParaRPr>
+              <a:t> – 80% of work. Get serious about collecting, cleaning, and labeling data</a:t>
+            </a:r>
           </a:p>
           <a:p>
             <a:pPr marL="342900" lvl="0" indent="-342900" algn="l" rtl="0">
@@ -18542,18 +20284,21 @@
               <a:buChar char="•"/>
             </a:pPr>
             <a:r>
+              <a:rPr lang="en-US" sz="2000" b="1" dirty="0">
+                <a:solidFill>
+                  <a:srgbClr val="FF0000"/>
+                </a:solidFill>
+              </a:rPr>
+              <a:t>Compare and select</a:t>
+            </a:r>
+            <a:r>
               <a:rPr lang="en-US" sz="2000" dirty="0">
                 <a:solidFill>
                   <a:schemeClr val="dk1"/>
                 </a:solidFill>
               </a:rPr>
-              <a:t>Customize and fine-tune models instead of building "from scratch".</a:t>
-            </a:r>
-            <a:endParaRPr sz="2000" dirty="0">
-              <a:solidFill>
-                <a:schemeClr val="dk1"/>
-              </a:solidFill>
-            </a:endParaRPr>
+              <a:t> ML tools from different vendors instead of building "from scratch" </a:t>
+            </a:r>
           </a:p>
           <a:p>
             <a:pPr marL="342900" lvl="0" indent="-342900" algn="l" rtl="0">
@@ -18572,17 +20317,27 @@
                   <a:schemeClr val="dk1"/>
                 </a:solidFill>
               </a:rPr>
-              <a:t>Use pre-trained tools.</a:t>
-            </a:r>
-          </a:p>
-          <a:p>
-            <a:pPr marL="342900" lvl="0" indent="-342900" algn="l" rtl="0">
-              <a:spcBef>
-                <a:spcPts val="0"/>
-              </a:spcBef>
-              <a:spcAft>
-                <a:spcPts val="0"/>
-              </a:spcAft>
+              <a:t>Use </a:t>
+            </a:r>
+            <a:r>
+              <a:rPr lang="en-US" sz="2000" b="1" dirty="0">
+                <a:solidFill>
+                  <a:srgbClr val="FF0000"/>
+                </a:solidFill>
+              </a:rPr>
+              <a:t>pre-trained models</a:t>
+            </a:r>
+            <a:r>
+              <a:rPr lang="en-US" sz="2000" dirty="0">
+                <a:solidFill>
+                  <a:schemeClr val="dk1"/>
+                </a:solidFill>
+              </a:rPr>
+              <a:t> </a:t>
+            </a:r>
+          </a:p>
+          <a:p>
+            <a:pPr marL="342900" lvl="0" indent="-342900">
               <a:buFont typeface="Arial" panose="020B0604020202020204" pitchFamily="34" charset="0"/>
               <a:buChar char="•"/>
             </a:pPr>
@@ -18592,32 +20347,27 @@
                   <a:schemeClr val="dk1"/>
                 </a:solidFill>
               </a:rPr>
-              <a:t>Use multiple tools from external vendors (Google, AWS, Azure, etc.), </a:t>
-            </a:r>
-            <a:br>
+              <a:t>It is OK to use </a:t>
+            </a:r>
+            <a:r>
+              <a:rPr lang="en-US" sz="2000" b="1" dirty="0">
+                <a:solidFill>
+                  <a:srgbClr val="FF0000"/>
+                </a:solidFill>
+              </a:rPr>
+              <a:t>cross-cloud</a:t>
+            </a:r>
+            <a:r>
               <a:rPr lang="en-US" sz="2000" dirty="0">
                 <a:solidFill>
                   <a:schemeClr val="dk1"/>
                 </a:solidFill>
               </a:rPr>
-            </a:br>
-            <a:r>
-              <a:rPr lang="en-US" sz="2000" dirty="0">
-                <a:solidFill>
-                  <a:schemeClr val="dk1"/>
-                </a:solidFill>
-              </a:rPr>
-              <a:t>make them work together, do not lock-in into a single vendor.</a:t>
-            </a:r>
-          </a:p>
-          <a:p>
-            <a:pPr marL="342900" lvl="0" indent="-342900" algn="l" rtl="0">
-              <a:spcBef>
-                <a:spcPts val="0"/>
-              </a:spcBef>
-              <a:spcAft>
-                <a:spcPts val="0"/>
-              </a:spcAft>
+              <a:t> solutions. Do not lock yourself into a single vendor </a:t>
+            </a:r>
+          </a:p>
+          <a:p>
+            <a:pPr marL="342900" lvl="0" indent="-342900">
               <a:buFont typeface="Arial" panose="020B0604020202020204" pitchFamily="34" charset="0"/>
               <a:buChar char="•"/>
             </a:pPr>
@@ -18627,12 +20377,42 @@
                   <a:schemeClr val="dk1"/>
                 </a:solidFill>
               </a:rPr>
+              <a:t>Comply with </a:t>
+            </a:r>
+            <a:r>
+              <a:rPr lang="en-US" sz="2000" b="1" dirty="0">
+                <a:solidFill>
+                  <a:srgbClr val="FF0000"/>
+                </a:solidFill>
+              </a:rPr>
+              <a:t>GDPR</a:t>
+            </a:r>
+            <a:r>
+              <a:rPr lang="en-US" sz="2000" dirty="0">
+                <a:solidFill>
+                  <a:schemeClr val="dk1"/>
+                </a:solidFill>
+              </a:rPr>
+              <a:t> (General Data Protection Regulation) and other regulations to assure privacy and fairness</a:t>
+            </a:r>
+          </a:p>
+          <a:p>
+            <a:pPr marL="342900" indent="-342900">
+              <a:buFont typeface="Arial" panose="020B0604020202020204" pitchFamily="34" charset="0"/>
+              <a:buChar char="•"/>
+            </a:pPr>
+            <a:r>
+              <a:rPr lang="en-US" sz="2000" dirty="0">
+                <a:solidFill>
+                  <a:schemeClr val="dk1"/>
+                </a:solidFill>
+              </a:rPr>
               <a:t>Accent on "</a:t>
             </a:r>
             <a:r>
-              <a:rPr lang="en-US" sz="2000" dirty="0" err="1">
-                <a:solidFill>
-                  <a:schemeClr val="dk1"/>
+              <a:rPr lang="en-US" sz="2000" b="1" dirty="0" err="1">
+                <a:solidFill>
+                  <a:srgbClr val="FF0000"/>
                 </a:solidFill>
               </a:rPr>
               <a:t>explainability</a:t>
@@ -18643,7 +20423,37 @@
                   <a:schemeClr val="dk1"/>
                 </a:solidFill>
               </a:rPr>
-              <a:t>" of algorithms.</a:t>
+              <a:t>" of algorithms </a:t>
+            </a:r>
+          </a:p>
+          <a:p>
+            <a:pPr marL="342900" indent="-342900">
+              <a:buFont typeface="Arial" panose="020B0604020202020204" pitchFamily="34" charset="0"/>
+              <a:buChar char="•"/>
+            </a:pPr>
+            <a:r>
+              <a:rPr lang="en-US" sz="2000" dirty="0">
+                <a:solidFill>
+                  <a:schemeClr val="dk1"/>
+                </a:solidFill>
+              </a:rPr>
+              <a:t>Use "</a:t>
+            </a:r>
+            <a:r>
+              <a:rPr lang="en-US" sz="2000" b="1" dirty="0">
+                <a:solidFill>
+                  <a:srgbClr val="FF0000"/>
+                </a:solidFill>
+              </a:rPr>
+              <a:t>human-in-the-loop</a:t>
+            </a:r>
+            <a:r>
+              <a:rPr lang="en-US" sz="2000" dirty="0">
+                <a:solidFill>
+                  <a:schemeClr val="dk1"/>
+                </a:solidFill>
+              </a:rPr>
+              <a:t>" approach</a:t>
             </a:r>
             <a:endParaRPr sz="2000" dirty="0">
               <a:solidFill>
@@ -18673,7 +20483,7 @@
 </p:sld>
 </file>
 
-<file path=ppt/slides/slide14.xml><?xml version="1.0" encoding="utf-8"?>
+<file path=ppt/slides/slide16.xml><?xml version="1.0" encoding="utf-8"?>
 <p:sld xmlns:a="http://schemas.openxmlformats.org/drawingml/2006/main" xmlns:r="http://schemas.openxmlformats.org/officeDocument/2006/relationships" xmlns:p="http://schemas.openxmlformats.org/presentationml/2006/main">
   <p:cSld>
     <p:spTree>
@@ -19166,7 +20976,7 @@
 </p:sld>
 </file>
 
-<file path=ppt/slides/slide15.xml><?xml version="1.0" encoding="utf-8"?>
+<file path=ppt/slides/slide17.xml><?xml version="1.0" encoding="utf-8"?>
 <p:sld xmlns:a="http://schemas.openxmlformats.org/drawingml/2006/main" xmlns:r="http://schemas.openxmlformats.org/officeDocument/2006/relationships" xmlns:p="http://schemas.openxmlformats.org/presentationml/2006/main">
   <p:cSld>
     <p:spTree>
@@ -19191,8 +21001,8 @@
         </p:nvSpPr>
         <p:spPr>
           <a:xfrm>
-            <a:off x="1927795" y="1781452"/>
-            <a:ext cx="7567897" cy="3295095"/>
+            <a:off x="1916221" y="1246647"/>
+            <a:ext cx="7567897" cy="4364705"/>
           </a:xfrm>
           <a:prstGeom prst="rect">
             <a:avLst/>
@@ -19223,7 +21033,42 @@
                   <a:schemeClr val="dk1"/>
                 </a:solidFill>
               </a:rPr>
-              <a:t>You first need to study to become a Data Scientist.</a:t>
+              <a:t>Become a Researcher.</a:t>
+            </a:r>
+          </a:p>
+          <a:p>
+            <a:pPr marL="0" lvl="0" indent="0" algn="l" rtl="0">
+              <a:spcBef>
+                <a:spcPts val="0"/>
+              </a:spcBef>
+              <a:spcAft>
+                <a:spcPts val="0"/>
+              </a:spcAft>
+              <a:buNone/>
+            </a:pPr>
+            <a:endParaRPr lang="en-US" sz="1800" dirty="0">
+              <a:solidFill>
+                <a:schemeClr val="dk1"/>
+              </a:solidFill>
+            </a:endParaRPr>
+          </a:p>
+          <a:p>
+            <a:pPr marL="0" lvl="0" indent="0" algn="l" rtl="0">
+              <a:spcBef>
+                <a:spcPts val="0"/>
+              </a:spcBef>
+              <a:spcAft>
+                <a:spcPts val="0"/>
+              </a:spcAft>
+              <a:buNone/>
+            </a:pPr>
+            <a:r>
+              <a:rPr lang="en-US" sz="1800" dirty="0">
+                <a:solidFill>
+                  <a:schemeClr val="dk1"/>
+                </a:solidFill>
+              </a:rPr>
+              <a:t>First study to become a Data Scientist.</a:t>
             </a:r>
           </a:p>
           <a:p>
@@ -19509,7 +21354,7 @@
   <p:cSld>
     <p:spTree>
       <p:nvGrpSpPr>
-        <p:cNvPr id="1" name=""/>
+        <p:cNvPr id="1" name="Shape 94"/>
         <p:cNvGrpSpPr/>
         <p:nvPr/>
       </p:nvGrpSpPr>
@@ -19523,18 +21368,12 @@
       </p:grpSpPr>
       <p:pic>
         <p:nvPicPr>
-          <p:cNvPr id="13" name="Google Shape;121;p18">
-            <a:extLst>
-              <a:ext uri="{FF2B5EF4-FFF2-40B4-BE49-F238E27FC236}">
-                <a16:creationId xmlns:a16="http://schemas.microsoft.com/office/drawing/2014/main" id="{A33B6420-47C9-D54F-B0F3-7ED06782270E}"/>
-              </a:ext>
-            </a:extLst>
-          </p:cNvPr>
+          <p:cNvPr id="95" name="Google Shape;95;p14"/>
           <p:cNvPicPr preferRelativeResize="0"/>
           <p:nvPr/>
         </p:nvPicPr>
         <p:blipFill rotWithShape="1">
-          <a:blip r:embed="rId2">
+          <a:blip r:embed="rId3">
             <a:alphaModFix/>
           </a:blip>
           <a:srcRect/>
@@ -19542,8 +21381,8 @@
         </p:blipFill>
         <p:spPr>
           <a:xfrm>
-            <a:off x="9373" y="47813"/>
-            <a:ext cx="3022025" cy="3022025"/>
+            <a:off x="0" y="1365792"/>
+            <a:ext cx="2938072" cy="2938072"/>
           </a:xfrm>
           <a:prstGeom prst="rect">
             <a:avLst/>
@@ -19556,20 +21395,14 @@
       </p:pic>
       <p:sp>
         <p:nvSpPr>
-          <p:cNvPr id="14" name="Google Shape;122;p18">
-            <a:extLst>
-              <a:ext uri="{FF2B5EF4-FFF2-40B4-BE49-F238E27FC236}">
-                <a16:creationId xmlns:a16="http://schemas.microsoft.com/office/drawing/2014/main" id="{401E8BFF-C5AE-884E-AB09-AD8DBFB79E1A}"/>
-              </a:ext>
-            </a:extLst>
-          </p:cNvPr>
+          <p:cNvPr id="96" name="Google Shape;96;p14"/>
           <p:cNvSpPr txBox="1"/>
           <p:nvPr/>
         </p:nvSpPr>
         <p:spPr>
           <a:xfrm>
-            <a:off x="423150" y="3069838"/>
-            <a:ext cx="2552700" cy="584775"/>
+            <a:off x="2938075" y="1365800"/>
+            <a:ext cx="9061500" cy="3409500"/>
           </a:xfrm>
           <a:prstGeom prst="rect">
             <a:avLst/>
@@ -19595,7 +21428,7 @@
               <a:buNone/>
             </a:pPr>
             <a:r>
-              <a:rPr lang="en-US" sz="3200" dirty="0">
+              <a:rPr lang="en-US" sz="2800" dirty="0">
                 <a:solidFill>
                   <a:schemeClr val="dk1"/>
                 </a:solidFill>
@@ -19604,9 +21437,21 @@
                 <a:cs typeface="Calibri"/>
                 <a:sym typeface="Calibri"/>
               </a:rPr>
-              <a:t>Andrew Ng</a:t>
-            </a:r>
-            <a:endParaRPr sz="3200" dirty="0">
+              <a:t>About me:</a:t>
+            </a:r>
+            <a:endParaRPr dirty="0"/>
+          </a:p>
+          <a:p>
+            <a:pPr marL="0" marR="0" lvl="0" indent="0" algn="l" rtl="0">
+              <a:spcBef>
+                <a:spcPts val="0"/>
+              </a:spcBef>
+              <a:spcAft>
+                <a:spcPts val="0"/>
+              </a:spcAft>
+              <a:buNone/>
+            </a:pPr>
+            <a:endParaRPr sz="2800" dirty="0">
               <a:solidFill>
                 <a:schemeClr val="dk1"/>
               </a:solidFill>
@@ -19616,42 +21461,18 @@
               <a:sym typeface="Calibri"/>
             </a:endParaRPr>
           </a:p>
-        </p:txBody>
-      </p:sp>
-      <p:sp>
-        <p:nvSpPr>
-          <p:cNvPr id="15" name="Google Shape;123;p18">
-            <a:extLst>
-              <a:ext uri="{FF2B5EF4-FFF2-40B4-BE49-F238E27FC236}">
-                <a16:creationId xmlns:a16="http://schemas.microsoft.com/office/drawing/2014/main" id="{FB24C2DB-FE6D-6A44-BF4F-590EA358AC69}"/>
-              </a:ext>
-            </a:extLst>
-          </p:cNvPr>
-          <p:cNvSpPr txBox="1"/>
-          <p:nvPr/>
-        </p:nvSpPr>
-        <p:spPr>
-          <a:xfrm>
-            <a:off x="9373" y="3654613"/>
-            <a:ext cx="6497444" cy="2697225"/>
-          </a:xfrm>
-          <a:prstGeom prst="rect">
-            <a:avLst/>
-          </a:prstGeom>
-          <a:noFill/>
-          <a:ln>
-            <a:noFill/>
-          </a:ln>
-        </p:spPr>
-        <p:txBody>
-          <a:bodyPr spcFirstLastPara="1" wrap="square" lIns="91425" tIns="45700" rIns="91425" bIns="45700" anchor="t" anchorCtr="0">
-            <a:noAutofit/>
-          </a:bodyPr>
-          <a:lstStyle/>
-          <a:p>
-            <a:pPr lvl="0"/>
-            <a:r>
-              <a:rPr lang="en-US" sz="1600" dirty="0">
+          <a:p>
+            <a:pPr marL="0" marR="0" lvl="0" indent="0" algn="l" rtl="0">
+              <a:spcBef>
+                <a:spcPts val="0"/>
+              </a:spcBef>
+              <a:spcAft>
+                <a:spcPts val="0"/>
+              </a:spcAft>
+              <a:buNone/>
+            </a:pPr>
+            <a:r>
+              <a:rPr lang="en-US" sz="2800" dirty="0">
                 <a:solidFill>
                   <a:schemeClr val="dk1"/>
                 </a:solidFill>
@@ -19660,104 +21481,9 @@
                 <a:cs typeface="Calibri"/>
                 <a:sym typeface="Calibri"/>
               </a:rPr>
-              <a:t>- co-founded and led Google Brain</a:t>
-            </a:r>
-          </a:p>
-          <a:p>
-            <a:pPr marL="0" marR="0" lvl="0" indent="0" algn="l" rtl="0">
-              <a:spcBef>
-                <a:spcPts val="0"/>
-              </a:spcBef>
-              <a:spcAft>
-                <a:spcPts val="0"/>
-              </a:spcAft>
-              <a:buNone/>
-            </a:pPr>
-            <a:r>
-              <a:rPr lang="en-US" sz="1600" dirty="0">
-                <a:solidFill>
-                  <a:schemeClr val="dk1"/>
-                </a:solidFill>
-                <a:latin typeface="Calibri"/>
-                <a:ea typeface="Calibri"/>
-                <a:cs typeface="Calibri"/>
-                <a:sym typeface="Calibri"/>
-              </a:rPr>
-              <a:t>- was the chief scientist at </a:t>
-            </a:r>
-            <a:r>
-              <a:rPr lang="en-US" sz="1600" b="1" dirty="0">
-                <a:solidFill>
-                  <a:srgbClr val="0070C0"/>
-                </a:solidFill>
-                <a:latin typeface="Calibri"/>
-                <a:ea typeface="Calibri"/>
-                <a:cs typeface="Calibri"/>
-                <a:sym typeface="Calibri"/>
-              </a:rPr>
-              <a:t>Baidu Research </a:t>
-            </a:r>
-            <a:r>
-              <a:rPr lang="en-US" sz="1600" dirty="0">
-                <a:solidFill>
-                  <a:schemeClr val="dk1"/>
-                </a:solidFill>
-                <a:latin typeface="Calibri"/>
-                <a:ea typeface="Calibri"/>
-                <a:cs typeface="Calibri"/>
-                <a:sym typeface="Calibri"/>
-              </a:rPr>
-              <a:t>(~1,300 people)</a:t>
-            </a:r>
-            <a:endParaRPr sz="1600" dirty="0"/>
-          </a:p>
-          <a:p>
-            <a:pPr marL="0" marR="0" lvl="0" indent="0" algn="l" rtl="0">
-              <a:spcBef>
-                <a:spcPts val="0"/>
-              </a:spcBef>
-              <a:spcAft>
-                <a:spcPts val="0"/>
-              </a:spcAft>
-              <a:buNone/>
-            </a:pPr>
-            <a:r>
-              <a:rPr lang="en-US" sz="1600" dirty="0">
-                <a:solidFill>
-                  <a:schemeClr val="dk1"/>
-                </a:solidFill>
-                <a:latin typeface="Calibri"/>
-                <a:ea typeface="Calibri"/>
-                <a:cs typeface="Calibri"/>
-                <a:sym typeface="Calibri"/>
-              </a:rPr>
-              <a:t>   for 3 years (2014-2017), resigned in March of 2017. </a:t>
-            </a:r>
-            <a:endParaRPr sz="1600" dirty="0"/>
-          </a:p>
-          <a:p>
-            <a:pPr marL="0" marR="0" lvl="0" indent="0" algn="l" rtl="0">
-              <a:spcBef>
-                <a:spcPts val="0"/>
-              </a:spcBef>
-              <a:spcAft>
-                <a:spcPts val="0"/>
-              </a:spcAft>
-              <a:buNone/>
-            </a:pPr>
-            <a:r>
-              <a:rPr lang="en-US" sz="1600" dirty="0">
-                <a:solidFill>
-                  <a:schemeClr val="dk1"/>
-                </a:solidFill>
-                <a:latin typeface="Calibri"/>
-                <a:ea typeface="Calibri"/>
-                <a:cs typeface="Calibri"/>
-                <a:sym typeface="Calibri"/>
-              </a:rPr>
-              <a:t>- adjunct professor at Stanford University </a:t>
-            </a:r>
-            <a:endParaRPr sz="1600" dirty="0">
+              <a:t>Lev Selector, Ph.D. – Mathematical Modeling</a:t>
+            </a:r>
+            <a:endParaRPr sz="2800" dirty="0">
               <a:solidFill>
                 <a:schemeClr val="dk1"/>
               </a:solidFill>
@@ -19777,68 +21503,7 @@
               </a:spcAft>
               <a:buNone/>
             </a:pPr>
-            <a:r>
-              <a:rPr lang="en-US" sz="1600" dirty="0">
-                <a:solidFill>
-                  <a:schemeClr val="dk1"/>
-                </a:solidFill>
-                <a:latin typeface="Calibri"/>
-                <a:ea typeface="Calibri"/>
-                <a:cs typeface="Calibri"/>
-                <a:sym typeface="Calibri"/>
-              </a:rPr>
-              <a:t>- co-founder and chairman of Coursera</a:t>
-            </a:r>
-            <a:endParaRPr sz="1600" dirty="0"/>
-          </a:p>
-          <a:p>
-            <a:pPr marL="0" marR="0" lvl="0" indent="0" algn="l" rtl="0">
-              <a:spcBef>
-                <a:spcPts val="0"/>
-              </a:spcBef>
-              <a:spcAft>
-                <a:spcPts val="0"/>
-              </a:spcAft>
-              <a:buNone/>
-            </a:pPr>
-            <a:r>
-              <a:rPr lang="en-US" sz="1600" dirty="0">
-                <a:solidFill>
-                  <a:schemeClr val="dk1"/>
-                </a:solidFill>
-                <a:latin typeface="Calibri"/>
-                <a:ea typeface="Calibri"/>
-                <a:cs typeface="Calibri"/>
-                <a:sym typeface="Calibri"/>
-              </a:rPr>
-              <a:t>  - </a:t>
-            </a:r>
-            <a:r>
-              <a:rPr lang="en-US" sz="1600" u="sng" dirty="0">
-                <a:solidFill>
-                  <a:schemeClr val="hlink"/>
-                </a:solidFill>
-                <a:latin typeface="Calibri"/>
-                <a:ea typeface="Calibri"/>
-                <a:cs typeface="Calibri"/>
-                <a:sym typeface="Calibri"/>
-                <a:hlinkClick r:id="rId3"/>
-              </a:rPr>
-              <a:t>https://en.wikipedia.org/wiki/Andrew_Ng</a:t>
-            </a:r>
-            <a:r>
-              <a:rPr lang="en-US" sz="1600" dirty="0">
-                <a:solidFill>
-                  <a:schemeClr val="dk1"/>
-                </a:solidFill>
-                <a:latin typeface="Calibri"/>
-                <a:ea typeface="Calibri"/>
-                <a:cs typeface="Calibri"/>
-                <a:sym typeface="Calibri"/>
-              </a:rPr>
-              <a:t> </a:t>
-            </a:r>
-            <a:endParaRPr sz="1600" dirty="0">
+            <a:endParaRPr sz="2800" dirty="0">
               <a:solidFill>
                 <a:schemeClr val="dk1"/>
               </a:solidFill>
@@ -19859,7 +21524,7 @@
               <a:buNone/>
             </a:pPr>
             <a:r>
-              <a:rPr lang="en-US" sz="1600" dirty="0">
+              <a:rPr lang="en-US" sz="2800" dirty="0">
                 <a:solidFill>
                   <a:schemeClr val="dk1"/>
                 </a:solidFill>
@@ -19868,22 +21533,33 @@
                 <a:cs typeface="Calibri"/>
                 <a:sym typeface="Calibri"/>
               </a:rPr>
-              <a:t>  - </a:t>
-            </a:r>
-            <a:r>
-              <a:rPr lang="en-US" sz="1600" u="sng" dirty="0">
-                <a:solidFill>
-                  <a:schemeClr val="hlink"/>
-                </a:solidFill>
-                <a:latin typeface="Calibri"/>
-                <a:ea typeface="Calibri"/>
-                <a:cs typeface="Calibri"/>
-                <a:sym typeface="Calibri"/>
-                <a:hlinkClick r:id="rId4"/>
+              <a:t>1977 - first programming project: Fortran, punch-cards</a:t>
+            </a:r>
+            <a:endParaRPr dirty="0"/>
+          </a:p>
+          <a:p>
+            <a:pPr marL="0" marR="0" lvl="0" indent="0" algn="l" rtl="0">
+              <a:spcBef>
+                <a:spcPts val="0"/>
+              </a:spcBef>
+              <a:spcAft>
+                <a:spcPts val="0"/>
+              </a:spcAft>
+              <a:buNone/>
+            </a:pPr>
+            <a:r>
+              <a:rPr lang="en-US" sz="2800" dirty="0">
+                <a:solidFill>
+                  <a:schemeClr val="dk1"/>
+                </a:solidFill>
+                <a:latin typeface="Calibri"/>
+                <a:ea typeface="Calibri"/>
+                <a:cs typeface="Calibri"/>
+                <a:sym typeface="Calibri"/>
               </a:rPr>
-              <a:t>https://www.coursera.org/learn/machine-learning</a:t>
-            </a:r>
-            <a:endParaRPr sz="1600" dirty="0">
+              <a:t>... - 1994 - math. modeling in biophysics</a:t>
+            </a:r>
+            <a:endParaRPr sz="2800" dirty="0">
               <a:solidFill>
                 <a:schemeClr val="dk1"/>
               </a:solidFill>
@@ -19904,7 +21580,7 @@
               <a:buNone/>
             </a:pPr>
             <a:r>
-              <a:rPr lang="en-US" sz="1600" dirty="0">
+              <a:rPr lang="en-US" sz="2800" dirty="0">
                 <a:solidFill>
                   <a:schemeClr val="dk1"/>
                 </a:solidFill>
@@ -19913,518 +21589,13 @@
                 <a:cs typeface="Calibri"/>
                 <a:sym typeface="Calibri"/>
               </a:rPr>
-              <a:t>Artificial Intelligence is the New Electricity </a:t>
-            </a:r>
-            <a:endParaRPr sz="1600" dirty="0"/>
-          </a:p>
-          <a:p>
-            <a:pPr marL="0" marR="0" lvl="0" indent="0" algn="l" rtl="0">
-              <a:spcBef>
-                <a:spcPts val="0"/>
-              </a:spcBef>
-              <a:spcAft>
-                <a:spcPts val="0"/>
-              </a:spcAft>
-              <a:buNone/>
-            </a:pPr>
-            <a:r>
-              <a:rPr lang="en-US" sz="1600" dirty="0">
-                <a:solidFill>
-                  <a:schemeClr val="dk1"/>
-                </a:solidFill>
-                <a:latin typeface="Calibri"/>
-                <a:ea typeface="Calibri"/>
-                <a:cs typeface="Calibri"/>
-                <a:sym typeface="Calibri"/>
-              </a:rPr>
-              <a:t>  - </a:t>
-            </a:r>
-            <a:r>
-              <a:rPr lang="en-US" sz="1600" u="sng" dirty="0">
-                <a:solidFill>
-                  <a:schemeClr val="hlink"/>
-                </a:solidFill>
-                <a:latin typeface="Calibri"/>
-                <a:ea typeface="Calibri"/>
-                <a:cs typeface="Calibri"/>
-                <a:sym typeface="Calibri"/>
-                <a:hlinkClick r:id="rId5"/>
-              </a:rPr>
-              <a:t>https://www.facebook.com/andrew.ng.96/videos/1268821713173733/</a:t>
-            </a:r>
-            <a:r>
-              <a:rPr lang="en-US" sz="1600" dirty="0">
-                <a:solidFill>
-                  <a:schemeClr val="dk1"/>
-                </a:solidFill>
-                <a:latin typeface="Calibri"/>
-                <a:ea typeface="Calibri"/>
-                <a:cs typeface="Calibri"/>
-                <a:sym typeface="Calibri"/>
-              </a:rPr>
-              <a:t> </a:t>
-            </a:r>
-            <a:br>
-              <a:rPr lang="en-US" sz="1600" dirty="0">
-                <a:solidFill>
-                  <a:schemeClr val="dk1"/>
-                </a:solidFill>
-                <a:latin typeface="Calibri"/>
-                <a:ea typeface="Calibri"/>
-                <a:cs typeface="Calibri"/>
-                <a:sym typeface="Calibri"/>
-              </a:rPr>
-            </a:br>
-            <a:r>
-              <a:rPr lang="en-US" sz="1600" dirty="0">
-                <a:solidFill>
-                  <a:schemeClr val="dk1"/>
-                </a:solidFill>
-                <a:latin typeface="Calibri"/>
-                <a:ea typeface="Calibri"/>
-                <a:cs typeface="Calibri"/>
-                <a:sym typeface="Calibri"/>
-              </a:rPr>
-              <a:t>  - </a:t>
-            </a:r>
-            <a:r>
-              <a:rPr lang="en-US" sz="1600" u="sng" dirty="0">
-                <a:solidFill>
-                  <a:schemeClr val="hlink"/>
-                </a:solidFill>
-                <a:latin typeface="Calibri"/>
-                <a:ea typeface="Calibri"/>
-                <a:cs typeface="Calibri"/>
-                <a:sym typeface="Calibri"/>
-                <a:hlinkClick r:id="rId6"/>
-              </a:rPr>
-              <a:t>https://www.youtube.com/watch?v=21EiKfQYZXc</a:t>
-            </a:r>
-            <a:r>
-              <a:rPr lang="en-US" sz="1600" dirty="0">
-                <a:solidFill>
-                  <a:schemeClr val="dk1"/>
-                </a:solidFill>
-                <a:latin typeface="Calibri"/>
-                <a:ea typeface="Calibri"/>
-                <a:cs typeface="Calibri"/>
-                <a:sym typeface="Calibri"/>
-              </a:rPr>
-              <a:t> </a:t>
-            </a:r>
-            <a:endParaRPr sz="1600" dirty="0"/>
-          </a:p>
-        </p:txBody>
-      </p:sp>
-      <p:sp>
-        <p:nvSpPr>
-          <p:cNvPr id="16" name="Google Shape;124;p18">
-            <a:extLst>
-              <a:ext uri="{FF2B5EF4-FFF2-40B4-BE49-F238E27FC236}">
-                <a16:creationId xmlns:a16="http://schemas.microsoft.com/office/drawing/2014/main" id="{604A169C-4E8C-F345-8109-AFB7B3E92F6B}"/>
-              </a:ext>
-            </a:extLst>
-          </p:cNvPr>
-          <p:cNvSpPr txBox="1"/>
-          <p:nvPr/>
-        </p:nvSpPr>
-        <p:spPr>
-          <a:xfrm>
-            <a:off x="3654199" y="242154"/>
-            <a:ext cx="5648827" cy="855734"/>
-          </a:xfrm>
-          <a:prstGeom prst="rect">
-            <a:avLst/>
-          </a:prstGeom>
-          <a:noFill/>
-          <a:ln>
-            <a:noFill/>
-          </a:ln>
-        </p:spPr>
-        <p:txBody>
-          <a:bodyPr spcFirstLastPara="1" wrap="square" lIns="91425" tIns="45700" rIns="91425" bIns="45700" anchor="t" anchorCtr="0">
-            <a:noAutofit/>
-          </a:bodyPr>
-          <a:lstStyle/>
-          <a:p>
-            <a:pPr marL="0" marR="0" lvl="0" indent="0" algn="l" rtl="0">
-              <a:spcBef>
-                <a:spcPts val="0"/>
-              </a:spcBef>
-              <a:spcAft>
-                <a:spcPts val="0"/>
-              </a:spcAft>
-              <a:buNone/>
-            </a:pPr>
-            <a:r>
-              <a:rPr lang="en-US" sz="4000" b="1" dirty="0">
-                <a:solidFill>
-                  <a:schemeClr val="dk1"/>
-                </a:solidFill>
-                <a:latin typeface="Calibri"/>
-                <a:ea typeface="Calibri"/>
-                <a:cs typeface="Calibri"/>
-                <a:sym typeface="Calibri"/>
-              </a:rPr>
-              <a:t>“AI is the New Electricity”</a:t>
-            </a:r>
-            <a:endParaRPr sz="4000" dirty="0"/>
-          </a:p>
-        </p:txBody>
-      </p:sp>
-      <p:sp>
-        <p:nvSpPr>
-          <p:cNvPr id="17" name="Google Shape;125;p18">
-            <a:extLst>
-              <a:ext uri="{FF2B5EF4-FFF2-40B4-BE49-F238E27FC236}">
-                <a16:creationId xmlns:a16="http://schemas.microsoft.com/office/drawing/2014/main" id="{A5F77435-6571-F442-BB64-4F00A478B846}"/>
-              </a:ext>
-            </a:extLst>
-          </p:cNvPr>
-          <p:cNvSpPr txBox="1"/>
-          <p:nvPr/>
-        </p:nvSpPr>
-        <p:spPr>
-          <a:xfrm>
-            <a:off x="7026334" y="2352820"/>
-            <a:ext cx="5047604" cy="2603586"/>
-          </a:xfrm>
-          <a:prstGeom prst="rect">
-            <a:avLst/>
-          </a:prstGeom>
-          <a:noFill/>
-          <a:ln>
-            <a:noFill/>
-          </a:ln>
-        </p:spPr>
-        <p:txBody>
-          <a:bodyPr spcFirstLastPara="1" wrap="square" lIns="91425" tIns="45700" rIns="91425" bIns="45700" anchor="t" anchorCtr="0">
-            <a:noAutofit/>
-          </a:bodyPr>
-          <a:lstStyle/>
-          <a:p>
-            <a:pPr marL="0" marR="0" lvl="0" indent="0" algn="l" rtl="0">
-              <a:spcBef>
-                <a:spcPts val="0"/>
-              </a:spcBef>
-              <a:spcAft>
-                <a:spcPts val="0"/>
-              </a:spcAft>
-              <a:buNone/>
-            </a:pPr>
-            <a:r>
-              <a:rPr lang="en-US" sz="2000" b="1" dirty="0">
-                <a:solidFill>
-                  <a:schemeClr val="dk1"/>
-                </a:solidFill>
-                <a:latin typeface="Calibri"/>
-                <a:ea typeface="Calibri"/>
-                <a:cs typeface="Calibri"/>
-                <a:sym typeface="Calibri"/>
-              </a:rPr>
-              <a:t>Electricity came into our life ~120 years ago:</a:t>
-            </a:r>
-            <a:endParaRPr sz="2000" b="1" dirty="0">
-              <a:solidFill>
-                <a:schemeClr val="dk1"/>
-              </a:solidFill>
-              <a:latin typeface="Calibri"/>
-              <a:ea typeface="Calibri"/>
-              <a:cs typeface="Calibri"/>
-              <a:sym typeface="Calibri"/>
-            </a:endParaRPr>
-          </a:p>
-          <a:p>
-            <a:pPr marL="0" marR="0" lvl="0" indent="0" algn="l" rtl="0">
-              <a:spcBef>
-                <a:spcPts val="0"/>
-              </a:spcBef>
-              <a:spcAft>
-                <a:spcPts val="0"/>
-              </a:spcAft>
-              <a:buNone/>
-            </a:pPr>
-            <a:r>
-              <a:rPr lang="en-US" sz="2000" b="1" dirty="0">
-                <a:solidFill>
-                  <a:schemeClr val="dk1"/>
-                </a:solidFill>
-                <a:latin typeface="Calibri"/>
-                <a:ea typeface="Calibri"/>
-                <a:cs typeface="Calibri"/>
-                <a:sym typeface="Calibri"/>
-              </a:rPr>
-              <a:t> - lamps and motors</a:t>
-            </a:r>
-            <a:br>
-              <a:rPr lang="en-US" sz="2000" b="1" dirty="0">
-                <a:solidFill>
-                  <a:schemeClr val="dk1"/>
-                </a:solidFill>
-                <a:latin typeface="Calibri"/>
-                <a:ea typeface="Calibri"/>
-                <a:cs typeface="Calibri"/>
-                <a:sym typeface="Calibri"/>
-              </a:rPr>
-            </a:br>
-            <a:r>
-              <a:rPr lang="en-US" sz="2000" b="1" dirty="0">
-                <a:solidFill>
-                  <a:schemeClr val="dk1"/>
-                </a:solidFill>
-                <a:latin typeface="Calibri"/>
-                <a:ea typeface="Calibri"/>
-                <a:cs typeface="Calibri"/>
-                <a:sym typeface="Calibri"/>
-              </a:rPr>
-              <a:t> - telegraph, telephone, radio, TV, Internet</a:t>
-            </a:r>
-            <a:endParaRPr sz="2000" b="1" dirty="0">
-              <a:solidFill>
-                <a:schemeClr val="dk1"/>
-              </a:solidFill>
-              <a:latin typeface="Calibri"/>
-              <a:ea typeface="Calibri"/>
-              <a:cs typeface="Calibri"/>
-              <a:sym typeface="Calibri"/>
-            </a:endParaRPr>
-          </a:p>
-          <a:p>
-            <a:pPr marL="0" marR="0" lvl="0" indent="0" algn="l" rtl="0">
-              <a:spcBef>
-                <a:spcPts val="0"/>
-              </a:spcBef>
-              <a:spcAft>
-                <a:spcPts val="0"/>
-              </a:spcAft>
-              <a:buNone/>
-            </a:pPr>
-            <a:r>
-              <a:rPr lang="en-US" sz="2000" b="1" dirty="0">
-                <a:solidFill>
-                  <a:schemeClr val="dk1"/>
-                </a:solidFill>
-                <a:latin typeface="Calibri"/>
-                <a:ea typeface="Calibri"/>
-                <a:cs typeface="Calibri"/>
-                <a:sym typeface="Calibri"/>
-              </a:rPr>
-              <a:t> - computers, IT, Machine Learning, AI</a:t>
-            </a:r>
-            <a:endParaRPr sz="2000" b="1" dirty="0">
-              <a:solidFill>
-                <a:schemeClr val="dk1"/>
-              </a:solidFill>
-              <a:latin typeface="Calibri"/>
-              <a:ea typeface="Calibri"/>
-              <a:cs typeface="Calibri"/>
-              <a:sym typeface="Calibri"/>
-            </a:endParaRPr>
-          </a:p>
-          <a:p>
-            <a:pPr marL="0" lvl="0" indent="0" algn="l" rtl="0">
-              <a:spcBef>
-                <a:spcPts val="0"/>
-              </a:spcBef>
-              <a:spcAft>
-                <a:spcPts val="0"/>
-              </a:spcAft>
-              <a:buClr>
-                <a:schemeClr val="dk1"/>
-              </a:buClr>
-              <a:buFont typeface="Arial"/>
-              <a:buNone/>
-            </a:pPr>
-            <a:r>
-              <a:rPr lang="en-US" sz="2000" b="1" dirty="0">
-                <a:solidFill>
-                  <a:schemeClr val="dk1"/>
-                </a:solidFill>
-                <a:latin typeface="Calibri"/>
-                <a:ea typeface="Calibri"/>
-                <a:cs typeface="Calibri"/>
-                <a:sym typeface="Calibri"/>
-              </a:rPr>
-              <a:t> - finance, trading</a:t>
-            </a:r>
-            <a:endParaRPr sz="2000" b="1" dirty="0">
-              <a:solidFill>
-                <a:schemeClr val="dk1"/>
-              </a:solidFill>
-              <a:latin typeface="Calibri"/>
-              <a:ea typeface="Calibri"/>
-              <a:cs typeface="Calibri"/>
-              <a:sym typeface="Calibri"/>
-            </a:endParaRPr>
-          </a:p>
-          <a:p>
-            <a:pPr marL="0" marR="0" lvl="0" indent="0" algn="l" rtl="0">
-              <a:spcBef>
-                <a:spcPts val="0"/>
-              </a:spcBef>
-              <a:spcAft>
-                <a:spcPts val="0"/>
-              </a:spcAft>
-              <a:buNone/>
-            </a:pPr>
-            <a:r>
-              <a:rPr lang="en-US" sz="2000" b="1" dirty="0">
-                <a:solidFill>
-                  <a:schemeClr val="dk1"/>
-                </a:solidFill>
-                <a:latin typeface="Calibri"/>
-                <a:ea typeface="Calibri"/>
-                <a:cs typeface="Calibri"/>
-                <a:sym typeface="Calibri"/>
-              </a:rPr>
-              <a:t> - science, education, medical diagnostics</a:t>
-            </a:r>
-            <a:endParaRPr sz="2000" b="1" dirty="0">
-              <a:solidFill>
-                <a:schemeClr val="dk1"/>
-              </a:solidFill>
-              <a:latin typeface="Calibri"/>
-              <a:ea typeface="Calibri"/>
-              <a:cs typeface="Calibri"/>
-              <a:sym typeface="Calibri"/>
-            </a:endParaRPr>
-          </a:p>
-          <a:p>
-            <a:pPr marL="0" marR="0" lvl="0" indent="0" algn="l" rtl="0">
-              <a:spcBef>
-                <a:spcPts val="0"/>
-              </a:spcBef>
-              <a:spcAft>
-                <a:spcPts val="0"/>
-              </a:spcAft>
-              <a:buNone/>
-            </a:pPr>
-            <a:r>
-              <a:rPr lang="en-US" sz="2000" b="1" dirty="0">
-                <a:solidFill>
-                  <a:schemeClr val="dk1"/>
-                </a:solidFill>
-                <a:latin typeface="Calibri"/>
-                <a:ea typeface="Calibri"/>
-                <a:cs typeface="Calibri"/>
-                <a:sym typeface="Calibri"/>
-              </a:rPr>
-              <a:t> - automation, robotics,</a:t>
-            </a:r>
-            <a:endParaRPr sz="2000" b="1" dirty="0">
-              <a:solidFill>
-                <a:schemeClr val="dk1"/>
-              </a:solidFill>
-              <a:latin typeface="Calibri"/>
-              <a:ea typeface="Calibri"/>
-              <a:cs typeface="Calibri"/>
-              <a:sym typeface="Calibri"/>
-            </a:endParaRPr>
-          </a:p>
-          <a:p>
-            <a:pPr marL="0" marR="0" lvl="0" indent="0" algn="l" rtl="0">
-              <a:spcBef>
-                <a:spcPts val="0"/>
-              </a:spcBef>
-              <a:spcAft>
-                <a:spcPts val="0"/>
-              </a:spcAft>
-              <a:buNone/>
-            </a:pPr>
-            <a:r>
-              <a:rPr lang="en-US" sz="2000" b="1" dirty="0">
-                <a:solidFill>
-                  <a:schemeClr val="dk1"/>
-                </a:solidFill>
-                <a:latin typeface="Calibri"/>
-                <a:ea typeface="Calibri"/>
-                <a:cs typeface="Calibri"/>
-                <a:sym typeface="Calibri"/>
-              </a:rPr>
-              <a:t> - etc. etc.</a:t>
-            </a:r>
-            <a:endParaRPr sz="2000" b="1" dirty="0">
-              <a:solidFill>
-                <a:schemeClr val="dk1"/>
-              </a:solidFill>
-              <a:latin typeface="Calibri"/>
-              <a:ea typeface="Calibri"/>
-              <a:cs typeface="Calibri"/>
-              <a:sym typeface="Calibri"/>
-            </a:endParaRPr>
-          </a:p>
-        </p:txBody>
-      </p:sp>
-      <p:sp>
-        <p:nvSpPr>
-          <p:cNvPr id="18" name="Google Shape;126;p18">
-            <a:extLst>
-              <a:ext uri="{FF2B5EF4-FFF2-40B4-BE49-F238E27FC236}">
-                <a16:creationId xmlns:a16="http://schemas.microsoft.com/office/drawing/2014/main" id="{25086DD5-7170-DA48-9B09-5109EA8E8436}"/>
-              </a:ext>
-            </a:extLst>
-          </p:cNvPr>
-          <p:cNvSpPr txBox="1"/>
-          <p:nvPr/>
-        </p:nvSpPr>
-        <p:spPr>
-          <a:xfrm>
-            <a:off x="4939556" y="1293354"/>
-            <a:ext cx="5304374" cy="864000"/>
-          </a:xfrm>
-          <a:prstGeom prst="rect">
-            <a:avLst/>
-          </a:prstGeom>
-          <a:noFill/>
-          <a:ln>
-            <a:noFill/>
-          </a:ln>
-        </p:spPr>
-        <p:txBody>
-          <a:bodyPr spcFirstLastPara="1" wrap="square" lIns="91425" tIns="45700" rIns="91425" bIns="45700" anchor="t" anchorCtr="0">
-            <a:noAutofit/>
-          </a:bodyPr>
-          <a:lstStyle/>
-          <a:p>
-            <a:pPr marL="0" marR="0" lvl="0" indent="0" algn="l" rtl="0">
-              <a:spcBef>
-                <a:spcPts val="0"/>
-              </a:spcBef>
-              <a:spcAft>
-                <a:spcPts val="0"/>
-              </a:spcAft>
-              <a:buNone/>
-            </a:pPr>
-            <a:r>
-              <a:rPr lang="en-US" sz="2000" b="1" dirty="0">
-                <a:solidFill>
-                  <a:srgbClr val="0070C0"/>
-                </a:solidFill>
-                <a:latin typeface="Calibri"/>
-                <a:ea typeface="Calibri"/>
-                <a:cs typeface="Calibri"/>
-                <a:sym typeface="Calibri"/>
-              </a:rPr>
-              <a:t>AI like electricity will also change our lives in many ways which is difficult to predict.</a:t>
-            </a:r>
-            <a:endParaRPr sz="2000" b="1" dirty="0">
-              <a:solidFill>
-                <a:srgbClr val="0070C0"/>
-              </a:solidFill>
-              <a:latin typeface="Calibri"/>
-              <a:ea typeface="Calibri"/>
-              <a:cs typeface="Calibri"/>
-              <a:sym typeface="Calibri"/>
-            </a:endParaRPr>
+              <a:t>... - present – Data Science, Machine Learning &amp; AI.</a:t>
+            </a:r>
+            <a:endParaRPr dirty="0"/>
           </a:p>
         </p:txBody>
       </p:sp>
     </p:spTree>
-    <p:extLst>
-      <p:ext uri="{BB962C8B-B14F-4D97-AF65-F5344CB8AC3E}">
-        <p14:creationId xmlns:p14="http://schemas.microsoft.com/office/powerpoint/2010/main" val="2762644119"/>
-      </p:ext>
-    </p:extLst>
   </p:cSld>
   <p:clrMapOvr>
     <a:masterClrMapping/>
@@ -20619,6 +21790,1024 @@
 </file>
 
 <file path=ppt/slides/slide4.xml><?xml version="1.0" encoding="utf-8"?>
+<p:sld xmlns:a="http://schemas.openxmlformats.org/drawingml/2006/main" xmlns:r="http://schemas.openxmlformats.org/officeDocument/2006/relationships" xmlns:p="http://schemas.openxmlformats.org/presentationml/2006/main">
+  <p:cSld>
+    <p:spTree>
+      <p:nvGrpSpPr>
+        <p:cNvPr id="1" name=""/>
+        <p:cNvGrpSpPr/>
+        <p:nvPr/>
+      </p:nvGrpSpPr>
+      <p:grpSpPr>
+        <a:xfrm>
+          <a:off x="0" y="0"/>
+          <a:ext cx="0" cy="0"/>
+          <a:chOff x="0" y="0"/>
+          <a:chExt cx="0" cy="0"/>
+        </a:xfrm>
+      </p:grpSpPr>
+      <p:pic>
+        <p:nvPicPr>
+          <p:cNvPr id="13" name="Google Shape;121;p18">
+            <a:extLst>
+              <a:ext uri="{FF2B5EF4-FFF2-40B4-BE49-F238E27FC236}">
+                <a16:creationId xmlns:a16="http://schemas.microsoft.com/office/drawing/2014/main" id="{A33B6420-47C9-D54F-B0F3-7ED06782270E}"/>
+              </a:ext>
+            </a:extLst>
+          </p:cNvPr>
+          <p:cNvPicPr preferRelativeResize="0"/>
+          <p:nvPr/>
+        </p:nvPicPr>
+        <p:blipFill rotWithShape="1">
+          <a:blip r:embed="rId2">
+            <a:alphaModFix/>
+          </a:blip>
+          <a:srcRect/>
+          <a:stretch/>
+        </p:blipFill>
+        <p:spPr>
+          <a:xfrm>
+            <a:off x="9373" y="47813"/>
+            <a:ext cx="2552701" cy="2552701"/>
+          </a:xfrm>
+          <a:prstGeom prst="rect">
+            <a:avLst/>
+          </a:prstGeom>
+          <a:noFill/>
+          <a:ln>
+            <a:noFill/>
+          </a:ln>
+        </p:spPr>
+      </p:pic>
+      <p:sp>
+        <p:nvSpPr>
+          <p:cNvPr id="14" name="Google Shape;122;p18">
+            <a:extLst>
+              <a:ext uri="{FF2B5EF4-FFF2-40B4-BE49-F238E27FC236}">
+                <a16:creationId xmlns:a16="http://schemas.microsoft.com/office/drawing/2014/main" id="{401E8BFF-C5AE-884E-AB09-AD8DBFB79E1A}"/>
+              </a:ext>
+            </a:extLst>
+          </p:cNvPr>
+          <p:cNvSpPr txBox="1"/>
+          <p:nvPr/>
+        </p:nvSpPr>
+        <p:spPr>
+          <a:xfrm>
+            <a:off x="412639" y="2618612"/>
+            <a:ext cx="2149435" cy="471429"/>
+          </a:xfrm>
+          <a:prstGeom prst="rect">
+            <a:avLst/>
+          </a:prstGeom>
+          <a:noFill/>
+          <a:ln>
+            <a:noFill/>
+          </a:ln>
+        </p:spPr>
+        <p:txBody>
+          <a:bodyPr spcFirstLastPara="1" wrap="square" lIns="91425" tIns="45700" rIns="91425" bIns="45700" anchor="t" anchorCtr="0">
+            <a:noAutofit/>
+          </a:bodyPr>
+          <a:lstStyle/>
+          <a:p>
+            <a:pPr marL="0" marR="0" lvl="0" indent="0" algn="l" rtl="0">
+              <a:spcBef>
+                <a:spcPts val="0"/>
+              </a:spcBef>
+              <a:spcAft>
+                <a:spcPts val="0"/>
+              </a:spcAft>
+              <a:buNone/>
+            </a:pPr>
+            <a:r>
+              <a:rPr lang="en-US" sz="2400" dirty="0">
+                <a:solidFill>
+                  <a:schemeClr val="dk1"/>
+                </a:solidFill>
+                <a:latin typeface="+mn-lt"/>
+                <a:ea typeface="Calibri"/>
+                <a:cs typeface="Calibri"/>
+                <a:sym typeface="Calibri"/>
+              </a:rPr>
+              <a:t>Andrew Ng</a:t>
+            </a:r>
+            <a:endParaRPr sz="2400" dirty="0">
+              <a:solidFill>
+                <a:schemeClr val="dk1"/>
+              </a:solidFill>
+              <a:latin typeface="+mn-lt"/>
+              <a:ea typeface="Calibri"/>
+              <a:cs typeface="Calibri"/>
+              <a:sym typeface="Calibri"/>
+            </a:endParaRPr>
+          </a:p>
+        </p:txBody>
+      </p:sp>
+      <p:sp>
+        <p:nvSpPr>
+          <p:cNvPr id="15" name="Google Shape;123;p18">
+            <a:extLst>
+              <a:ext uri="{FF2B5EF4-FFF2-40B4-BE49-F238E27FC236}">
+                <a16:creationId xmlns:a16="http://schemas.microsoft.com/office/drawing/2014/main" id="{FB24C2DB-FE6D-6A44-BF4F-590EA358AC69}"/>
+              </a:ext>
+            </a:extLst>
+          </p:cNvPr>
+          <p:cNvSpPr txBox="1"/>
+          <p:nvPr/>
+        </p:nvSpPr>
+        <p:spPr>
+          <a:xfrm>
+            <a:off x="9373" y="3122860"/>
+            <a:ext cx="6769799" cy="2836506"/>
+          </a:xfrm>
+          <a:prstGeom prst="rect">
+            <a:avLst/>
+          </a:prstGeom>
+          <a:noFill/>
+          <a:ln>
+            <a:noFill/>
+          </a:ln>
+        </p:spPr>
+        <p:txBody>
+          <a:bodyPr spcFirstLastPara="1" wrap="square" lIns="91425" tIns="45700" rIns="91425" bIns="45700" anchor="t" anchorCtr="0">
+            <a:noAutofit/>
+          </a:bodyPr>
+          <a:lstStyle/>
+          <a:p>
+            <a:pPr marL="285750" lvl="0" indent="-285750">
+              <a:buFont typeface="Arial" panose="020B0604020202020204" pitchFamily="34" charset="0"/>
+              <a:buChar char="•"/>
+            </a:pPr>
+            <a:r>
+              <a:rPr lang="en-US" sz="1600" dirty="0">
+                <a:solidFill>
+                  <a:schemeClr val="dk1"/>
+                </a:solidFill>
+                <a:latin typeface="Calibri"/>
+                <a:ea typeface="Calibri"/>
+                <a:cs typeface="Calibri"/>
+                <a:sym typeface="Calibri"/>
+              </a:rPr>
+              <a:t>co-founded and led Google Brain</a:t>
+            </a:r>
+          </a:p>
+          <a:p>
+            <a:pPr marL="285750" marR="0" lvl="0" indent="-285750" algn="l" rtl="0">
+              <a:spcBef>
+                <a:spcPts val="0"/>
+              </a:spcBef>
+              <a:spcAft>
+                <a:spcPts val="0"/>
+              </a:spcAft>
+              <a:buFont typeface="Arial" panose="020B0604020202020204" pitchFamily="34" charset="0"/>
+              <a:buChar char="•"/>
+            </a:pPr>
+            <a:r>
+              <a:rPr lang="en-US" sz="1600" dirty="0">
+                <a:solidFill>
+                  <a:schemeClr val="dk1"/>
+                </a:solidFill>
+                <a:latin typeface="Calibri"/>
+                <a:ea typeface="Calibri"/>
+                <a:cs typeface="Calibri"/>
+                <a:sym typeface="Calibri"/>
+              </a:rPr>
+              <a:t>was the chief scientist at </a:t>
+            </a:r>
+            <a:r>
+              <a:rPr lang="en-US" sz="1600" b="1" dirty="0">
+                <a:solidFill>
+                  <a:srgbClr val="0070C0"/>
+                </a:solidFill>
+                <a:latin typeface="Calibri"/>
+                <a:ea typeface="Calibri"/>
+                <a:cs typeface="Calibri"/>
+                <a:sym typeface="Calibri"/>
+              </a:rPr>
+              <a:t>Baidu Research </a:t>
+            </a:r>
+            <a:r>
+              <a:rPr lang="en-US" sz="1600" dirty="0">
+                <a:solidFill>
+                  <a:schemeClr val="dk1"/>
+                </a:solidFill>
+                <a:latin typeface="Calibri"/>
+                <a:ea typeface="Calibri"/>
+                <a:cs typeface="Calibri"/>
+                <a:sym typeface="Calibri"/>
+              </a:rPr>
+              <a:t>(~1,300 people) for 3 years</a:t>
+            </a:r>
+            <a:endParaRPr sz="1600" dirty="0"/>
+          </a:p>
+          <a:p>
+            <a:pPr marL="285750" marR="0" lvl="0" indent="-285750" algn="l" rtl="0">
+              <a:spcBef>
+                <a:spcPts val="0"/>
+              </a:spcBef>
+              <a:spcAft>
+                <a:spcPts val="0"/>
+              </a:spcAft>
+              <a:buFont typeface="Arial" panose="020B0604020202020204" pitchFamily="34" charset="0"/>
+              <a:buChar char="•"/>
+            </a:pPr>
+            <a:r>
+              <a:rPr lang="en-US" sz="1600" dirty="0">
+                <a:solidFill>
+                  <a:schemeClr val="dk1"/>
+                </a:solidFill>
+                <a:latin typeface="Calibri"/>
+                <a:ea typeface="Calibri"/>
+                <a:cs typeface="Calibri"/>
+                <a:sym typeface="Calibri"/>
+              </a:rPr>
+              <a:t>adjunct professor at Stanford University </a:t>
+            </a:r>
+            <a:endParaRPr sz="1600" dirty="0">
+              <a:solidFill>
+                <a:schemeClr val="dk1"/>
+              </a:solidFill>
+              <a:latin typeface="Calibri"/>
+              <a:ea typeface="Calibri"/>
+              <a:cs typeface="Calibri"/>
+              <a:sym typeface="Calibri"/>
+            </a:endParaRPr>
+          </a:p>
+          <a:p>
+            <a:pPr marL="285750" marR="0" lvl="0" indent="-285750" algn="l" rtl="0">
+              <a:spcBef>
+                <a:spcPts val="0"/>
+              </a:spcBef>
+              <a:spcAft>
+                <a:spcPts val="0"/>
+              </a:spcAft>
+              <a:buFont typeface="Arial" panose="020B0604020202020204" pitchFamily="34" charset="0"/>
+              <a:buChar char="•"/>
+            </a:pPr>
+            <a:r>
+              <a:rPr lang="en-US" sz="1600" dirty="0">
+                <a:solidFill>
+                  <a:schemeClr val="dk1"/>
+                </a:solidFill>
+                <a:latin typeface="Calibri"/>
+                <a:ea typeface="Calibri"/>
+                <a:cs typeface="Calibri"/>
+                <a:sym typeface="Calibri"/>
+              </a:rPr>
+              <a:t>co-founder and chairman of Coursera </a:t>
+            </a:r>
+            <a:br>
+              <a:rPr lang="en-US" sz="1600" dirty="0">
+                <a:solidFill>
+                  <a:schemeClr val="dk1"/>
+                </a:solidFill>
+                <a:latin typeface="Calibri"/>
+                <a:ea typeface="Calibri"/>
+                <a:cs typeface="Calibri"/>
+                <a:sym typeface="Calibri"/>
+              </a:rPr>
+            </a:br>
+            <a:r>
+              <a:rPr lang="en-US" sz="1600" dirty="0">
+                <a:solidFill>
+                  <a:schemeClr val="dk1"/>
+                </a:solidFill>
+                <a:latin typeface="Calibri"/>
+                <a:ea typeface="Calibri"/>
+                <a:cs typeface="Calibri"/>
+                <a:sym typeface="Calibri"/>
+              </a:rPr>
+              <a:t>  - </a:t>
+            </a:r>
+            <a:r>
+              <a:rPr lang="en-US" sz="1600" u="sng" dirty="0">
+                <a:solidFill>
+                  <a:schemeClr val="hlink"/>
+                </a:solidFill>
+                <a:latin typeface="Calibri"/>
+                <a:ea typeface="Calibri"/>
+                <a:cs typeface="Calibri"/>
+                <a:sym typeface="Calibri"/>
+                <a:hlinkClick r:id="rId3"/>
+              </a:rPr>
+              <a:t>https://en.wikipedia.org/wiki/Andrew_Ng</a:t>
+            </a:r>
+            <a:r>
+              <a:rPr lang="en-US" sz="1600" dirty="0">
+                <a:solidFill>
+                  <a:schemeClr val="dk1"/>
+                </a:solidFill>
+                <a:latin typeface="Calibri"/>
+                <a:ea typeface="Calibri"/>
+                <a:cs typeface="Calibri"/>
+                <a:sym typeface="Calibri"/>
+              </a:rPr>
+              <a:t> </a:t>
+            </a:r>
+            <a:br>
+              <a:rPr lang="en-US" sz="1600" dirty="0">
+                <a:solidFill>
+                  <a:schemeClr val="dk1"/>
+                </a:solidFill>
+                <a:latin typeface="Calibri"/>
+                <a:ea typeface="Calibri"/>
+                <a:cs typeface="Calibri"/>
+                <a:sym typeface="Calibri"/>
+              </a:rPr>
+            </a:br>
+            <a:r>
+              <a:rPr lang="en-US" sz="1600" dirty="0">
+                <a:solidFill>
+                  <a:schemeClr val="dk1"/>
+                </a:solidFill>
+                <a:latin typeface="Calibri"/>
+                <a:ea typeface="Calibri"/>
+                <a:cs typeface="Calibri"/>
+                <a:sym typeface="Calibri"/>
+              </a:rPr>
+              <a:t>  - </a:t>
+            </a:r>
+            <a:r>
+              <a:rPr lang="en-US" sz="1600" u="sng" dirty="0">
+                <a:solidFill>
+                  <a:schemeClr val="hlink"/>
+                </a:solidFill>
+                <a:latin typeface="Calibri"/>
+                <a:ea typeface="Calibri"/>
+                <a:cs typeface="Calibri"/>
+                <a:sym typeface="Calibri"/>
+                <a:hlinkClick r:id="rId4"/>
+              </a:rPr>
+              <a:t>https://www.coursera.org/learn/machine-learning</a:t>
+            </a:r>
+            <a:r>
+              <a:rPr lang="en-US" sz="1600" u="sng" dirty="0">
+                <a:solidFill>
+                  <a:schemeClr val="hlink"/>
+                </a:solidFill>
+                <a:latin typeface="Calibri"/>
+                <a:ea typeface="Calibri"/>
+                <a:cs typeface="Calibri"/>
+                <a:sym typeface="Calibri"/>
+              </a:rPr>
+              <a:t> </a:t>
+            </a:r>
+            <a:r>
+              <a:rPr lang="en-US" sz="1600" dirty="0">
+                <a:solidFill>
+                  <a:schemeClr val="dk1"/>
+                </a:solidFill>
+                <a:latin typeface="Calibri"/>
+                <a:cs typeface="Calibri"/>
+                <a:sym typeface="Calibri"/>
+              </a:rPr>
+              <a:t>  </a:t>
+            </a:r>
+            <a:br>
+              <a:rPr lang="en-US" sz="1600" dirty="0">
+                <a:solidFill>
+                  <a:schemeClr val="dk1"/>
+                </a:solidFill>
+                <a:latin typeface="Calibri"/>
+                <a:cs typeface="Calibri"/>
+                <a:sym typeface="Calibri"/>
+              </a:rPr>
+            </a:br>
+            <a:r>
+              <a:rPr lang="en-US" sz="1600" dirty="0">
+                <a:solidFill>
+                  <a:schemeClr val="dk1"/>
+                </a:solidFill>
+                <a:latin typeface="Calibri"/>
+                <a:cs typeface="Calibri"/>
+                <a:sym typeface="Calibri"/>
+              </a:rPr>
+              <a:t>  - </a:t>
+            </a:r>
+            <a:r>
+              <a:rPr lang="en-US" sz="1600" dirty="0">
+                <a:solidFill>
+                  <a:schemeClr val="dk1"/>
+                </a:solidFill>
+                <a:latin typeface="Calibri"/>
+                <a:cs typeface="Calibri"/>
+                <a:sym typeface="Calibri"/>
+                <a:hlinkClick r:id="rId5"/>
+              </a:rPr>
+              <a:t>https://www.deeplearning.ai/</a:t>
+            </a:r>
+            <a:r>
+              <a:rPr lang="en-US" sz="1600" dirty="0">
+                <a:solidFill>
+                  <a:schemeClr val="dk1"/>
+                </a:solidFill>
+                <a:latin typeface="Calibri"/>
+                <a:cs typeface="Calibri"/>
+                <a:sym typeface="Calibri"/>
+              </a:rPr>
+              <a:t>  </a:t>
+            </a:r>
+            <a:endParaRPr lang="en-US" sz="1600" dirty="0">
+              <a:solidFill>
+                <a:schemeClr val="dk1"/>
+              </a:solidFill>
+              <a:latin typeface="Calibri"/>
+              <a:ea typeface="Calibri"/>
+              <a:cs typeface="Calibri"/>
+              <a:sym typeface="Calibri"/>
+            </a:endParaRPr>
+          </a:p>
+          <a:p>
+            <a:pPr marL="285750" lvl="0" indent="-285750">
+              <a:buFont typeface="Arial" panose="020B0604020202020204" pitchFamily="34" charset="0"/>
+              <a:buChar char="•"/>
+            </a:pPr>
+            <a:r>
+              <a:rPr lang="en-US" sz="1600" dirty="0">
+                <a:solidFill>
+                  <a:schemeClr val="dk1"/>
+                </a:solidFill>
+                <a:latin typeface="Calibri"/>
+                <a:cs typeface="Calibri"/>
+                <a:sym typeface="Calibri"/>
+              </a:rPr>
+              <a:t>Landing AI - </a:t>
+            </a:r>
+            <a:r>
+              <a:rPr lang="en-US" sz="1600" dirty="0">
+                <a:solidFill>
+                  <a:schemeClr val="dk1"/>
+                </a:solidFill>
+                <a:latin typeface="Calibri"/>
+                <a:cs typeface="Calibri"/>
+                <a:sym typeface="Calibri"/>
+                <a:hlinkClick r:id="rId6"/>
+              </a:rPr>
+              <a:t>https://landing.ai/</a:t>
+            </a:r>
+            <a:r>
+              <a:rPr lang="en-US" sz="1600" dirty="0">
+                <a:solidFill>
+                  <a:schemeClr val="dk1"/>
+                </a:solidFill>
+                <a:latin typeface="Calibri"/>
+                <a:cs typeface="Calibri"/>
+                <a:sym typeface="Calibri"/>
+              </a:rPr>
+              <a:t> </a:t>
+            </a:r>
+          </a:p>
+          <a:p>
+            <a:pPr marL="285750" indent="-285750">
+              <a:buFont typeface="Arial" panose="020B0604020202020204" pitchFamily="34" charset="0"/>
+              <a:buChar char="•"/>
+            </a:pPr>
+            <a:r>
+              <a:rPr lang="en-US" sz="1600" dirty="0">
+                <a:solidFill>
+                  <a:schemeClr val="dk1"/>
+                </a:solidFill>
+                <a:latin typeface="Calibri"/>
+                <a:ea typeface="Calibri"/>
+                <a:cs typeface="Calibri"/>
+                <a:sym typeface="Calibri"/>
+              </a:rPr>
+              <a:t>Artificial Intelligence is the New Electricity </a:t>
+            </a:r>
+            <a:br>
+              <a:rPr lang="en-US" sz="1600" dirty="0">
+                <a:solidFill>
+                  <a:schemeClr val="dk1"/>
+                </a:solidFill>
+                <a:latin typeface="Calibri"/>
+                <a:ea typeface="Calibri"/>
+                <a:cs typeface="Calibri"/>
+                <a:sym typeface="Calibri"/>
+              </a:rPr>
+            </a:br>
+            <a:r>
+              <a:rPr lang="en-US" sz="1600" dirty="0">
+                <a:solidFill>
+                  <a:schemeClr val="dk1"/>
+                </a:solidFill>
+                <a:latin typeface="Calibri"/>
+                <a:ea typeface="Calibri"/>
+                <a:cs typeface="Calibri"/>
+                <a:sym typeface="Calibri"/>
+              </a:rPr>
+              <a:t> - </a:t>
+            </a:r>
+            <a:r>
+              <a:rPr lang="en-US" sz="1600" u="sng" dirty="0">
+                <a:solidFill>
+                  <a:schemeClr val="hlink"/>
+                </a:solidFill>
+                <a:latin typeface="Calibri"/>
+                <a:ea typeface="Calibri"/>
+                <a:cs typeface="Calibri"/>
+                <a:sym typeface="Calibri"/>
+                <a:hlinkClick r:id="rId7"/>
+              </a:rPr>
+              <a:t>https://www.facebook.com/andrew.ng.96/videos/1268821713173733/</a:t>
+            </a:r>
+            <a:r>
+              <a:rPr lang="en-US" sz="1600" dirty="0">
+                <a:solidFill>
+                  <a:schemeClr val="dk1"/>
+                </a:solidFill>
+                <a:latin typeface="Calibri"/>
+                <a:ea typeface="Calibri"/>
+                <a:cs typeface="Calibri"/>
+                <a:sym typeface="Calibri"/>
+              </a:rPr>
+              <a:t> </a:t>
+            </a:r>
+            <a:br>
+              <a:rPr lang="en-US" sz="1600" dirty="0">
+                <a:solidFill>
+                  <a:schemeClr val="dk1"/>
+                </a:solidFill>
+                <a:latin typeface="Calibri"/>
+                <a:ea typeface="Calibri"/>
+                <a:cs typeface="Calibri"/>
+                <a:sym typeface="Calibri"/>
+              </a:rPr>
+            </a:br>
+            <a:r>
+              <a:rPr lang="en-US" sz="1600" dirty="0">
+                <a:solidFill>
+                  <a:schemeClr val="dk1"/>
+                </a:solidFill>
+                <a:latin typeface="Calibri"/>
+                <a:ea typeface="Calibri"/>
+                <a:cs typeface="Calibri"/>
+                <a:sym typeface="Calibri"/>
+              </a:rPr>
+              <a:t> - </a:t>
+            </a:r>
+            <a:r>
+              <a:rPr lang="en-US" sz="1600" u="sng" dirty="0">
+                <a:solidFill>
+                  <a:schemeClr val="hlink"/>
+                </a:solidFill>
+                <a:latin typeface="Calibri"/>
+                <a:ea typeface="Calibri"/>
+                <a:cs typeface="Calibri"/>
+                <a:sym typeface="Calibri"/>
+                <a:hlinkClick r:id="rId8"/>
+              </a:rPr>
+              <a:t>https://www.youtube.com/watch?v=21EiKfQYZXc</a:t>
+            </a:r>
+            <a:r>
+              <a:rPr lang="en-US" sz="1600" dirty="0">
+                <a:solidFill>
+                  <a:schemeClr val="dk1"/>
+                </a:solidFill>
+                <a:latin typeface="Calibri"/>
+                <a:ea typeface="Calibri"/>
+                <a:cs typeface="Calibri"/>
+                <a:sym typeface="Calibri"/>
+              </a:rPr>
+              <a:t>  </a:t>
+            </a:r>
+            <a:endParaRPr lang="en-US" sz="1600" dirty="0">
+              <a:solidFill>
+                <a:schemeClr val="dk1"/>
+              </a:solidFill>
+              <a:latin typeface="Calibri"/>
+              <a:cs typeface="Calibri"/>
+              <a:sym typeface="Calibri"/>
+            </a:endParaRPr>
+          </a:p>
+          <a:p>
+            <a:pPr lvl="0"/>
+            <a:endParaRPr sz="1600" dirty="0"/>
+          </a:p>
+        </p:txBody>
+      </p:sp>
+      <p:sp>
+        <p:nvSpPr>
+          <p:cNvPr id="16" name="Google Shape;124;p18">
+            <a:extLst>
+              <a:ext uri="{FF2B5EF4-FFF2-40B4-BE49-F238E27FC236}">
+                <a16:creationId xmlns:a16="http://schemas.microsoft.com/office/drawing/2014/main" id="{604A169C-4E8C-F345-8109-AFB7B3E92F6B}"/>
+              </a:ext>
+            </a:extLst>
+          </p:cNvPr>
+          <p:cNvSpPr txBox="1"/>
+          <p:nvPr/>
+        </p:nvSpPr>
+        <p:spPr>
+          <a:xfrm>
+            <a:off x="3654199" y="242154"/>
+            <a:ext cx="5648827" cy="855734"/>
+          </a:xfrm>
+          <a:prstGeom prst="rect">
+            <a:avLst/>
+          </a:prstGeom>
+          <a:noFill/>
+          <a:ln>
+            <a:noFill/>
+          </a:ln>
+        </p:spPr>
+        <p:txBody>
+          <a:bodyPr spcFirstLastPara="1" wrap="square" lIns="91425" tIns="45700" rIns="91425" bIns="45700" anchor="t" anchorCtr="0">
+            <a:noAutofit/>
+          </a:bodyPr>
+          <a:lstStyle/>
+          <a:p>
+            <a:pPr marL="0" marR="0" lvl="0" indent="0" algn="l" rtl="0">
+              <a:spcBef>
+                <a:spcPts val="0"/>
+              </a:spcBef>
+              <a:spcAft>
+                <a:spcPts val="0"/>
+              </a:spcAft>
+              <a:buNone/>
+            </a:pPr>
+            <a:r>
+              <a:rPr lang="en-US" sz="4000" b="1" dirty="0">
+                <a:solidFill>
+                  <a:schemeClr val="dk1"/>
+                </a:solidFill>
+                <a:latin typeface="Calibri"/>
+                <a:ea typeface="Calibri"/>
+                <a:cs typeface="Calibri"/>
+                <a:sym typeface="Calibri"/>
+              </a:rPr>
+              <a:t>“AI is the New Electricity”</a:t>
+            </a:r>
+            <a:endParaRPr sz="4000" dirty="0"/>
+          </a:p>
+        </p:txBody>
+      </p:sp>
+      <p:sp>
+        <p:nvSpPr>
+          <p:cNvPr id="17" name="Google Shape;125;p18">
+            <a:extLst>
+              <a:ext uri="{FF2B5EF4-FFF2-40B4-BE49-F238E27FC236}">
+                <a16:creationId xmlns:a16="http://schemas.microsoft.com/office/drawing/2014/main" id="{A5F77435-6571-F442-BB64-4F00A478B846}"/>
+              </a:ext>
+            </a:extLst>
+          </p:cNvPr>
+          <p:cNvSpPr txBox="1"/>
+          <p:nvPr/>
+        </p:nvSpPr>
+        <p:spPr>
+          <a:xfrm>
+            <a:off x="7026334" y="2352820"/>
+            <a:ext cx="5047604" cy="2603586"/>
+          </a:xfrm>
+          <a:prstGeom prst="rect">
+            <a:avLst/>
+          </a:prstGeom>
+          <a:noFill/>
+          <a:ln>
+            <a:noFill/>
+          </a:ln>
+        </p:spPr>
+        <p:txBody>
+          <a:bodyPr spcFirstLastPara="1" wrap="square" lIns="91425" tIns="45700" rIns="91425" bIns="45700" anchor="t" anchorCtr="0">
+            <a:noAutofit/>
+          </a:bodyPr>
+          <a:lstStyle/>
+          <a:p>
+            <a:pPr marL="0" marR="0" lvl="0" indent="0" algn="l" rtl="0">
+              <a:spcBef>
+                <a:spcPts val="0"/>
+              </a:spcBef>
+              <a:spcAft>
+                <a:spcPts val="0"/>
+              </a:spcAft>
+              <a:buNone/>
+            </a:pPr>
+            <a:r>
+              <a:rPr lang="en-US" sz="2000" b="1" dirty="0">
+                <a:solidFill>
+                  <a:schemeClr val="dk1"/>
+                </a:solidFill>
+                <a:latin typeface="Calibri"/>
+                <a:ea typeface="Calibri"/>
+                <a:cs typeface="Calibri"/>
+                <a:sym typeface="Calibri"/>
+              </a:rPr>
+              <a:t>Electricity came into our life ~120 years ago:</a:t>
+            </a:r>
+            <a:endParaRPr sz="2000" b="1" dirty="0">
+              <a:solidFill>
+                <a:schemeClr val="dk1"/>
+              </a:solidFill>
+              <a:latin typeface="Calibri"/>
+              <a:ea typeface="Calibri"/>
+              <a:cs typeface="Calibri"/>
+              <a:sym typeface="Calibri"/>
+            </a:endParaRPr>
+          </a:p>
+          <a:p>
+            <a:pPr marL="342900" marR="0" lvl="0" indent="-342900" algn="l" rtl="0">
+              <a:spcBef>
+                <a:spcPts val="0"/>
+              </a:spcBef>
+              <a:spcAft>
+                <a:spcPts val="0"/>
+              </a:spcAft>
+              <a:buFont typeface="Arial" panose="020B0604020202020204" pitchFamily="34" charset="0"/>
+              <a:buChar char="•"/>
+            </a:pPr>
+            <a:r>
+              <a:rPr lang="en-US" sz="2000" b="1" dirty="0">
+                <a:solidFill>
+                  <a:schemeClr val="dk1"/>
+                </a:solidFill>
+                <a:latin typeface="Calibri"/>
+                <a:ea typeface="Calibri"/>
+                <a:cs typeface="Calibri"/>
+                <a:sym typeface="Calibri"/>
+              </a:rPr>
+              <a:t>lamps and motors</a:t>
+            </a:r>
+          </a:p>
+          <a:p>
+            <a:pPr marL="342900" marR="0" lvl="0" indent="-342900" algn="l" rtl="0">
+              <a:spcBef>
+                <a:spcPts val="0"/>
+              </a:spcBef>
+              <a:spcAft>
+                <a:spcPts val="0"/>
+              </a:spcAft>
+              <a:buFont typeface="Arial" panose="020B0604020202020204" pitchFamily="34" charset="0"/>
+              <a:buChar char="•"/>
+            </a:pPr>
+            <a:r>
+              <a:rPr lang="en-US" sz="2000" b="1" dirty="0">
+                <a:solidFill>
+                  <a:schemeClr val="dk1"/>
+                </a:solidFill>
+                <a:latin typeface="Calibri"/>
+                <a:ea typeface="Calibri"/>
+                <a:cs typeface="Calibri"/>
+                <a:sym typeface="Calibri"/>
+              </a:rPr>
+              <a:t>telegraph, telephone, radio, TV, Internet</a:t>
+            </a:r>
+            <a:endParaRPr sz="2000" b="1" dirty="0">
+              <a:solidFill>
+                <a:schemeClr val="dk1"/>
+              </a:solidFill>
+              <a:latin typeface="Calibri"/>
+              <a:ea typeface="Calibri"/>
+              <a:cs typeface="Calibri"/>
+              <a:sym typeface="Calibri"/>
+            </a:endParaRPr>
+          </a:p>
+          <a:p>
+            <a:pPr marL="342900" marR="0" lvl="0" indent="-342900" algn="l" rtl="0">
+              <a:spcBef>
+                <a:spcPts val="0"/>
+              </a:spcBef>
+              <a:spcAft>
+                <a:spcPts val="0"/>
+              </a:spcAft>
+              <a:buFont typeface="Arial" panose="020B0604020202020204" pitchFamily="34" charset="0"/>
+              <a:buChar char="•"/>
+            </a:pPr>
+            <a:r>
+              <a:rPr lang="en-US" sz="2000" b="1" dirty="0">
+                <a:solidFill>
+                  <a:schemeClr val="dk1"/>
+                </a:solidFill>
+                <a:latin typeface="Calibri"/>
+                <a:ea typeface="Calibri"/>
+                <a:cs typeface="Calibri"/>
+                <a:sym typeface="Calibri"/>
+              </a:rPr>
+              <a:t>computers, IT, Machine Learning, AI</a:t>
+            </a:r>
+            <a:endParaRPr sz="2000" b="1" dirty="0">
+              <a:solidFill>
+                <a:schemeClr val="dk1"/>
+              </a:solidFill>
+              <a:latin typeface="Calibri"/>
+              <a:ea typeface="Calibri"/>
+              <a:cs typeface="Calibri"/>
+              <a:sym typeface="Calibri"/>
+            </a:endParaRPr>
+          </a:p>
+          <a:p>
+            <a:pPr marL="342900" lvl="0" indent="-342900" algn="l" rtl="0">
+              <a:spcBef>
+                <a:spcPts val="0"/>
+              </a:spcBef>
+              <a:spcAft>
+                <a:spcPts val="0"/>
+              </a:spcAft>
+              <a:buClr>
+                <a:schemeClr val="dk1"/>
+              </a:buClr>
+              <a:buFont typeface="Arial" panose="020B0604020202020204" pitchFamily="34" charset="0"/>
+              <a:buChar char="•"/>
+            </a:pPr>
+            <a:r>
+              <a:rPr lang="en-US" sz="2000" b="1" dirty="0">
+                <a:solidFill>
+                  <a:schemeClr val="dk1"/>
+                </a:solidFill>
+                <a:latin typeface="Calibri"/>
+                <a:ea typeface="Calibri"/>
+                <a:cs typeface="Calibri"/>
+                <a:sym typeface="Calibri"/>
+              </a:rPr>
+              <a:t>finance, trading</a:t>
+            </a:r>
+            <a:endParaRPr sz="2000" b="1" dirty="0">
+              <a:solidFill>
+                <a:schemeClr val="dk1"/>
+              </a:solidFill>
+              <a:latin typeface="Calibri"/>
+              <a:ea typeface="Calibri"/>
+              <a:cs typeface="Calibri"/>
+              <a:sym typeface="Calibri"/>
+            </a:endParaRPr>
+          </a:p>
+          <a:p>
+            <a:pPr marL="342900" marR="0" lvl="0" indent="-342900" algn="l" rtl="0">
+              <a:spcBef>
+                <a:spcPts val="0"/>
+              </a:spcBef>
+              <a:spcAft>
+                <a:spcPts val="0"/>
+              </a:spcAft>
+              <a:buFont typeface="Arial" panose="020B0604020202020204" pitchFamily="34" charset="0"/>
+              <a:buChar char="•"/>
+            </a:pPr>
+            <a:r>
+              <a:rPr lang="en-US" sz="2000" b="1" dirty="0">
+                <a:solidFill>
+                  <a:schemeClr val="dk1"/>
+                </a:solidFill>
+                <a:latin typeface="Calibri"/>
+                <a:ea typeface="Calibri"/>
+                <a:cs typeface="Calibri"/>
+                <a:sym typeface="Calibri"/>
+              </a:rPr>
+              <a:t>science, education, medical diagnostics</a:t>
+            </a:r>
+            <a:endParaRPr sz="2000" b="1" dirty="0">
+              <a:solidFill>
+                <a:schemeClr val="dk1"/>
+              </a:solidFill>
+              <a:latin typeface="Calibri"/>
+              <a:ea typeface="Calibri"/>
+              <a:cs typeface="Calibri"/>
+              <a:sym typeface="Calibri"/>
+            </a:endParaRPr>
+          </a:p>
+          <a:p>
+            <a:pPr marL="342900" marR="0" lvl="0" indent="-342900" algn="l" rtl="0">
+              <a:spcBef>
+                <a:spcPts val="0"/>
+              </a:spcBef>
+              <a:spcAft>
+                <a:spcPts val="0"/>
+              </a:spcAft>
+              <a:buFont typeface="Arial" panose="020B0604020202020204" pitchFamily="34" charset="0"/>
+              <a:buChar char="•"/>
+            </a:pPr>
+            <a:r>
+              <a:rPr lang="en-US" sz="2000" b="1" dirty="0">
+                <a:solidFill>
+                  <a:schemeClr val="dk1"/>
+                </a:solidFill>
+                <a:latin typeface="Calibri"/>
+                <a:ea typeface="Calibri"/>
+                <a:cs typeface="Calibri"/>
+                <a:sym typeface="Calibri"/>
+              </a:rPr>
+              <a:t>automation, robotics,</a:t>
+            </a:r>
+            <a:endParaRPr sz="2000" b="1" dirty="0">
+              <a:solidFill>
+                <a:schemeClr val="dk1"/>
+              </a:solidFill>
+              <a:latin typeface="Calibri"/>
+              <a:ea typeface="Calibri"/>
+              <a:cs typeface="Calibri"/>
+              <a:sym typeface="Calibri"/>
+            </a:endParaRPr>
+          </a:p>
+          <a:p>
+            <a:pPr marL="342900" marR="0" lvl="0" indent="-342900" algn="l" rtl="0">
+              <a:spcBef>
+                <a:spcPts val="0"/>
+              </a:spcBef>
+              <a:spcAft>
+                <a:spcPts val="0"/>
+              </a:spcAft>
+              <a:buFont typeface="Arial" panose="020B0604020202020204" pitchFamily="34" charset="0"/>
+              <a:buChar char="•"/>
+            </a:pPr>
+            <a:r>
+              <a:rPr lang="en-US" sz="2000" b="1" dirty="0">
+                <a:solidFill>
+                  <a:schemeClr val="dk1"/>
+                </a:solidFill>
+                <a:latin typeface="Calibri"/>
+                <a:ea typeface="Calibri"/>
+                <a:cs typeface="Calibri"/>
+                <a:sym typeface="Calibri"/>
+              </a:rPr>
+              <a:t>etc. etc.</a:t>
+            </a:r>
+            <a:endParaRPr sz="2000" b="1" dirty="0">
+              <a:solidFill>
+                <a:schemeClr val="dk1"/>
+              </a:solidFill>
+              <a:latin typeface="Calibri"/>
+              <a:ea typeface="Calibri"/>
+              <a:cs typeface="Calibri"/>
+              <a:sym typeface="Calibri"/>
+            </a:endParaRPr>
+          </a:p>
+        </p:txBody>
+      </p:sp>
+      <p:sp>
+        <p:nvSpPr>
+          <p:cNvPr id="18" name="Google Shape;126;p18">
+            <a:extLst>
+              <a:ext uri="{FF2B5EF4-FFF2-40B4-BE49-F238E27FC236}">
+                <a16:creationId xmlns:a16="http://schemas.microsoft.com/office/drawing/2014/main" id="{25086DD5-7170-DA48-9B09-5109EA8E8436}"/>
+              </a:ext>
+            </a:extLst>
+          </p:cNvPr>
+          <p:cNvSpPr txBox="1"/>
+          <p:nvPr/>
+        </p:nvSpPr>
+        <p:spPr>
+          <a:xfrm>
+            <a:off x="4939556" y="1293354"/>
+            <a:ext cx="5304374" cy="864000"/>
+          </a:xfrm>
+          <a:prstGeom prst="rect">
+            <a:avLst/>
+          </a:prstGeom>
+          <a:noFill/>
+          <a:ln>
+            <a:noFill/>
+          </a:ln>
+        </p:spPr>
+        <p:txBody>
+          <a:bodyPr spcFirstLastPara="1" wrap="square" lIns="91425" tIns="45700" rIns="91425" bIns="45700" anchor="t" anchorCtr="0">
+            <a:noAutofit/>
+          </a:bodyPr>
+          <a:lstStyle/>
+          <a:p>
+            <a:pPr marL="0" marR="0" lvl="0" indent="0" algn="l" rtl="0">
+              <a:spcBef>
+                <a:spcPts val="0"/>
+              </a:spcBef>
+              <a:spcAft>
+                <a:spcPts val="0"/>
+              </a:spcAft>
+              <a:buNone/>
+            </a:pPr>
+            <a:r>
+              <a:rPr lang="en-US" sz="2000" b="1" dirty="0">
+                <a:solidFill>
+                  <a:srgbClr val="0070C0"/>
+                </a:solidFill>
+                <a:latin typeface="Calibri"/>
+                <a:ea typeface="Calibri"/>
+                <a:cs typeface="Calibri"/>
+                <a:sym typeface="Calibri"/>
+              </a:rPr>
+              <a:t>AI like electricity will also change our lives in many ways which is difficult to predict.</a:t>
+            </a:r>
+            <a:endParaRPr sz="2000" b="1" dirty="0">
+              <a:solidFill>
+                <a:srgbClr val="0070C0"/>
+              </a:solidFill>
+              <a:latin typeface="Calibri"/>
+              <a:ea typeface="Calibri"/>
+              <a:cs typeface="Calibri"/>
+              <a:sym typeface="Calibri"/>
+            </a:endParaRPr>
+          </a:p>
+        </p:txBody>
+      </p:sp>
+    </p:spTree>
+    <p:extLst>
+      <p:ext uri="{BB962C8B-B14F-4D97-AF65-F5344CB8AC3E}">
+        <p14:creationId xmlns:p14="http://schemas.microsoft.com/office/powerpoint/2010/main" val="2762644119"/>
+      </p:ext>
+    </p:extLst>
+  </p:cSld>
+  <p:clrMapOvr>
+    <a:masterClrMapping/>
+  </p:clrMapOvr>
+</p:sld>
+</file>
+
+<file path=ppt/slides/slide5.xml><?xml version="1.0" encoding="utf-8"?>
 <p:sld xmlns:a="http://schemas.openxmlformats.org/drawingml/2006/main" xmlns:r="http://schemas.openxmlformats.org/officeDocument/2006/relationships" xmlns:p="http://schemas.openxmlformats.org/presentationml/2006/main">
   <p:cSld>
     <p:spTree>
@@ -21061,7 +23250,470 @@
 </p:sld>
 </file>
 
-<file path=ppt/slides/slide5.xml><?xml version="1.0" encoding="utf-8"?>
+<file path=ppt/slides/slide6.xml><?xml version="1.0" encoding="utf-8"?>
+<p:sld xmlns:a="http://schemas.openxmlformats.org/drawingml/2006/main" xmlns:r="http://schemas.openxmlformats.org/officeDocument/2006/relationships" xmlns:p="http://schemas.openxmlformats.org/presentationml/2006/main">
+  <p:cSld>
+    <p:spTree>
+      <p:nvGrpSpPr>
+        <p:cNvPr id="1" name="Shape 106"/>
+        <p:cNvGrpSpPr/>
+        <p:nvPr/>
+      </p:nvGrpSpPr>
+      <p:grpSpPr>
+        <a:xfrm>
+          <a:off x="0" y="0"/>
+          <a:ext cx="0" cy="0"/>
+          <a:chOff x="0" y="0"/>
+          <a:chExt cx="0" cy="0"/>
+        </a:xfrm>
+      </p:grpSpPr>
+      <p:sp>
+        <p:nvSpPr>
+          <p:cNvPr id="9" name="Google Shape;101;p15">
+            <a:extLst>
+              <a:ext uri="{FF2B5EF4-FFF2-40B4-BE49-F238E27FC236}">
+                <a16:creationId xmlns:a16="http://schemas.microsoft.com/office/drawing/2014/main" id="{C016287F-4D86-7743-9DFE-AE51B7DF2F4D}"/>
+              </a:ext>
+            </a:extLst>
+          </p:cNvPr>
+          <p:cNvSpPr txBox="1"/>
+          <p:nvPr/>
+        </p:nvSpPr>
+        <p:spPr>
+          <a:xfrm>
+            <a:off x="3271343" y="3254615"/>
+            <a:ext cx="5738649" cy="782979"/>
+          </a:xfrm>
+          <a:prstGeom prst="rect">
+            <a:avLst/>
+          </a:prstGeom>
+          <a:noFill/>
+          <a:ln w="38100">
+            <a:solidFill>
+              <a:schemeClr val="accent1"/>
+            </a:solidFill>
+          </a:ln>
+        </p:spPr>
+        <p:txBody>
+          <a:bodyPr spcFirstLastPara="1" wrap="square" lIns="91425" tIns="91425" rIns="91425" bIns="91425" anchor="t" anchorCtr="0">
+            <a:noAutofit/>
+          </a:bodyPr>
+          <a:lstStyle/>
+          <a:p>
+            <a:pPr marL="0" lvl="0" indent="0" algn="ctr" rtl="0">
+              <a:spcBef>
+                <a:spcPts val="0"/>
+              </a:spcBef>
+              <a:spcAft>
+                <a:spcPts val="0"/>
+              </a:spcAft>
+              <a:buClr>
+                <a:schemeClr val="dk1"/>
+              </a:buClr>
+              <a:buSzPts val="1100"/>
+              <a:buFont typeface="Arial"/>
+              <a:buNone/>
+            </a:pPr>
+            <a:r>
+              <a:rPr lang="en-US" sz="2000" b="1" dirty="0"/>
+              <a:t>Deep Learning (DL)</a:t>
+            </a:r>
+            <a:endParaRPr sz="2000" dirty="0"/>
+          </a:p>
+          <a:p>
+            <a:pPr marL="0" lvl="0" indent="0" algn="ctr" rtl="0">
+              <a:spcBef>
+                <a:spcPts val="0"/>
+              </a:spcBef>
+              <a:spcAft>
+                <a:spcPts val="0"/>
+              </a:spcAft>
+              <a:buClr>
+                <a:schemeClr val="dk1"/>
+              </a:buClr>
+              <a:buSzPts val="1100"/>
+              <a:buFont typeface="Arial"/>
+              <a:buNone/>
+            </a:pPr>
+            <a:r>
+              <a:rPr lang="en-US" sz="2000" dirty="0"/>
+              <a:t>ML implemented as Neural Network</a:t>
+            </a:r>
+            <a:endParaRPr sz="2000" dirty="0"/>
+          </a:p>
+          <a:p>
+            <a:pPr marL="0" lvl="0" indent="0" algn="ctr" rtl="0">
+              <a:spcBef>
+                <a:spcPts val="0"/>
+              </a:spcBef>
+              <a:spcAft>
+                <a:spcPts val="0"/>
+              </a:spcAft>
+              <a:buNone/>
+            </a:pPr>
+            <a:endParaRPr sz="2000" dirty="0"/>
+          </a:p>
+        </p:txBody>
+      </p:sp>
+      <p:sp>
+        <p:nvSpPr>
+          <p:cNvPr id="10" name="Google Shape;101;p15">
+            <a:extLst>
+              <a:ext uri="{FF2B5EF4-FFF2-40B4-BE49-F238E27FC236}">
+                <a16:creationId xmlns:a16="http://schemas.microsoft.com/office/drawing/2014/main" id="{0585ABF0-8CC5-4A41-8D08-669BDDE773D3}"/>
+              </a:ext>
+            </a:extLst>
+          </p:cNvPr>
+          <p:cNvSpPr txBox="1"/>
+          <p:nvPr/>
+        </p:nvSpPr>
+        <p:spPr>
+          <a:xfrm>
+            <a:off x="4389707" y="5558017"/>
+            <a:ext cx="3501921" cy="1093905"/>
+          </a:xfrm>
+          <a:prstGeom prst="rect">
+            <a:avLst/>
+          </a:prstGeom>
+          <a:noFill/>
+          <a:ln w="38100">
+            <a:solidFill>
+              <a:schemeClr val="accent1"/>
+            </a:solidFill>
+          </a:ln>
+        </p:spPr>
+        <p:txBody>
+          <a:bodyPr spcFirstLastPara="1" wrap="square" lIns="91425" tIns="91425" rIns="91425" bIns="91425" anchor="t" anchorCtr="0">
+            <a:noAutofit/>
+          </a:bodyPr>
+          <a:lstStyle/>
+          <a:p>
+            <a:pPr marL="0" lvl="0" indent="0" algn="ctr" rtl="0">
+              <a:spcBef>
+                <a:spcPts val="0"/>
+              </a:spcBef>
+              <a:spcAft>
+                <a:spcPts val="0"/>
+              </a:spcAft>
+              <a:buClr>
+                <a:schemeClr val="dk1"/>
+              </a:buClr>
+              <a:buSzPts val="1100"/>
+              <a:buFont typeface="Arial"/>
+              <a:buNone/>
+            </a:pPr>
+            <a:r>
+              <a:rPr lang="en-US" sz="2000" b="1" dirty="0"/>
+              <a:t>Data Science (DS)</a:t>
+            </a:r>
+            <a:endParaRPr sz="2000" b="1" dirty="0"/>
+          </a:p>
+          <a:p>
+            <a:pPr marL="0" lvl="0" indent="0" algn="ctr" rtl="0">
+              <a:spcBef>
+                <a:spcPts val="0"/>
+              </a:spcBef>
+              <a:spcAft>
+                <a:spcPts val="0"/>
+              </a:spcAft>
+              <a:buNone/>
+            </a:pPr>
+            <a:r>
+              <a:rPr lang="en-US" sz="2000" dirty="0"/>
+              <a:t>computer skills + statistics</a:t>
+            </a:r>
+            <a:endParaRPr sz="2000" dirty="0"/>
+          </a:p>
+          <a:p>
+            <a:pPr marL="0" lvl="0" indent="0" algn="ctr" rtl="0">
+              <a:spcBef>
+                <a:spcPts val="0"/>
+              </a:spcBef>
+              <a:spcAft>
+                <a:spcPts val="0"/>
+              </a:spcAft>
+              <a:buNone/>
+            </a:pPr>
+            <a:r>
+              <a:rPr lang="en-US" sz="2000" dirty="0"/>
+              <a:t>CSV files, SQL, PowerPoint</a:t>
+            </a:r>
+          </a:p>
+        </p:txBody>
+      </p:sp>
+      <p:sp>
+        <p:nvSpPr>
+          <p:cNvPr id="11" name="Google Shape;101;p15">
+            <a:extLst>
+              <a:ext uri="{FF2B5EF4-FFF2-40B4-BE49-F238E27FC236}">
+                <a16:creationId xmlns:a16="http://schemas.microsoft.com/office/drawing/2014/main" id="{7D99C063-E9A5-BC4A-B3CB-B995915FB246}"/>
+              </a:ext>
+            </a:extLst>
+          </p:cNvPr>
+          <p:cNvSpPr txBox="1"/>
+          <p:nvPr/>
+        </p:nvSpPr>
+        <p:spPr>
+          <a:xfrm>
+            <a:off x="3878316" y="4219736"/>
+            <a:ext cx="4524702" cy="1156139"/>
+          </a:xfrm>
+          <a:prstGeom prst="rect">
+            <a:avLst/>
+          </a:prstGeom>
+          <a:noFill/>
+          <a:ln w="38100">
+            <a:solidFill>
+              <a:schemeClr val="accent1"/>
+            </a:solidFill>
+          </a:ln>
+        </p:spPr>
+        <p:txBody>
+          <a:bodyPr spcFirstLastPara="1" wrap="square" lIns="91425" tIns="91425" rIns="91425" bIns="91425" anchor="t" anchorCtr="0">
+            <a:noAutofit/>
+          </a:bodyPr>
+          <a:lstStyle/>
+          <a:p>
+            <a:pPr marL="0" lvl="0" indent="0" algn="ctr" rtl="0">
+              <a:spcBef>
+                <a:spcPts val="0"/>
+              </a:spcBef>
+              <a:spcAft>
+                <a:spcPts val="0"/>
+              </a:spcAft>
+              <a:buClr>
+                <a:schemeClr val="dk1"/>
+              </a:buClr>
+              <a:buSzPts val="1100"/>
+              <a:buFont typeface="Arial"/>
+              <a:buNone/>
+            </a:pPr>
+            <a:r>
+              <a:rPr lang="en-US" sz="2000" b="1" dirty="0"/>
+              <a:t>Machine Learning (ML)</a:t>
+            </a:r>
+            <a:endParaRPr sz="2000" dirty="0"/>
+          </a:p>
+          <a:p>
+            <a:pPr marL="0" lvl="0" indent="0" algn="ctr" rtl="0">
+              <a:spcBef>
+                <a:spcPts val="0"/>
+              </a:spcBef>
+              <a:spcAft>
+                <a:spcPts val="0"/>
+              </a:spcAft>
+              <a:buClr>
+                <a:schemeClr val="dk1"/>
+              </a:buClr>
+              <a:buSzPts val="1100"/>
+              <a:buFont typeface="Arial"/>
+              <a:buNone/>
+            </a:pPr>
+            <a:r>
+              <a:rPr lang="en-US" sz="2000" dirty="0"/>
+              <a:t>DS where algorithm learns from data to make predictions</a:t>
+            </a:r>
+            <a:endParaRPr sz="2000" dirty="0"/>
+          </a:p>
+          <a:p>
+            <a:pPr marL="0" lvl="0" indent="0" algn="ctr" rtl="0">
+              <a:spcBef>
+                <a:spcPts val="0"/>
+              </a:spcBef>
+              <a:spcAft>
+                <a:spcPts val="0"/>
+              </a:spcAft>
+              <a:buNone/>
+            </a:pPr>
+            <a:endParaRPr sz="2000" dirty="0"/>
+          </a:p>
+        </p:txBody>
+      </p:sp>
+      <p:sp>
+        <p:nvSpPr>
+          <p:cNvPr id="12" name="Google Shape;101;p15">
+            <a:extLst>
+              <a:ext uri="{FF2B5EF4-FFF2-40B4-BE49-F238E27FC236}">
+                <a16:creationId xmlns:a16="http://schemas.microsoft.com/office/drawing/2014/main" id="{BF1D8829-5635-244F-9400-F8BC4670F427}"/>
+              </a:ext>
+            </a:extLst>
+          </p:cNvPr>
+          <p:cNvSpPr txBox="1"/>
+          <p:nvPr/>
+        </p:nvSpPr>
+        <p:spPr>
+          <a:xfrm>
+            <a:off x="998482" y="338258"/>
+            <a:ext cx="10284371" cy="1129700"/>
+          </a:xfrm>
+          <a:prstGeom prst="rect">
+            <a:avLst/>
+          </a:prstGeom>
+          <a:noFill/>
+          <a:ln w="38100">
+            <a:solidFill>
+              <a:schemeClr val="accent1"/>
+            </a:solidFill>
+          </a:ln>
+        </p:spPr>
+        <p:txBody>
+          <a:bodyPr spcFirstLastPara="1" wrap="square" lIns="91425" tIns="91425" rIns="91425" bIns="91425" anchor="t" anchorCtr="0">
+            <a:noAutofit/>
+          </a:bodyPr>
+          <a:lstStyle/>
+          <a:p>
+            <a:pPr lvl="0" algn="ctr">
+              <a:buClr>
+                <a:schemeClr val="dk1"/>
+              </a:buClr>
+              <a:buSzPts val="1100"/>
+            </a:pPr>
+            <a:r>
+              <a:rPr lang="en-US" sz="2000" b="1" dirty="0"/>
+              <a:t>Artificial General Intelligence (AGI)</a:t>
+            </a:r>
+            <a:endParaRPr lang="en-US" sz="2000" dirty="0"/>
+          </a:p>
+          <a:p>
+            <a:pPr lvl="0" algn="ctr">
+              <a:buClr>
+                <a:schemeClr val="dk1"/>
+              </a:buClr>
+              <a:buSzPts val="1100"/>
+            </a:pPr>
+            <a:r>
+              <a:rPr lang="en-US" sz="2000" dirty="0"/>
+              <a:t>    AI that could successfully perform any intellectual task that a human can </a:t>
+            </a:r>
+          </a:p>
+          <a:p>
+            <a:pPr lvl="0" algn="ctr">
+              <a:buClr>
+                <a:schemeClr val="dk1"/>
+              </a:buClr>
+              <a:buSzPts val="1100"/>
+            </a:pPr>
+            <a:r>
+              <a:rPr lang="en-US" sz="2000" dirty="0"/>
+              <a:t>(Turing test (1950), ...)</a:t>
+            </a:r>
+          </a:p>
+          <a:p>
+            <a:pPr marL="0" lvl="0" indent="0" algn="ctr" rtl="0">
+              <a:spcBef>
+                <a:spcPts val="0"/>
+              </a:spcBef>
+              <a:spcAft>
+                <a:spcPts val="0"/>
+              </a:spcAft>
+              <a:buClr>
+                <a:schemeClr val="dk1"/>
+              </a:buClr>
+              <a:buSzPts val="1100"/>
+              <a:buFont typeface="Arial"/>
+              <a:buNone/>
+            </a:pPr>
+            <a:endParaRPr sz="2000" dirty="0"/>
+          </a:p>
+          <a:p>
+            <a:pPr marL="0" lvl="0" indent="0" algn="ctr" rtl="0">
+              <a:spcBef>
+                <a:spcPts val="0"/>
+              </a:spcBef>
+              <a:spcAft>
+                <a:spcPts val="0"/>
+              </a:spcAft>
+              <a:buNone/>
+            </a:pPr>
+            <a:endParaRPr sz="2000" dirty="0"/>
+          </a:p>
+        </p:txBody>
+      </p:sp>
+      <p:sp>
+        <p:nvSpPr>
+          <p:cNvPr id="13" name="Google Shape;101;p15">
+            <a:extLst>
+              <a:ext uri="{FF2B5EF4-FFF2-40B4-BE49-F238E27FC236}">
+                <a16:creationId xmlns:a16="http://schemas.microsoft.com/office/drawing/2014/main" id="{F1C4D3F2-5556-474D-9531-933A6DCD3C81}"/>
+              </a:ext>
+            </a:extLst>
+          </p:cNvPr>
+          <p:cNvSpPr txBox="1"/>
+          <p:nvPr/>
+        </p:nvSpPr>
+        <p:spPr>
+          <a:xfrm>
+            <a:off x="1813033" y="1650100"/>
+            <a:ext cx="8655269" cy="1422373"/>
+          </a:xfrm>
+          <a:prstGeom prst="rect">
+            <a:avLst/>
+          </a:prstGeom>
+          <a:noFill/>
+          <a:ln w="38100">
+            <a:solidFill>
+              <a:schemeClr val="accent1"/>
+            </a:solidFill>
+          </a:ln>
+        </p:spPr>
+        <p:txBody>
+          <a:bodyPr spcFirstLastPara="1" wrap="square" lIns="91425" tIns="91425" rIns="91425" bIns="91425" anchor="t" anchorCtr="0">
+            <a:noAutofit/>
+          </a:bodyPr>
+          <a:lstStyle/>
+          <a:p>
+            <a:pPr marL="0" lvl="0" indent="0" algn="ctr" rtl="0">
+              <a:spcBef>
+                <a:spcPts val="0"/>
+              </a:spcBef>
+              <a:spcAft>
+                <a:spcPts val="0"/>
+              </a:spcAft>
+              <a:buClr>
+                <a:schemeClr val="dk1"/>
+              </a:buClr>
+              <a:buSzPts val="1100"/>
+              <a:buFont typeface="Arial"/>
+              <a:buNone/>
+            </a:pPr>
+            <a:r>
+              <a:rPr lang="en-US" sz="2000" b="1" dirty="0"/>
+              <a:t>Artificial Intelligence (AI)</a:t>
+            </a:r>
+            <a:endParaRPr sz="2000" dirty="0"/>
+          </a:p>
+          <a:p>
+            <a:pPr marL="0" lvl="0" indent="0" algn="ctr" rtl="0">
+              <a:spcBef>
+                <a:spcPts val="0"/>
+              </a:spcBef>
+              <a:spcAft>
+                <a:spcPts val="0"/>
+              </a:spcAft>
+              <a:buClr>
+                <a:schemeClr val="dk1"/>
+              </a:buClr>
+              <a:buSzPts val="1100"/>
+              <a:buFont typeface="Arial"/>
+              <a:buNone/>
+            </a:pPr>
+            <a:r>
+              <a:rPr lang="en-US" sz="2000" dirty="0"/>
+              <a:t>    ML (DL) learning "human" abilities (speech and music recognition, conversation, visual recognition, video prediction, reasoning, self-driving cars, playing games, etc.)</a:t>
+            </a:r>
+            <a:endParaRPr sz="2000" dirty="0"/>
+          </a:p>
+        </p:txBody>
+      </p:sp>
+    </p:spTree>
+  </p:cSld>
+  <p:clrMapOvr>
+    <a:masterClrMapping/>
+  </p:clrMapOvr>
+</p:sld>
+</file>
+
+<file path=ppt/slides/slide7.xml><?xml version="1.0" encoding="utf-8"?>
 <p:sld xmlns:a="http://schemas.openxmlformats.org/drawingml/2006/main" xmlns:r="http://schemas.openxmlformats.org/officeDocument/2006/relationships" xmlns:p="http://schemas.openxmlformats.org/presentationml/2006/main">
   <p:cSld>
     <p:spTree>
@@ -21282,7 +23934,7 @@
 </p:sld>
 </file>
 
-<file path=ppt/slides/slide6.xml><?xml version="1.0" encoding="utf-8"?>
+<file path=ppt/slides/slide8.xml><?xml version="1.0" encoding="utf-8"?>
 <p:sld xmlns:a="http://schemas.openxmlformats.org/drawingml/2006/main" xmlns:r="http://schemas.openxmlformats.org/officeDocument/2006/relationships" xmlns:p="http://schemas.openxmlformats.org/presentationml/2006/main">
   <p:cSld>
     <p:spTree>
@@ -21438,7 +24090,7 @@
         </p:blipFill>
         <p:spPr>
           <a:xfrm>
-            <a:off x="227949" y="2790162"/>
+            <a:off x="227949" y="3020198"/>
             <a:ext cx="3618027" cy="2393928"/>
           </a:xfrm>
           <a:prstGeom prst="rect">
@@ -21460,8 +24112,8 @@
         </p:nvSpPr>
         <p:spPr>
           <a:xfrm>
-            <a:off x="227950" y="5412340"/>
-            <a:ext cx="3618027" cy="738664"/>
+            <a:off x="227950" y="5642376"/>
+            <a:ext cx="3618027" cy="954107"/>
           </a:xfrm>
           <a:prstGeom prst="rect">
             <a:avLst/>
@@ -21488,7 +24140,17 @@
           <a:p>
             <a:r>
               <a:rPr lang="en-US" sz="1400" dirty="0"/>
-              <a:t>    a = slope, b = intercept</a:t>
+              <a:t>    a = slope, </a:t>
+            </a:r>
+          </a:p>
+          <a:p>
+            <a:r>
+              <a:rPr lang="en-US" dirty="0"/>
+              <a:t>    </a:t>
+            </a:r>
+            <a:r>
+              <a:rPr lang="en-US" sz="1400" dirty="0"/>
+              <a:t>b = intercept</a:t>
             </a:r>
           </a:p>
         </p:txBody>
@@ -21507,8 +24169,8 @@
         </p:nvSpPr>
         <p:spPr>
           <a:xfrm>
-            <a:off x="4212762" y="4605522"/>
-            <a:ext cx="3618027" cy="2031325"/>
+            <a:off x="4212762" y="3828563"/>
+            <a:ext cx="3618027" cy="2246769"/>
           </a:xfrm>
           <a:prstGeom prst="rect">
             <a:avLst/>
@@ -21523,48 +24185,42 @@
           <a:p>
             <a:r>
               <a:rPr lang="en-US" sz="1400" dirty="0"/>
-              <a:t>Classification - learning to label examples based on their features. Model may have ~1-2 thousand of numbers</a:t>
-            </a:r>
-          </a:p>
-          <a:p>
-            <a:endParaRPr lang="en-US" sz="1400" dirty="0"/>
-          </a:p>
-          <a:p>
-            <a:r>
-              <a:rPr lang="en-US" sz="1400" dirty="0"/>
+              <a:t>Other standard ML models may have up to 1-2 thousand parameters.</a:t>
+            </a:r>
+          </a:p>
+          <a:p>
+            <a:endParaRPr lang="en-US" dirty="0"/>
+          </a:p>
+          <a:p>
+            <a:r>
+              <a:rPr lang="en-US" dirty="0"/>
+              <a:t>Classification &amp; Regression</a:t>
+            </a:r>
+          </a:p>
+          <a:p>
+            <a:r>
+              <a:rPr lang="en-US" dirty="0"/>
               <a:t>Logistic Regression</a:t>
             </a:r>
           </a:p>
           <a:p>
             <a:r>
-              <a:rPr lang="en-US" sz="1400" dirty="0"/>
-              <a:t>Linear Discriminant Analysis</a:t>
-            </a:r>
-          </a:p>
-          <a:p>
-            <a:r>
-              <a:rPr lang="en-US" sz="1400" dirty="0"/>
-              <a:t>Support Vector Machines</a:t>
-            </a:r>
-          </a:p>
-          <a:p>
-            <a:r>
-              <a:rPr lang="en-US" sz="1400" dirty="0"/>
+              <a:rPr lang="en-US" dirty="0"/>
               <a:t>Decision trees (Random Forest, </a:t>
             </a:r>
             <a:r>
-              <a:rPr lang="en-US" sz="1400" dirty="0" err="1"/>
+              <a:rPr lang="en-US" dirty="0" err="1"/>
               <a:t>XGBoost</a:t>
             </a:r>
             <a:r>
-              <a:rPr lang="en-US" sz="1400" dirty="0"/>
+              <a:rPr lang="en-US" dirty="0"/>
               <a:t>)</a:t>
             </a:r>
           </a:p>
           <a:p>
             <a:r>
-              <a:rPr lang="en-US" sz="1400" dirty="0"/>
-              <a:t>KNN, K-Means, etc., etc.</a:t>
+              <a:rPr lang="en-US" dirty="0"/>
+              <a:t>K-Means, KNN, SVM (Support Vector Machines), PCA (Principal Component Analysis), LDA (Linear Discriminant Analysis), etc.</a:t>
             </a:r>
           </a:p>
         </p:txBody>
@@ -21597,7 +24253,7 @@
         </p:blipFill>
         <p:spPr>
           <a:xfrm>
-            <a:off x="8410117" y="2818802"/>
+            <a:off x="8521455" y="457559"/>
             <a:ext cx="3158404" cy="1850627"/>
           </a:xfrm>
           <a:prstGeom prst="rect">
@@ -21619,8 +24275,8 @@
         </p:nvSpPr>
         <p:spPr>
           <a:xfrm>
-            <a:off x="8009316" y="4672367"/>
-            <a:ext cx="4182684" cy="2031325"/>
+            <a:off x="8009315" y="3828563"/>
+            <a:ext cx="4182684" cy="2677656"/>
           </a:xfrm>
           <a:prstGeom prst="rect">
             <a:avLst/>
@@ -21635,7 +24291,15 @@
           <a:p>
             <a:r>
               <a:rPr lang="en-US" sz="1400" dirty="0"/>
-              <a:t>Classification – dog or cat. Model is usually implemented as a Neural Network, and may use up to 1.5 </a:t>
+              <a:t>Example - classification – dog or cat. Model is usually implemented as a Convolutional Neural Network, and may use millions of parameters. Deep learning </a:t>
+            </a:r>
+            <a:r>
+              <a:rPr lang="en-US" dirty="0"/>
+              <a:t>text (</a:t>
+            </a:r>
+            <a:r>
+              <a:rPr lang="en-US" sz="1400" dirty="0"/>
+              <a:t>NLP) models can have up to 175 </a:t>
             </a:r>
             <a:r>
               <a:rPr lang="en-US" sz="1400" dirty="0" err="1"/>
@@ -21643,19 +24307,17 @@
             </a:r>
             <a:r>
               <a:rPr lang="en-US" sz="1400" dirty="0"/>
-              <a:t> numbers. Text models up to 175 </a:t>
-            </a:r>
-            <a:r>
-              <a:rPr lang="en-US" sz="1400" dirty="0" err="1"/>
-              <a:t>Bln</a:t>
-            </a:r>
-            <a:r>
-              <a:rPr lang="en-US" sz="1400" dirty="0"/>
-              <a:t>.</a:t>
+              <a:t> parameters.</a:t>
             </a:r>
           </a:p>
           <a:p>
             <a:endParaRPr lang="en-US" sz="1400" dirty="0"/>
+          </a:p>
+          <a:p>
+            <a:r>
+              <a:rPr lang="en-US" dirty="0"/>
+              <a:t>Some applications:</a:t>
+            </a:r>
           </a:p>
           <a:p>
             <a:r>
@@ -21666,7 +24328,7 @@
           <a:p>
             <a:r>
               <a:rPr lang="en-US" sz="1400" dirty="0"/>
-              <a:t>NLP = Natural language Processing</a:t>
+              <a:t>NLP = Natural Language Processing</a:t>
             </a:r>
           </a:p>
           <a:p>
@@ -21703,7 +24365,7 @@
           </p:cNvPicPr>
           <p:nvPr/>
         </p:nvPicPr>
-        <p:blipFill>
+        <p:blipFill rotWithShape="1">
           <a:blip r:embed="rId5" cstate="email">
             <a:extLst>
               <a:ext uri="{28A0092B-C50C-407E-A947-70E740481C1C}">
@@ -21711,14 +24373,13 @@
               </a:ext>
             </a:extLst>
           </a:blip>
-          <a:stretch>
-            <a:fillRect/>
-          </a:stretch>
+          <a:srcRect/>
+          <a:stretch/>
         </p:blipFill>
         <p:spPr>
           <a:xfrm>
-            <a:off x="4334051" y="2792298"/>
-            <a:ext cx="3305869" cy="1850627"/>
+            <a:off x="4425304" y="2038421"/>
+            <a:ext cx="3114748" cy="1611443"/>
           </a:xfrm>
           <a:prstGeom prst="rect">
             <a:avLst/>
@@ -21739,7 +24400,7 @@
         </p:nvSpPr>
         <p:spPr>
           <a:xfrm>
-            <a:off x="106926" y="2332322"/>
+            <a:off x="106926" y="2562358"/>
             <a:ext cx="2528698" cy="307777"/>
           </a:xfrm>
           <a:prstGeom prst="rect">
@@ -21778,7 +24439,7 @@
         </p:nvSpPr>
         <p:spPr>
           <a:xfrm>
-            <a:off x="4602992" y="2332322"/>
+            <a:off x="4602992" y="1775279"/>
             <a:ext cx="2528698" cy="307777"/>
           </a:xfrm>
           <a:prstGeom prst="rect">
@@ -21829,8 +24490,8 @@
         </p:nvSpPr>
         <p:spPr>
           <a:xfrm>
-            <a:off x="8724970" y="2127358"/>
-            <a:ext cx="2528698" cy="523220"/>
+            <a:off x="8521456" y="51174"/>
+            <a:ext cx="3158403" cy="307777"/>
           </a:xfrm>
           <a:prstGeom prst="rect">
             <a:avLst/>
@@ -21882,8 +24543,8 @@
         </p:blipFill>
         <p:spPr>
           <a:xfrm>
-            <a:off x="7927436" y="246526"/>
-            <a:ext cx="4123765" cy="1546412"/>
+            <a:off x="8277040" y="2282151"/>
+            <a:ext cx="3647234" cy="1367713"/>
           </a:xfrm>
           <a:prstGeom prst="rect">
             <a:avLst/>
@@ -21903,470 +24564,7 @@
 </p:sld>
 </file>
 
-<file path=ppt/slides/slide7.xml><?xml version="1.0" encoding="utf-8"?>
-<p:sld xmlns:a="http://schemas.openxmlformats.org/drawingml/2006/main" xmlns:r="http://schemas.openxmlformats.org/officeDocument/2006/relationships" xmlns:p="http://schemas.openxmlformats.org/presentationml/2006/main">
-  <p:cSld>
-    <p:spTree>
-      <p:nvGrpSpPr>
-        <p:cNvPr id="1" name="Shape 106"/>
-        <p:cNvGrpSpPr/>
-        <p:nvPr/>
-      </p:nvGrpSpPr>
-      <p:grpSpPr>
-        <a:xfrm>
-          <a:off x="0" y="0"/>
-          <a:ext cx="0" cy="0"/>
-          <a:chOff x="0" y="0"/>
-          <a:chExt cx="0" cy="0"/>
-        </a:xfrm>
-      </p:grpSpPr>
-      <p:sp>
-        <p:nvSpPr>
-          <p:cNvPr id="9" name="Google Shape;101;p15">
-            <a:extLst>
-              <a:ext uri="{FF2B5EF4-FFF2-40B4-BE49-F238E27FC236}">
-                <a16:creationId xmlns:a16="http://schemas.microsoft.com/office/drawing/2014/main" id="{C016287F-4D86-7743-9DFE-AE51B7DF2F4D}"/>
-              </a:ext>
-            </a:extLst>
-          </p:cNvPr>
-          <p:cNvSpPr txBox="1"/>
-          <p:nvPr/>
-        </p:nvSpPr>
-        <p:spPr>
-          <a:xfrm>
-            <a:off x="3271343" y="3254615"/>
-            <a:ext cx="5738649" cy="782979"/>
-          </a:xfrm>
-          <a:prstGeom prst="rect">
-            <a:avLst/>
-          </a:prstGeom>
-          <a:noFill/>
-          <a:ln w="38100">
-            <a:solidFill>
-              <a:schemeClr val="accent1"/>
-            </a:solidFill>
-          </a:ln>
-        </p:spPr>
-        <p:txBody>
-          <a:bodyPr spcFirstLastPara="1" wrap="square" lIns="91425" tIns="91425" rIns="91425" bIns="91425" anchor="t" anchorCtr="0">
-            <a:noAutofit/>
-          </a:bodyPr>
-          <a:lstStyle/>
-          <a:p>
-            <a:pPr marL="0" lvl="0" indent="0" algn="ctr" rtl="0">
-              <a:spcBef>
-                <a:spcPts val="0"/>
-              </a:spcBef>
-              <a:spcAft>
-                <a:spcPts val="0"/>
-              </a:spcAft>
-              <a:buClr>
-                <a:schemeClr val="dk1"/>
-              </a:buClr>
-              <a:buSzPts val="1100"/>
-              <a:buFont typeface="Arial"/>
-              <a:buNone/>
-            </a:pPr>
-            <a:r>
-              <a:rPr lang="en-US" sz="2000" b="1" dirty="0"/>
-              <a:t>Deep Learning (DL)</a:t>
-            </a:r>
-            <a:endParaRPr sz="2000" dirty="0"/>
-          </a:p>
-          <a:p>
-            <a:pPr marL="0" lvl="0" indent="0" algn="ctr" rtl="0">
-              <a:spcBef>
-                <a:spcPts val="0"/>
-              </a:spcBef>
-              <a:spcAft>
-                <a:spcPts val="0"/>
-              </a:spcAft>
-              <a:buClr>
-                <a:schemeClr val="dk1"/>
-              </a:buClr>
-              <a:buSzPts val="1100"/>
-              <a:buFont typeface="Arial"/>
-              <a:buNone/>
-            </a:pPr>
-            <a:r>
-              <a:rPr lang="en-US" sz="2000" dirty="0"/>
-              <a:t>ML implemented as Neural Network</a:t>
-            </a:r>
-            <a:endParaRPr sz="2000" dirty="0"/>
-          </a:p>
-          <a:p>
-            <a:pPr marL="0" lvl="0" indent="0" algn="ctr" rtl="0">
-              <a:spcBef>
-                <a:spcPts val="0"/>
-              </a:spcBef>
-              <a:spcAft>
-                <a:spcPts val="0"/>
-              </a:spcAft>
-              <a:buNone/>
-            </a:pPr>
-            <a:endParaRPr sz="2000" dirty="0"/>
-          </a:p>
-        </p:txBody>
-      </p:sp>
-      <p:sp>
-        <p:nvSpPr>
-          <p:cNvPr id="10" name="Google Shape;101;p15">
-            <a:extLst>
-              <a:ext uri="{FF2B5EF4-FFF2-40B4-BE49-F238E27FC236}">
-                <a16:creationId xmlns:a16="http://schemas.microsoft.com/office/drawing/2014/main" id="{0585ABF0-8CC5-4A41-8D08-669BDDE773D3}"/>
-              </a:ext>
-            </a:extLst>
-          </p:cNvPr>
-          <p:cNvSpPr txBox="1"/>
-          <p:nvPr/>
-        </p:nvSpPr>
-        <p:spPr>
-          <a:xfrm>
-            <a:off x="4389707" y="5558017"/>
-            <a:ext cx="3501921" cy="1093905"/>
-          </a:xfrm>
-          <a:prstGeom prst="rect">
-            <a:avLst/>
-          </a:prstGeom>
-          <a:noFill/>
-          <a:ln w="38100">
-            <a:solidFill>
-              <a:schemeClr val="accent1"/>
-            </a:solidFill>
-          </a:ln>
-        </p:spPr>
-        <p:txBody>
-          <a:bodyPr spcFirstLastPara="1" wrap="square" lIns="91425" tIns="91425" rIns="91425" bIns="91425" anchor="t" anchorCtr="0">
-            <a:noAutofit/>
-          </a:bodyPr>
-          <a:lstStyle/>
-          <a:p>
-            <a:pPr marL="0" lvl="0" indent="0" algn="ctr" rtl="0">
-              <a:spcBef>
-                <a:spcPts val="0"/>
-              </a:spcBef>
-              <a:spcAft>
-                <a:spcPts val="0"/>
-              </a:spcAft>
-              <a:buClr>
-                <a:schemeClr val="dk1"/>
-              </a:buClr>
-              <a:buSzPts val="1100"/>
-              <a:buFont typeface="Arial"/>
-              <a:buNone/>
-            </a:pPr>
-            <a:r>
-              <a:rPr lang="en-US" sz="2000" b="1" dirty="0"/>
-              <a:t>Data Science (DS)</a:t>
-            </a:r>
-            <a:endParaRPr sz="2000" b="1" dirty="0"/>
-          </a:p>
-          <a:p>
-            <a:pPr marL="0" lvl="0" indent="0" algn="ctr" rtl="0">
-              <a:spcBef>
-                <a:spcPts val="0"/>
-              </a:spcBef>
-              <a:spcAft>
-                <a:spcPts val="0"/>
-              </a:spcAft>
-              <a:buNone/>
-            </a:pPr>
-            <a:r>
-              <a:rPr lang="en-US" sz="2000" dirty="0"/>
-              <a:t>computer skills + statistics</a:t>
-            </a:r>
-            <a:endParaRPr sz="2000" dirty="0"/>
-          </a:p>
-          <a:p>
-            <a:pPr marL="0" lvl="0" indent="0" algn="ctr" rtl="0">
-              <a:spcBef>
-                <a:spcPts val="0"/>
-              </a:spcBef>
-              <a:spcAft>
-                <a:spcPts val="0"/>
-              </a:spcAft>
-              <a:buNone/>
-            </a:pPr>
-            <a:r>
-              <a:rPr lang="en-US" sz="2000" dirty="0"/>
-              <a:t>CSV files, SQL, PowerPoint</a:t>
-            </a:r>
-          </a:p>
-        </p:txBody>
-      </p:sp>
-      <p:sp>
-        <p:nvSpPr>
-          <p:cNvPr id="11" name="Google Shape;101;p15">
-            <a:extLst>
-              <a:ext uri="{FF2B5EF4-FFF2-40B4-BE49-F238E27FC236}">
-                <a16:creationId xmlns:a16="http://schemas.microsoft.com/office/drawing/2014/main" id="{7D99C063-E9A5-BC4A-B3CB-B995915FB246}"/>
-              </a:ext>
-            </a:extLst>
-          </p:cNvPr>
-          <p:cNvSpPr txBox="1"/>
-          <p:nvPr/>
-        </p:nvSpPr>
-        <p:spPr>
-          <a:xfrm>
-            <a:off x="3878316" y="4219736"/>
-            <a:ext cx="4524702" cy="1156139"/>
-          </a:xfrm>
-          <a:prstGeom prst="rect">
-            <a:avLst/>
-          </a:prstGeom>
-          <a:noFill/>
-          <a:ln w="38100">
-            <a:solidFill>
-              <a:schemeClr val="accent1"/>
-            </a:solidFill>
-          </a:ln>
-        </p:spPr>
-        <p:txBody>
-          <a:bodyPr spcFirstLastPara="1" wrap="square" lIns="91425" tIns="91425" rIns="91425" bIns="91425" anchor="t" anchorCtr="0">
-            <a:noAutofit/>
-          </a:bodyPr>
-          <a:lstStyle/>
-          <a:p>
-            <a:pPr marL="0" lvl="0" indent="0" algn="ctr" rtl="0">
-              <a:spcBef>
-                <a:spcPts val="0"/>
-              </a:spcBef>
-              <a:spcAft>
-                <a:spcPts val="0"/>
-              </a:spcAft>
-              <a:buClr>
-                <a:schemeClr val="dk1"/>
-              </a:buClr>
-              <a:buSzPts val="1100"/>
-              <a:buFont typeface="Arial"/>
-              <a:buNone/>
-            </a:pPr>
-            <a:r>
-              <a:rPr lang="en-US" sz="2000" b="1" dirty="0"/>
-              <a:t>Machine Learning (ML)</a:t>
-            </a:r>
-            <a:endParaRPr sz="2000" dirty="0"/>
-          </a:p>
-          <a:p>
-            <a:pPr marL="0" lvl="0" indent="0" algn="ctr" rtl="0">
-              <a:spcBef>
-                <a:spcPts val="0"/>
-              </a:spcBef>
-              <a:spcAft>
-                <a:spcPts val="0"/>
-              </a:spcAft>
-              <a:buClr>
-                <a:schemeClr val="dk1"/>
-              </a:buClr>
-              <a:buSzPts val="1100"/>
-              <a:buFont typeface="Arial"/>
-              <a:buNone/>
-            </a:pPr>
-            <a:r>
-              <a:rPr lang="en-US" sz="2000" dirty="0"/>
-              <a:t>DS where algorithm learns from data to make predictions</a:t>
-            </a:r>
-            <a:endParaRPr sz="2000" dirty="0"/>
-          </a:p>
-          <a:p>
-            <a:pPr marL="0" lvl="0" indent="0" algn="ctr" rtl="0">
-              <a:spcBef>
-                <a:spcPts val="0"/>
-              </a:spcBef>
-              <a:spcAft>
-                <a:spcPts val="0"/>
-              </a:spcAft>
-              <a:buNone/>
-            </a:pPr>
-            <a:endParaRPr sz="2000" dirty="0"/>
-          </a:p>
-        </p:txBody>
-      </p:sp>
-      <p:sp>
-        <p:nvSpPr>
-          <p:cNvPr id="12" name="Google Shape;101;p15">
-            <a:extLst>
-              <a:ext uri="{FF2B5EF4-FFF2-40B4-BE49-F238E27FC236}">
-                <a16:creationId xmlns:a16="http://schemas.microsoft.com/office/drawing/2014/main" id="{BF1D8829-5635-244F-9400-F8BC4670F427}"/>
-              </a:ext>
-            </a:extLst>
-          </p:cNvPr>
-          <p:cNvSpPr txBox="1"/>
-          <p:nvPr/>
-        </p:nvSpPr>
-        <p:spPr>
-          <a:xfrm>
-            <a:off x="998482" y="338258"/>
-            <a:ext cx="10284371" cy="1129700"/>
-          </a:xfrm>
-          <a:prstGeom prst="rect">
-            <a:avLst/>
-          </a:prstGeom>
-          <a:noFill/>
-          <a:ln w="38100">
-            <a:solidFill>
-              <a:schemeClr val="accent1"/>
-            </a:solidFill>
-          </a:ln>
-        </p:spPr>
-        <p:txBody>
-          <a:bodyPr spcFirstLastPara="1" wrap="square" lIns="91425" tIns="91425" rIns="91425" bIns="91425" anchor="t" anchorCtr="0">
-            <a:noAutofit/>
-          </a:bodyPr>
-          <a:lstStyle/>
-          <a:p>
-            <a:pPr lvl="0" algn="ctr">
-              <a:buClr>
-                <a:schemeClr val="dk1"/>
-              </a:buClr>
-              <a:buSzPts val="1100"/>
-            </a:pPr>
-            <a:r>
-              <a:rPr lang="en-US" sz="2000" b="1" dirty="0"/>
-              <a:t>Artificial General Intelligence (AGI)</a:t>
-            </a:r>
-            <a:endParaRPr lang="en-US" sz="2000" dirty="0"/>
-          </a:p>
-          <a:p>
-            <a:pPr lvl="0" algn="ctr">
-              <a:buClr>
-                <a:schemeClr val="dk1"/>
-              </a:buClr>
-              <a:buSzPts val="1100"/>
-            </a:pPr>
-            <a:r>
-              <a:rPr lang="en-US" sz="2000" dirty="0"/>
-              <a:t>    AI that could successfully perform any intellectual task that a human can </a:t>
-            </a:r>
-          </a:p>
-          <a:p>
-            <a:pPr lvl="0" algn="ctr">
-              <a:buClr>
-                <a:schemeClr val="dk1"/>
-              </a:buClr>
-              <a:buSzPts val="1100"/>
-            </a:pPr>
-            <a:r>
-              <a:rPr lang="en-US" sz="2000" dirty="0"/>
-              <a:t>(Turing test (1950), ...)</a:t>
-            </a:r>
-          </a:p>
-          <a:p>
-            <a:pPr marL="0" lvl="0" indent="0" algn="ctr" rtl="0">
-              <a:spcBef>
-                <a:spcPts val="0"/>
-              </a:spcBef>
-              <a:spcAft>
-                <a:spcPts val="0"/>
-              </a:spcAft>
-              <a:buClr>
-                <a:schemeClr val="dk1"/>
-              </a:buClr>
-              <a:buSzPts val="1100"/>
-              <a:buFont typeface="Arial"/>
-              <a:buNone/>
-            </a:pPr>
-            <a:endParaRPr sz="2000" dirty="0"/>
-          </a:p>
-          <a:p>
-            <a:pPr marL="0" lvl="0" indent="0" algn="ctr" rtl="0">
-              <a:spcBef>
-                <a:spcPts val="0"/>
-              </a:spcBef>
-              <a:spcAft>
-                <a:spcPts val="0"/>
-              </a:spcAft>
-              <a:buNone/>
-            </a:pPr>
-            <a:endParaRPr sz="2000" dirty="0"/>
-          </a:p>
-        </p:txBody>
-      </p:sp>
-      <p:sp>
-        <p:nvSpPr>
-          <p:cNvPr id="13" name="Google Shape;101;p15">
-            <a:extLst>
-              <a:ext uri="{FF2B5EF4-FFF2-40B4-BE49-F238E27FC236}">
-                <a16:creationId xmlns:a16="http://schemas.microsoft.com/office/drawing/2014/main" id="{F1C4D3F2-5556-474D-9531-933A6DCD3C81}"/>
-              </a:ext>
-            </a:extLst>
-          </p:cNvPr>
-          <p:cNvSpPr txBox="1"/>
-          <p:nvPr/>
-        </p:nvSpPr>
-        <p:spPr>
-          <a:xfrm>
-            <a:off x="1813033" y="1650100"/>
-            <a:ext cx="8655269" cy="1422373"/>
-          </a:xfrm>
-          <a:prstGeom prst="rect">
-            <a:avLst/>
-          </a:prstGeom>
-          <a:noFill/>
-          <a:ln w="38100">
-            <a:solidFill>
-              <a:schemeClr val="accent1"/>
-            </a:solidFill>
-          </a:ln>
-        </p:spPr>
-        <p:txBody>
-          <a:bodyPr spcFirstLastPara="1" wrap="square" lIns="91425" tIns="91425" rIns="91425" bIns="91425" anchor="t" anchorCtr="0">
-            <a:noAutofit/>
-          </a:bodyPr>
-          <a:lstStyle/>
-          <a:p>
-            <a:pPr marL="0" lvl="0" indent="0" algn="ctr" rtl="0">
-              <a:spcBef>
-                <a:spcPts val="0"/>
-              </a:spcBef>
-              <a:spcAft>
-                <a:spcPts val="0"/>
-              </a:spcAft>
-              <a:buClr>
-                <a:schemeClr val="dk1"/>
-              </a:buClr>
-              <a:buSzPts val="1100"/>
-              <a:buFont typeface="Arial"/>
-              <a:buNone/>
-            </a:pPr>
-            <a:r>
-              <a:rPr lang="en-US" sz="2000" b="1" dirty="0"/>
-              <a:t>Artificial Intelligence (AI)</a:t>
-            </a:r>
-            <a:endParaRPr sz="2000" dirty="0"/>
-          </a:p>
-          <a:p>
-            <a:pPr marL="0" lvl="0" indent="0" algn="ctr" rtl="0">
-              <a:spcBef>
-                <a:spcPts val="0"/>
-              </a:spcBef>
-              <a:spcAft>
-                <a:spcPts val="0"/>
-              </a:spcAft>
-              <a:buClr>
-                <a:schemeClr val="dk1"/>
-              </a:buClr>
-              <a:buSzPts val="1100"/>
-              <a:buFont typeface="Arial"/>
-              <a:buNone/>
-            </a:pPr>
-            <a:r>
-              <a:rPr lang="en-US" sz="2000" dirty="0"/>
-              <a:t>    ML (DL) learning "human" abilities (speech and music recognition, conversation, visual recognition, video prediction, reasoning, self-driving cars, playing games, etc.)</a:t>
-            </a:r>
-            <a:endParaRPr sz="2000" dirty="0"/>
-          </a:p>
-        </p:txBody>
-      </p:sp>
-    </p:spTree>
-  </p:cSld>
-  <p:clrMapOvr>
-    <a:masterClrMapping/>
-  </p:clrMapOvr>
-</p:sld>
-</file>
-
-<file path=ppt/slides/slide8.xml><?xml version="1.0" encoding="utf-8"?>
+<file path=ppt/slides/slide9.xml><?xml version="1.0" encoding="utf-8"?>
 <p:sld xmlns:a="http://schemas.openxmlformats.org/drawingml/2006/main" xmlns:r="http://schemas.openxmlformats.org/officeDocument/2006/relationships" xmlns:p="http://schemas.openxmlformats.org/presentationml/2006/main">
   <p:cSld>
     <p:spTree>
@@ -22391,8 +24589,8 @@
         </p:nvSpPr>
         <p:spPr>
           <a:xfrm>
-            <a:off x="0" y="0"/>
-            <a:ext cx="12192000" cy="1205948"/>
+            <a:off x="0" y="275350"/>
+            <a:ext cx="12192000" cy="1518726"/>
           </a:xfrm>
           <a:prstGeom prst="rect">
             <a:avLst/>
@@ -22418,22 +24616,45 @@
               <a:buNone/>
             </a:pPr>
             <a:r>
-              <a:rPr lang="en-US" sz="3200" b="1" dirty="0">
-                <a:solidFill>
-                  <a:schemeClr val="dk1"/>
-                </a:solidFill>
-                <a:latin typeface="Calibri"/>
+              <a:rPr lang="en-US" sz="2800" b="1" dirty="0">
+                <a:solidFill>
+                  <a:schemeClr val="dk1"/>
+                </a:solidFill>
+                <a:latin typeface="+mn-lt"/>
                 <a:ea typeface="Calibri"/>
                 <a:cs typeface="Calibri"/>
                 <a:sym typeface="Calibri"/>
               </a:rPr>
-              <a:t>Recent breakthroughs in DL made it practical </a:t>
-            </a:r>
-            <a:endParaRPr sz="3200" b="1" dirty="0">
+              <a:t>Recent breakthroughs in DL methods</a:t>
+            </a:r>
+          </a:p>
+          <a:p>
+            <a:pPr marL="0" lvl="0" indent="0" algn="ctr" rtl="0">
+              <a:spcBef>
+                <a:spcPts val="0"/>
+              </a:spcBef>
+              <a:spcAft>
+                <a:spcPts val="0"/>
+              </a:spcAft>
+              <a:buNone/>
+            </a:pPr>
+            <a:r>
+              <a:rPr lang="en-US" sz="2800" b="1" dirty="0">
+                <a:solidFill>
+                  <a:schemeClr val="dk1"/>
+                </a:solidFill>
+                <a:latin typeface="+mn-lt"/>
+                <a:ea typeface="Calibri"/>
+                <a:cs typeface="Calibri"/>
+                <a:sym typeface="Calibri"/>
+              </a:rPr>
+              <a:t>made them practical </a:t>
+            </a:r>
+            <a:endParaRPr sz="2800" b="1" dirty="0">
               <a:solidFill>
                 <a:schemeClr val="dk1"/>
               </a:solidFill>
-              <a:latin typeface="Calibri"/>
+              <a:latin typeface="+mn-lt"/>
               <a:ea typeface="Calibri"/>
               <a:cs typeface="Calibri"/>
               <a:sym typeface="Calibri"/>
@@ -22450,22 +24671,22 @@
               <a:buNone/>
             </a:pPr>
             <a:r>
-              <a:rPr lang="en-US" sz="3200" b="1" dirty="0">
-                <a:solidFill>
-                  <a:schemeClr val="dk1"/>
-                </a:solidFill>
-                <a:latin typeface="Calibri"/>
+              <a:rPr lang="en-US" sz="2800" b="1" dirty="0">
+                <a:solidFill>
+                  <a:schemeClr val="dk1"/>
+                </a:solidFill>
+                <a:latin typeface="+mn-lt"/>
                 <a:ea typeface="Calibri"/>
                 <a:cs typeface="Calibri"/>
                 <a:sym typeface="Calibri"/>
               </a:rPr>
               <a:t>(effective, affordable, and easy).</a:t>
             </a:r>
-            <a:endParaRPr sz="3200" b="1" dirty="0">
+            <a:endParaRPr sz="2800" b="1" dirty="0">
               <a:solidFill>
                 <a:schemeClr val="dk1"/>
               </a:solidFill>
-              <a:latin typeface="Calibri"/>
+              <a:latin typeface="+mn-lt"/>
               <a:ea typeface="Calibri"/>
               <a:cs typeface="Calibri"/>
               <a:sym typeface="Calibri"/>
@@ -22481,8 +24702,8 @@
         </p:nvSpPr>
         <p:spPr>
           <a:xfrm>
-            <a:off x="741750" y="1739100"/>
-            <a:ext cx="10708500" cy="4555374"/>
+            <a:off x="967536" y="2325146"/>
+            <a:ext cx="10634155" cy="3308205"/>
           </a:xfrm>
           <a:prstGeom prst="rect">
             <a:avLst/>
@@ -22498,21 +24719,22 @@
           </a:bodyPr>
           <a:lstStyle/>
           <a:p>
-            <a:pPr marL="0" lvl="0" indent="0" algn="l" rtl="0">
-              <a:spcBef>
-                <a:spcPts val="0"/>
-              </a:spcBef>
-              <a:spcAft>
-                <a:spcPts val="0"/>
-              </a:spcAft>
-              <a:buNone/>
+            <a:pPr marL="285750" lvl="0" indent="-285750" algn="l" rtl="0">
+              <a:spcBef>
+                <a:spcPts val="0"/>
+              </a:spcBef>
+              <a:spcAft>
+                <a:spcPts val="0"/>
+              </a:spcAft>
+              <a:buFont typeface="Arial" panose="020B0604020202020204" pitchFamily="34" charset="0"/>
+              <a:buChar char="•"/>
             </a:pPr>
             <a:r>
-              <a:rPr lang="en-US" sz="2000" dirty="0">
-                <a:solidFill>
-                  <a:schemeClr val="dk1"/>
-                </a:solidFill>
-                <a:latin typeface="Calibri"/>
+              <a:rPr lang="en-US" sz="1800" dirty="0">
+                <a:solidFill>
+                  <a:schemeClr val="dk1"/>
+                </a:solidFill>
+                <a:latin typeface="+mn-lt"/>
                 <a:ea typeface="Calibri"/>
                 <a:cs typeface="Calibri"/>
                 <a:sym typeface="Calibri"/>
@@ -22520,11 +24742,11 @@
               <a:t>Instead of software engineers manually coding </a:t>
             </a:r>
             <a:r>
-              <a:rPr lang="en-US" sz="2000" b="1" dirty="0">
+              <a:rPr lang="en-US" sz="1800" b="1" dirty="0">
                 <a:solidFill>
                   <a:srgbClr val="0000FF"/>
                 </a:solidFill>
-                <a:latin typeface="Calibri"/>
+                <a:latin typeface="+mn-lt"/>
                 <a:ea typeface="Calibri"/>
                 <a:cs typeface="Calibri"/>
                 <a:sym typeface="Calibri"/>
@@ -22532,853 +24754,235 @@
               <a:t>if/else</a:t>
             </a:r>
             <a:r>
-              <a:rPr lang="en-US" sz="2000" dirty="0">
-                <a:solidFill>
-                  <a:schemeClr val="dk1"/>
-                </a:solidFill>
-                <a:latin typeface="Calibri"/>
+              <a:rPr lang="en-US" sz="1800" dirty="0">
+                <a:solidFill>
+                  <a:schemeClr val="dk1"/>
+                </a:solidFill>
+                <a:latin typeface="+mn-lt"/>
                 <a:ea typeface="Calibri"/>
                 <a:cs typeface="Calibri"/>
                 <a:sym typeface="Calibri"/>
               </a:rPr>
-              <a:t> logic,</a:t>
-            </a:r>
-            <a:endParaRPr sz="2000" dirty="0">
+              <a:t> logic, DL algorithms can train networks equivalent to Billions of </a:t>
+            </a:r>
+            <a:r>
+              <a:rPr lang="en-US" sz="1800" b="1" dirty="0">
+                <a:solidFill>
+                  <a:srgbClr val="0000FF"/>
+                </a:solidFill>
+                <a:latin typeface="+mn-lt"/>
+                <a:ea typeface="Calibri"/>
+                <a:cs typeface="Calibri"/>
+                <a:sym typeface="Calibri"/>
+              </a:rPr>
+              <a:t>if/else</a:t>
+            </a:r>
+            <a:r>
+              <a:rPr lang="en-US" sz="1800" dirty="0">
+                <a:solidFill>
+                  <a:schemeClr val="dk1"/>
+                </a:solidFill>
+                <a:latin typeface="+mn-lt"/>
+                <a:ea typeface="Calibri"/>
+                <a:cs typeface="Calibri"/>
+                <a:sym typeface="Calibri"/>
+              </a:rPr>
+              <a:t>-s. (Record of year 2020 – 175 </a:t>
+            </a:r>
+            <a:r>
+              <a:rPr lang="en-US" sz="1800" dirty="0" err="1">
+                <a:solidFill>
+                  <a:schemeClr val="dk1"/>
+                </a:solidFill>
+                <a:latin typeface="+mn-lt"/>
+                <a:ea typeface="Calibri"/>
+                <a:cs typeface="Calibri"/>
+                <a:sym typeface="Calibri"/>
+              </a:rPr>
+              <a:t>Bln</a:t>
+            </a:r>
+            <a:r>
+              <a:rPr lang="en-US" sz="1800" dirty="0">
+                <a:solidFill>
+                  <a:schemeClr val="dk1"/>
+                </a:solidFill>
+                <a:latin typeface="+mn-lt"/>
+                <a:ea typeface="Calibri"/>
+                <a:cs typeface="Calibri"/>
+                <a:sym typeface="Calibri"/>
+              </a:rPr>
+              <a:t> nodes)</a:t>
+            </a:r>
+          </a:p>
+          <a:p>
+            <a:pPr lvl="0" algn="l" rtl="0">
+              <a:spcBef>
+                <a:spcPts val="0"/>
+              </a:spcBef>
+              <a:spcAft>
+                <a:spcPts val="0"/>
+              </a:spcAft>
+            </a:pPr>
+            <a:endParaRPr sz="1800" dirty="0">
               <a:solidFill>
                 <a:schemeClr val="dk1"/>
               </a:solidFill>
-              <a:latin typeface="Calibri"/>
+              <a:latin typeface="+mn-lt"/>
               <a:ea typeface="Calibri"/>
               <a:cs typeface="Calibri"/>
               <a:sym typeface="Calibri"/>
             </a:endParaRPr>
           </a:p>
           <a:p>
-            <a:pPr marL="0" lvl="0" indent="0" algn="l" rtl="0">
-              <a:spcBef>
-                <a:spcPts val="0"/>
-              </a:spcBef>
-              <a:spcAft>
-                <a:spcPts val="0"/>
-              </a:spcAft>
-              <a:buClr>
-                <a:schemeClr val="dk1"/>
-              </a:buClr>
-              <a:buSzPts val="1100"/>
-              <a:buFont typeface="Arial"/>
-              <a:buNone/>
+            <a:pPr marL="285750" lvl="0" indent="-285750">
+              <a:buFont typeface="Arial" panose="020B0604020202020204" pitchFamily="34" charset="0"/>
+              <a:buChar char="•"/>
             </a:pPr>
             <a:r>
-              <a:rPr lang="en-US" sz="2000" dirty="0">
-                <a:solidFill>
-                  <a:schemeClr val="dk1"/>
-                </a:solidFill>
-                <a:latin typeface="Calibri"/>
+              <a:rPr lang="en-US" sz="1800" dirty="0">
+                <a:solidFill>
+                  <a:schemeClr val="dk1"/>
+                </a:solidFill>
+                <a:latin typeface="+mn-lt"/>
                 <a:ea typeface="Calibri"/>
                 <a:cs typeface="Calibri"/>
                 <a:sym typeface="Calibri"/>
               </a:rPr>
-              <a:t>DL algorithms can train networks equivalent to ~10s of million of </a:t>
-            </a:r>
-            <a:r>
-              <a:rPr lang="en-US" sz="2000" b="1" dirty="0">
-                <a:solidFill>
-                  <a:srgbClr val="0000FF"/>
-                </a:solidFill>
-                <a:latin typeface="Calibri"/>
+              <a:t>Nowadays you can choose from a variety of pre-trained / pre-configured networks on the cloud. </a:t>
+            </a:r>
+            <a:r>
+              <a:rPr lang="en-US" sz="1800" dirty="0">
+                <a:solidFill>
+                  <a:schemeClr val="dk1"/>
+                </a:solidFill>
                 <a:ea typeface="Calibri"/>
                 <a:cs typeface="Calibri"/>
                 <a:sym typeface="Calibri"/>
               </a:rPr>
-              <a:t>if/else</a:t>
-            </a:r>
-            <a:r>
-              <a:rPr lang="en-US" sz="2000" dirty="0">
-                <a:solidFill>
-                  <a:schemeClr val="dk1"/>
-                </a:solidFill>
-                <a:latin typeface="Calibri"/>
+              <a:t>You don't have to code from scratch</a:t>
+            </a:r>
+            <a:r>
+              <a:rPr lang="en-US" sz="1800" dirty="0">
+                <a:solidFill>
+                  <a:schemeClr val="dk1"/>
+                </a:solidFill>
+                <a:latin typeface="+mn-lt"/>
                 <a:ea typeface="Calibri"/>
                 <a:cs typeface="Calibri"/>
                 <a:sym typeface="Calibri"/>
               </a:rPr>
-              <a:t>-s.</a:t>
-            </a:r>
-            <a:endParaRPr sz="2000" dirty="0">
+              <a:t>. You don't have to train from scratch</a:t>
+            </a:r>
+          </a:p>
+          <a:p>
+            <a:pPr marL="285750" lvl="0" indent="-285750" algn="l" rtl="0">
+              <a:spcBef>
+                <a:spcPts val="0"/>
+              </a:spcBef>
+              <a:spcAft>
+                <a:spcPts val="0"/>
+              </a:spcAft>
+              <a:buFont typeface="Arial" panose="020B0604020202020204" pitchFamily="34" charset="0"/>
+              <a:buChar char="•"/>
+            </a:pPr>
+            <a:endParaRPr lang="en-US" sz="1800" dirty="0">
               <a:solidFill>
                 <a:schemeClr val="dk1"/>
               </a:solidFill>
-              <a:latin typeface="Calibri"/>
+              <a:latin typeface="+mn-lt"/>
               <a:ea typeface="Calibri"/>
               <a:cs typeface="Calibri"/>
               <a:sym typeface="Calibri"/>
             </a:endParaRPr>
           </a:p>
           <a:p>
-            <a:pPr marL="0" lvl="0" indent="0" algn="l" rtl="0">
-              <a:spcBef>
-                <a:spcPts val="0"/>
-              </a:spcBef>
-              <a:spcAft>
-                <a:spcPts val="0"/>
-              </a:spcAft>
-              <a:buNone/>
+            <a:pPr marL="285750" indent="-285750">
+              <a:buFont typeface="Arial" panose="020B0604020202020204" pitchFamily="34" charset="0"/>
+              <a:buChar char="•"/>
             </a:pPr>
-            <a:endParaRPr sz="2000" dirty="0">
+            <a:r>
+              <a:rPr lang="en-US" sz="1800" dirty="0">
+                <a:solidFill>
+                  <a:schemeClr val="dk1"/>
+                </a:solidFill>
+                <a:latin typeface="+mn-lt"/>
+                <a:ea typeface="Calibri"/>
+                <a:cs typeface="Calibri"/>
+                <a:sym typeface="Calibri"/>
+              </a:rPr>
+              <a:t>Distributed ML on Cloud (Google, Microsoft, Amazon, Intel, IBM, etc.) allow you to achieve ~100s </a:t>
+            </a:r>
+            <a:r>
+              <a:rPr lang="en-US" sz="1800" dirty="0" err="1">
+                <a:solidFill>
+                  <a:schemeClr val="dk1"/>
+                </a:solidFill>
+                <a:latin typeface="+mn-lt"/>
+                <a:ea typeface="Calibri"/>
+                <a:cs typeface="Calibri"/>
+                <a:sym typeface="Calibri"/>
+              </a:rPr>
+              <a:t>petaFLOPS</a:t>
+            </a:r>
+            <a:r>
+              <a:rPr lang="en-US" sz="1800" dirty="0">
+                <a:solidFill>
+                  <a:schemeClr val="dk1"/>
+                </a:solidFill>
+                <a:latin typeface="+mn-lt"/>
+                <a:ea typeface="Calibri"/>
+                <a:cs typeface="Calibri"/>
+                <a:sym typeface="Calibri"/>
+              </a:rPr>
+              <a:t> (x10,000 performance increase over the last 4 years). </a:t>
+            </a:r>
+            <a:r>
+              <a:rPr lang="en-US" sz="1800" dirty="0">
+                <a:solidFill>
+                  <a:schemeClr val="dk1"/>
+                </a:solidFill>
+                <a:ea typeface="Calibri"/>
+                <a:cs typeface="Calibri"/>
+                <a:sym typeface="Calibri"/>
+              </a:rPr>
+              <a:t>You don't have to build your own infrastructure</a:t>
+            </a:r>
+          </a:p>
+          <a:p>
+            <a:endParaRPr lang="en-US" sz="1800" dirty="0">
               <a:solidFill>
                 <a:schemeClr val="dk1"/>
               </a:solidFill>
-              <a:latin typeface="Calibri"/>
               <a:ea typeface="Calibri"/>
               <a:cs typeface="Calibri"/>
               <a:sym typeface="Calibri"/>
             </a:endParaRPr>
           </a:p>
           <a:p>
-            <a:pPr lvl="0"/>
-            <a:r>
-              <a:rPr lang="en-US" sz="2000" dirty="0">
-                <a:solidFill>
-                  <a:schemeClr val="dk1"/>
-                </a:solidFill>
-                <a:latin typeface="Calibri"/>
+            <a:pPr marL="285750" indent="-285750">
+              <a:buFont typeface="Arial" panose="020B0604020202020204" pitchFamily="34" charset="0"/>
+              <a:buChar char="•"/>
+            </a:pPr>
+            <a:r>
+              <a:rPr lang="en-US" sz="1800" dirty="0">
+                <a:solidFill>
+                  <a:schemeClr val="dk1"/>
+                </a:solidFill>
                 <a:ea typeface="Calibri"/>
                 <a:cs typeface="Calibri"/>
                 <a:sym typeface="Calibri"/>
               </a:rPr>
-              <a:t>Distributed ML on Cloud (Google, Microsoft, Amazon, Intel, IBM, etc.)</a:t>
-            </a:r>
-            <a:endParaRPr sz="2000" dirty="0">
-              <a:solidFill>
-                <a:schemeClr val="dk1"/>
-              </a:solidFill>
-              <a:latin typeface="Calibri"/>
-              <a:ea typeface="Calibri"/>
-              <a:cs typeface="Calibri"/>
-              <a:sym typeface="Calibri"/>
-            </a:endParaRPr>
-          </a:p>
-          <a:p>
-            <a:pPr marL="0" lvl="0" indent="0" algn="l" rtl="0">
-              <a:spcBef>
-                <a:spcPts val="0"/>
-              </a:spcBef>
-              <a:spcAft>
-                <a:spcPts val="0"/>
-              </a:spcAft>
-              <a:buNone/>
-            </a:pPr>
-            <a:r>
-              <a:rPr lang="en-US" sz="2000" dirty="0">
-                <a:solidFill>
-                  <a:schemeClr val="dk1"/>
-                </a:solidFill>
-                <a:latin typeface="Calibri"/>
-                <a:ea typeface="Calibri"/>
-                <a:cs typeface="Calibri"/>
-                <a:sym typeface="Calibri"/>
-              </a:rPr>
-              <a:t>allow to achieve ~100 Petaflops </a:t>
-            </a:r>
-            <a:endParaRPr sz="2000" dirty="0">
-              <a:solidFill>
-                <a:schemeClr val="dk1"/>
-              </a:solidFill>
-              <a:latin typeface="Calibri"/>
-              <a:ea typeface="Calibri"/>
-              <a:cs typeface="Calibri"/>
-              <a:sym typeface="Calibri"/>
-            </a:endParaRPr>
-          </a:p>
-          <a:p>
-            <a:pPr marL="0" lvl="0" indent="0" algn="l" rtl="0">
-              <a:spcBef>
-                <a:spcPts val="0"/>
-              </a:spcBef>
-              <a:spcAft>
-                <a:spcPts val="0"/>
-              </a:spcAft>
-              <a:buNone/>
-            </a:pPr>
-            <a:r>
-              <a:rPr lang="en-US" sz="2000" dirty="0">
-                <a:solidFill>
-                  <a:schemeClr val="dk1"/>
-                </a:solidFill>
-                <a:latin typeface="Calibri"/>
-                <a:ea typeface="Calibri"/>
-                <a:cs typeface="Calibri"/>
-                <a:sym typeface="Calibri"/>
-              </a:rPr>
-              <a:t>(x1000 performance increase in last 3 years).</a:t>
-            </a:r>
-            <a:endParaRPr sz="2000" dirty="0">
-              <a:solidFill>
-                <a:schemeClr val="dk1"/>
-              </a:solidFill>
-              <a:latin typeface="Calibri"/>
-              <a:ea typeface="Calibri"/>
-              <a:cs typeface="Calibri"/>
-              <a:sym typeface="Calibri"/>
-            </a:endParaRPr>
-          </a:p>
-          <a:p>
-            <a:pPr marL="0" lvl="0" indent="0" algn="l" rtl="0">
-              <a:spcBef>
-                <a:spcPts val="0"/>
-              </a:spcBef>
-              <a:spcAft>
-                <a:spcPts val="0"/>
-              </a:spcAft>
-              <a:buNone/>
-            </a:pPr>
-            <a:endParaRPr sz="2000" dirty="0">
-              <a:solidFill>
-                <a:schemeClr val="dk1"/>
-              </a:solidFill>
-              <a:latin typeface="Calibri"/>
-              <a:ea typeface="Calibri"/>
-              <a:cs typeface="Calibri"/>
-              <a:sym typeface="Calibri"/>
-            </a:endParaRPr>
-          </a:p>
-          <a:p>
-            <a:pPr marL="0" lvl="0" indent="0" algn="l" rtl="0">
-              <a:spcBef>
-                <a:spcPts val="0"/>
-              </a:spcBef>
-              <a:spcAft>
-                <a:spcPts val="0"/>
-              </a:spcAft>
-              <a:buNone/>
-            </a:pPr>
-            <a:r>
-              <a:rPr lang="en-US" sz="2000" dirty="0">
-                <a:solidFill>
-                  <a:schemeClr val="dk1"/>
-                </a:solidFill>
-                <a:latin typeface="Calibri"/>
-                <a:ea typeface="Calibri"/>
-                <a:cs typeface="Calibri"/>
-                <a:sym typeface="Calibri"/>
-              </a:rPr>
-              <a:t>Prices dropping down precipitously: $6.50/hour per a Google TPU (180 </a:t>
-            </a:r>
-            <a:r>
-              <a:rPr lang="en-US" sz="2000" dirty="0" err="1">
-                <a:solidFill>
-                  <a:schemeClr val="dk1"/>
-                </a:solidFill>
-                <a:latin typeface="Calibri"/>
-                <a:ea typeface="Calibri"/>
-                <a:cs typeface="Calibri"/>
-                <a:sym typeface="Calibri"/>
-              </a:rPr>
-              <a:t>TFlops</a:t>
-            </a:r>
-            <a:r>
-              <a:rPr lang="en-US" sz="2000" dirty="0">
-                <a:solidFill>
-                  <a:schemeClr val="dk1"/>
-                </a:solidFill>
-                <a:latin typeface="Calibri"/>
-                <a:ea typeface="Calibri"/>
-                <a:cs typeface="Calibri"/>
-                <a:sym typeface="Calibri"/>
-              </a:rPr>
-              <a:t>).</a:t>
-            </a:r>
-            <a:endParaRPr sz="2000" dirty="0">
-              <a:solidFill>
-                <a:schemeClr val="dk1"/>
-              </a:solidFill>
-              <a:latin typeface="Calibri"/>
-              <a:ea typeface="Calibri"/>
-              <a:cs typeface="Calibri"/>
-              <a:sym typeface="Calibri"/>
-            </a:endParaRPr>
-          </a:p>
-          <a:p>
-            <a:pPr marL="0" lvl="0" indent="0" algn="l" rtl="0">
-              <a:spcBef>
-                <a:spcPts val="0"/>
-              </a:spcBef>
-              <a:spcAft>
-                <a:spcPts val="0"/>
-              </a:spcAft>
-              <a:buNone/>
-            </a:pPr>
-            <a:endParaRPr sz="2000" dirty="0">
-              <a:solidFill>
-                <a:schemeClr val="dk1"/>
-              </a:solidFill>
-              <a:latin typeface="Calibri"/>
-              <a:ea typeface="Calibri"/>
-              <a:cs typeface="Calibri"/>
-              <a:sym typeface="Calibri"/>
-            </a:endParaRPr>
-          </a:p>
-          <a:p>
-            <a:pPr marL="0" lvl="0" indent="0" algn="l" rtl="0">
-              <a:spcBef>
-                <a:spcPts val="0"/>
-              </a:spcBef>
-              <a:spcAft>
-                <a:spcPts val="0"/>
-              </a:spcAft>
-              <a:buNone/>
-            </a:pPr>
-            <a:r>
-              <a:rPr lang="en-US" sz="2000" dirty="0">
-                <a:solidFill>
-                  <a:schemeClr val="dk1"/>
-                </a:solidFill>
-                <a:latin typeface="Calibri"/>
-                <a:ea typeface="Calibri"/>
-                <a:cs typeface="Calibri"/>
-                <a:sym typeface="Calibri"/>
-              </a:rPr>
-              <a:t>You don't have to build your own infrastructure, </a:t>
-            </a:r>
-          </a:p>
-          <a:p>
-            <a:pPr marL="0" lvl="0" indent="0" algn="l" rtl="0">
-              <a:spcBef>
-                <a:spcPts val="0"/>
-              </a:spcBef>
-              <a:spcAft>
-                <a:spcPts val="0"/>
-              </a:spcAft>
-              <a:buNone/>
-            </a:pPr>
-            <a:r>
-              <a:rPr lang="en-US" sz="2000" dirty="0">
-                <a:solidFill>
-                  <a:schemeClr val="dk1"/>
-                </a:solidFill>
-                <a:latin typeface="Calibri"/>
-                <a:ea typeface="Calibri"/>
-                <a:cs typeface="Calibri"/>
-                <a:sym typeface="Calibri"/>
-              </a:rPr>
-              <a:t>You don't have to code from scratch. </a:t>
-            </a:r>
-          </a:p>
-          <a:p>
-            <a:pPr marL="0" lvl="0" indent="0" algn="l" rtl="0">
-              <a:spcBef>
-                <a:spcPts val="0"/>
-              </a:spcBef>
-              <a:spcAft>
-                <a:spcPts val="0"/>
-              </a:spcAft>
-              <a:buNone/>
-            </a:pPr>
-            <a:r>
-              <a:rPr lang="en-US" sz="2000" dirty="0">
-                <a:solidFill>
-                  <a:schemeClr val="dk1"/>
-                </a:solidFill>
-                <a:latin typeface="Calibri"/>
-                <a:ea typeface="Calibri"/>
-                <a:cs typeface="Calibri"/>
-                <a:sym typeface="Calibri"/>
-              </a:rPr>
-              <a:t>Nowadays you can use variety of pre-trained / pre-configured networks on the cloud. </a:t>
-            </a:r>
-          </a:p>
-          <a:p>
-            <a:pPr lvl="0"/>
-            <a:r>
-              <a:rPr lang="en-US" sz="2000" dirty="0">
-                <a:solidFill>
-                  <a:schemeClr val="dk1"/>
-                </a:solidFill>
-                <a:latin typeface="Calibri"/>
-                <a:ea typeface="Calibri"/>
-                <a:cs typeface="Calibri"/>
-                <a:sym typeface="Calibri"/>
-              </a:rPr>
-              <a:t>Compare this with just few years ago: low-level C/CUDA coding, custom HPC clusters </a:t>
-            </a:r>
-          </a:p>
-          <a:p>
-            <a:pPr marL="0" lvl="0" indent="0" algn="l" rtl="0">
-              <a:spcBef>
-                <a:spcPts val="0"/>
-              </a:spcBef>
-              <a:spcAft>
-                <a:spcPts val="0"/>
-              </a:spcAft>
-              <a:buNone/>
-            </a:pPr>
-            <a:r>
-              <a:rPr lang="en-US" sz="2000" dirty="0">
-                <a:solidFill>
-                  <a:schemeClr val="dk1"/>
-                </a:solidFill>
-                <a:latin typeface="Calibri"/>
-                <a:ea typeface="Calibri"/>
-                <a:cs typeface="Calibri"/>
-                <a:sym typeface="Calibri"/>
-              </a:rPr>
-              <a:t>    (HPC = High-Performance Computing), etc.</a:t>
-            </a:r>
-            <a:endParaRPr sz="2000" dirty="0">
-              <a:solidFill>
-                <a:schemeClr val="dk1"/>
-              </a:solidFill>
-              <a:latin typeface="Calibri"/>
-              <a:ea typeface="Calibri"/>
-              <a:cs typeface="Calibri"/>
-              <a:sym typeface="Calibri"/>
-            </a:endParaRPr>
+              <a:t>Prices dropping down precipitously</a:t>
+            </a:r>
           </a:p>
         </p:txBody>
       </p:sp>
     </p:spTree>
     <p:extLst>
       <p:ext uri="{BB962C8B-B14F-4D97-AF65-F5344CB8AC3E}">
-        <p14:creationId xmlns:p14="http://schemas.microsoft.com/office/powerpoint/2010/main" val="1722885108"/>
+        <p14:creationId xmlns:p14="http://schemas.microsoft.com/office/powerpoint/2010/main" val="2956485787"/>
       </p:ext>
     </p:extLst>
-  </p:cSld>
-  <p:clrMapOvr>
-    <a:masterClrMapping/>
-  </p:clrMapOvr>
-</p:sld>
-</file>
-
-<file path=ppt/slides/slide9.xml><?xml version="1.0" encoding="utf-8"?>
-<p:sld xmlns:a="http://schemas.openxmlformats.org/drawingml/2006/main" xmlns:r="http://schemas.openxmlformats.org/officeDocument/2006/relationships" xmlns:p="http://schemas.openxmlformats.org/presentationml/2006/main">
-  <p:cSld>
-    <p:spTree>
-      <p:nvGrpSpPr>
-        <p:cNvPr id="1" name="Shape 138"/>
-        <p:cNvGrpSpPr/>
-        <p:nvPr/>
-      </p:nvGrpSpPr>
-      <p:grpSpPr>
-        <a:xfrm>
-          <a:off x="0" y="0"/>
-          <a:ext cx="0" cy="0"/>
-          <a:chOff x="0" y="0"/>
-          <a:chExt cx="0" cy="0"/>
-        </a:xfrm>
-      </p:grpSpPr>
-      <p:sp>
-        <p:nvSpPr>
-          <p:cNvPr id="4" name="Google Shape;139;p20">
-            <a:extLst>
-              <a:ext uri="{FF2B5EF4-FFF2-40B4-BE49-F238E27FC236}">
-                <a16:creationId xmlns:a16="http://schemas.microsoft.com/office/drawing/2014/main" id="{DE6E0AA3-369A-B244-9270-7EECD576DD1F}"/>
-              </a:ext>
-            </a:extLst>
-          </p:cNvPr>
-          <p:cNvSpPr txBox="1"/>
-          <p:nvPr/>
-        </p:nvSpPr>
-        <p:spPr>
-          <a:xfrm>
-            <a:off x="106350" y="1658651"/>
-            <a:ext cx="11929706" cy="4903894"/>
-          </a:xfrm>
-          <a:prstGeom prst="rect">
-            <a:avLst/>
-          </a:prstGeom>
-          <a:noFill/>
-          <a:ln>
-            <a:noFill/>
-          </a:ln>
-        </p:spPr>
-        <p:txBody>
-          <a:bodyPr spcFirstLastPara="1" wrap="square" lIns="91425" tIns="91425" rIns="91425" bIns="91425" anchor="t" anchorCtr="0">
-            <a:noAutofit/>
-          </a:bodyPr>
-          <a:lstStyle/>
-          <a:p>
-            <a:pPr marL="285750" lvl="0" indent="-285750" algn="l" rtl="0">
-              <a:spcBef>
-                <a:spcPts val="0"/>
-              </a:spcBef>
-              <a:spcAft>
-                <a:spcPts val="0"/>
-              </a:spcAft>
-              <a:buFont typeface="Arial" panose="020B0604020202020204" pitchFamily="34" charset="0"/>
-              <a:buChar char="•"/>
-            </a:pPr>
-            <a:r>
-              <a:rPr lang="en-US" sz="1800" dirty="0"/>
-              <a:t>predictions (predictive analytics, forecasting, trends, investments, elections, sport &amp; weather, news, etc.)</a:t>
-            </a:r>
-          </a:p>
-          <a:p>
-            <a:pPr marL="285750" lvl="0" indent="-285750" algn="l" rtl="0">
-              <a:spcBef>
-                <a:spcPts val="0"/>
-              </a:spcBef>
-              <a:spcAft>
-                <a:spcPts val="0"/>
-              </a:spcAft>
-              <a:buFont typeface="Arial" panose="020B0604020202020204" pitchFamily="34" charset="0"/>
-              <a:buChar char="•"/>
-            </a:pPr>
-            <a:r>
-              <a:rPr lang="en-US" sz="1800" dirty="0"/>
-              <a:t>optimization of business processes, reducing costs</a:t>
-            </a:r>
-          </a:p>
-          <a:p>
-            <a:pPr marL="285750" lvl="0" indent="-285750" algn="l" rtl="0">
-              <a:spcBef>
-                <a:spcPts val="0"/>
-              </a:spcBef>
-              <a:spcAft>
-                <a:spcPts val="0"/>
-              </a:spcAft>
-              <a:buFont typeface="Arial" panose="020B0604020202020204" pitchFamily="34" charset="0"/>
-              <a:buChar char="•"/>
-            </a:pPr>
-            <a:r>
-              <a:rPr lang="en-US" sz="1800" dirty="0"/>
-              <a:t>extracting information from text, fuzzy deduplication</a:t>
-            </a:r>
-          </a:p>
-          <a:p>
-            <a:pPr marL="285750" lvl="0" indent="-285750" algn="l" rtl="0">
-              <a:spcBef>
-                <a:spcPts val="0"/>
-              </a:spcBef>
-              <a:spcAft>
-                <a:spcPts val="0"/>
-              </a:spcAft>
-              <a:buFont typeface="Arial" panose="020B0604020202020204" pitchFamily="34" charset="0"/>
-              <a:buChar char="•"/>
-            </a:pPr>
-            <a:r>
-              <a:rPr lang="en-US" sz="1800" dirty="0"/>
-              <a:t>image and face recognition</a:t>
-            </a:r>
-          </a:p>
-          <a:p>
-            <a:pPr marL="285750" lvl="0" indent="-285750" algn="l" rtl="0">
-              <a:spcBef>
-                <a:spcPts val="0"/>
-              </a:spcBef>
-              <a:spcAft>
-                <a:spcPts val="0"/>
-              </a:spcAft>
-              <a:buFont typeface="Arial" panose="020B0604020202020204" pitchFamily="34" charset="0"/>
-              <a:buChar char="•"/>
-            </a:pPr>
-            <a:r>
-              <a:rPr lang="en-US" sz="1800" dirty="0"/>
-              <a:t>recommender systems</a:t>
-            </a:r>
-            <a:endParaRPr sz="1800" dirty="0"/>
-          </a:p>
-          <a:p>
-            <a:pPr marL="285750" lvl="0" indent="-285750" algn="l" rtl="0">
-              <a:spcBef>
-                <a:spcPts val="0"/>
-              </a:spcBef>
-              <a:spcAft>
-                <a:spcPts val="0"/>
-              </a:spcAft>
-              <a:buFont typeface="Arial" panose="020B0604020202020204" pitchFamily="34" charset="0"/>
-              <a:buChar char="•"/>
-            </a:pPr>
-            <a:r>
-              <a:rPr lang="en-US" sz="1800" dirty="0"/>
-              <a:t>detection (anomaly, fraud, crime, terrorism, climate change, etc.)</a:t>
-            </a:r>
-            <a:endParaRPr sz="1800" dirty="0"/>
-          </a:p>
-          <a:p>
-            <a:pPr marL="285750" lvl="0" indent="-285750" algn="l" rtl="0">
-              <a:spcBef>
-                <a:spcPts val="0"/>
-              </a:spcBef>
-              <a:spcAft>
-                <a:spcPts val="0"/>
-              </a:spcAft>
-              <a:buFont typeface="Arial" panose="020B0604020202020204" pitchFamily="34" charset="0"/>
-              <a:buChar char="•"/>
-            </a:pPr>
-            <a:r>
-              <a:rPr lang="en-US" sz="1800" dirty="0"/>
-              <a:t>self-driving cars (planes, boats, drones, construction/rescue machines, etc.)</a:t>
-            </a:r>
-            <a:endParaRPr sz="1800" dirty="0"/>
-          </a:p>
-          <a:p>
-            <a:pPr marL="285750" lvl="0" indent="-285750" algn="l" rtl="0">
-              <a:spcBef>
-                <a:spcPts val="0"/>
-              </a:spcBef>
-              <a:spcAft>
-                <a:spcPts val="0"/>
-              </a:spcAft>
-              <a:buFont typeface="Arial" panose="020B0604020202020204" pitchFamily="34" charset="0"/>
-              <a:buChar char="•"/>
-            </a:pPr>
-            <a:r>
-              <a:rPr lang="en-US" sz="1800" dirty="0"/>
-              <a:t>robots (at home &amp; at work), </a:t>
-            </a:r>
-            <a:r>
-              <a:rPr lang="en-US" sz="1800" dirty="0">
-                <a:solidFill>
-                  <a:schemeClr val="dk1"/>
-                </a:solidFill>
-              </a:rPr>
-              <a:t>manufacturing robots</a:t>
-            </a:r>
-            <a:endParaRPr sz="1800" dirty="0"/>
-          </a:p>
-          <a:p>
-            <a:pPr marL="285750" lvl="0" indent="-285750" algn="l" rtl="0">
-              <a:spcBef>
-                <a:spcPts val="0"/>
-              </a:spcBef>
-              <a:spcAft>
-                <a:spcPts val="0"/>
-              </a:spcAft>
-              <a:buFont typeface="Arial" panose="020B0604020202020204" pitchFamily="34" charset="0"/>
-              <a:buChar char="•"/>
-            </a:pPr>
-            <a:r>
-              <a:rPr lang="en-US" sz="1800" dirty="0"/>
-              <a:t>universal language translator, language understanding, concepts learning</a:t>
-            </a:r>
-            <a:endParaRPr sz="1800" dirty="0"/>
-          </a:p>
-          <a:p>
-            <a:pPr marL="285750" lvl="0" indent="-285750" algn="l" rtl="0">
-              <a:spcBef>
-                <a:spcPts val="0"/>
-              </a:spcBef>
-              <a:spcAft>
-                <a:spcPts val="0"/>
-              </a:spcAft>
-              <a:buFont typeface="Arial" panose="020B0604020202020204" pitchFamily="34" charset="0"/>
-              <a:buChar char="•"/>
-            </a:pPr>
-            <a:r>
-              <a:rPr lang="en-US" sz="1800" dirty="0"/>
-              <a:t>music &amp;  literature composition, games and math.</a:t>
-            </a:r>
-            <a:endParaRPr sz="1800" dirty="0"/>
-          </a:p>
-          <a:p>
-            <a:pPr marL="285750" lvl="0" indent="-285750" algn="l" rtl="0">
-              <a:spcBef>
-                <a:spcPts val="0"/>
-              </a:spcBef>
-              <a:spcAft>
-                <a:spcPts val="0"/>
-              </a:spcAft>
-              <a:buFont typeface="Arial" panose="020B0604020202020204" pitchFamily="34" charset="0"/>
-              <a:buChar char="•"/>
-            </a:pPr>
-            <a:r>
-              <a:rPr lang="en-US" sz="1800" dirty="0"/>
-              <a:t>medical diagnostics (using genomic, phenotypic, social, etc. data), surgery</a:t>
-            </a:r>
-            <a:endParaRPr sz="1800" dirty="0"/>
-          </a:p>
-          <a:p>
-            <a:pPr marL="285750" lvl="0" indent="-285750" algn="l" rtl="0">
-              <a:spcBef>
-                <a:spcPts val="0"/>
-              </a:spcBef>
-              <a:spcAft>
-                <a:spcPts val="0"/>
-              </a:spcAft>
-              <a:buFont typeface="Arial" panose="020B0604020202020204" pitchFamily="34" charset="0"/>
-              <a:buChar char="•"/>
-            </a:pPr>
-            <a:r>
-              <a:rPr lang="en-US" sz="1800" dirty="0"/>
-              <a:t>intelligent secretary/helper, process management, t</a:t>
-            </a:r>
-            <a:r>
-              <a:rPr lang="en-US" sz="1800" dirty="0">
-                <a:solidFill>
-                  <a:schemeClr val="dk1"/>
-                </a:solidFill>
-              </a:rPr>
-              <a:t>raffic management</a:t>
-            </a:r>
-            <a:endParaRPr sz="1800" dirty="0"/>
-          </a:p>
-          <a:p>
-            <a:pPr marL="285750" lvl="0" indent="-285750" algn="l" rtl="0">
-              <a:spcBef>
-                <a:spcPts val="0"/>
-              </a:spcBef>
-              <a:spcAft>
-                <a:spcPts val="0"/>
-              </a:spcAft>
-              <a:buFont typeface="Arial" panose="020B0604020202020204" pitchFamily="34" charset="0"/>
-              <a:buChar char="•"/>
-            </a:pPr>
-            <a:r>
-              <a:rPr lang="en-US" sz="1800" dirty="0"/>
-              <a:t>agriculture (pooling weeds, watering, etc.)</a:t>
-            </a:r>
-            <a:endParaRPr sz="1800" dirty="0"/>
-          </a:p>
-          <a:p>
-            <a:pPr marL="285750" lvl="0" indent="-285750" algn="l" rtl="0">
-              <a:spcBef>
-                <a:spcPts val="0"/>
-              </a:spcBef>
-              <a:spcAft>
-                <a:spcPts val="0"/>
-              </a:spcAft>
-              <a:buFont typeface="Arial" panose="020B0604020202020204" pitchFamily="34" charset="0"/>
-              <a:buChar char="•"/>
-            </a:pPr>
-            <a:r>
-              <a:rPr lang="en-US" sz="1800" dirty="0"/>
-              <a:t>toys, military</a:t>
-            </a:r>
-            <a:endParaRPr sz="1800" dirty="0"/>
-          </a:p>
-          <a:p>
-            <a:pPr marL="285750" lvl="0" indent="-285750" algn="l" rtl="0">
-              <a:spcBef>
-                <a:spcPts val="0"/>
-              </a:spcBef>
-              <a:spcAft>
-                <a:spcPts val="0"/>
-              </a:spcAft>
-              <a:buFont typeface="Arial" panose="020B0604020202020204" pitchFamily="34" charset="0"/>
-              <a:buChar char="•"/>
-            </a:pPr>
-            <a:r>
-              <a:rPr lang="en-US" sz="1800" dirty="0"/>
-              <a:t>combining AI with Virtual Reality and 3D printing</a:t>
-            </a:r>
-            <a:endParaRPr sz="1800" dirty="0"/>
-          </a:p>
-          <a:p>
-            <a:pPr marL="285750" lvl="0" indent="-285750" algn="l" rtl="0">
-              <a:spcBef>
-                <a:spcPts val="0"/>
-              </a:spcBef>
-              <a:spcAft>
-                <a:spcPts val="0"/>
-              </a:spcAft>
-              <a:buFont typeface="Arial" panose="020B0604020202020204" pitchFamily="34" charset="0"/>
-              <a:buChar char="•"/>
-            </a:pPr>
-            <a:r>
-              <a:rPr lang="en-US" sz="1800" dirty="0"/>
-              <a:t>effective direct interface with human brain</a:t>
-            </a:r>
-          </a:p>
-          <a:p>
-            <a:pPr marL="285750" lvl="0" indent="-285750" algn="l" rtl="0">
-              <a:spcBef>
-                <a:spcPts val="0"/>
-              </a:spcBef>
-              <a:spcAft>
-                <a:spcPts val="0"/>
-              </a:spcAft>
-              <a:buFont typeface="Arial" panose="020B0604020202020204" pitchFamily="34" charset="0"/>
-              <a:buChar char="•"/>
-            </a:pPr>
-            <a:r>
-              <a:rPr lang="en-US" sz="1800" dirty="0"/>
-              <a:t>etc. etc. etc.</a:t>
-            </a:r>
-            <a:endParaRPr sz="1800" dirty="0"/>
-          </a:p>
-        </p:txBody>
-      </p:sp>
-      <p:sp>
-        <p:nvSpPr>
-          <p:cNvPr id="5" name="Google Shape;140;p20">
-            <a:extLst>
-              <a:ext uri="{FF2B5EF4-FFF2-40B4-BE49-F238E27FC236}">
-                <a16:creationId xmlns:a16="http://schemas.microsoft.com/office/drawing/2014/main" id="{415A9191-F14B-8648-B0A8-EB10013B9142}"/>
-              </a:ext>
-            </a:extLst>
-          </p:cNvPr>
-          <p:cNvSpPr txBox="1"/>
-          <p:nvPr/>
-        </p:nvSpPr>
-        <p:spPr>
-          <a:xfrm>
-            <a:off x="106350" y="22949"/>
-            <a:ext cx="7924467" cy="1328773"/>
-          </a:xfrm>
-          <a:prstGeom prst="rect">
-            <a:avLst/>
-          </a:prstGeom>
-          <a:noFill/>
-          <a:ln>
-            <a:noFill/>
-          </a:ln>
-        </p:spPr>
-        <p:txBody>
-          <a:bodyPr spcFirstLastPara="1" wrap="square" lIns="91425" tIns="91425" rIns="91425" bIns="91425" anchor="t" anchorCtr="0">
-            <a:noAutofit/>
-          </a:bodyPr>
-          <a:lstStyle/>
-          <a:p>
-            <a:r>
-              <a:rPr lang="en-US" sz="2800" b="1" dirty="0"/>
-              <a:t>Where and How ML &amp; AI are used ?</a:t>
-            </a:r>
-          </a:p>
-          <a:p>
-            <a:pPr marL="0" lvl="0" indent="0" algn="l" rtl="0">
-              <a:spcBef>
-                <a:spcPts val="0"/>
-              </a:spcBef>
-              <a:spcAft>
-                <a:spcPts val="0"/>
-              </a:spcAft>
-              <a:buNone/>
-            </a:pPr>
-            <a:endParaRPr lang="en-US" b="1" dirty="0"/>
-          </a:p>
-          <a:p>
-            <a:pPr marL="0" lvl="0" indent="0" algn="l" rtl="0">
-              <a:spcBef>
-                <a:spcPts val="0"/>
-              </a:spcBef>
-              <a:spcAft>
-                <a:spcPts val="0"/>
-              </a:spcAft>
-              <a:buNone/>
-            </a:pPr>
-            <a:r>
-              <a:rPr lang="en-US" sz="1800" b="1" dirty="0"/>
-              <a:t>ML = Machine Learning</a:t>
-            </a:r>
-          </a:p>
-          <a:p>
-            <a:pPr marL="0" lvl="0" indent="0" algn="l" rtl="0">
-              <a:spcBef>
-                <a:spcPts val="0"/>
-              </a:spcBef>
-              <a:spcAft>
-                <a:spcPts val="0"/>
-              </a:spcAft>
-              <a:buNone/>
-            </a:pPr>
-            <a:r>
-              <a:rPr lang="en-US" sz="1800" b="1" dirty="0"/>
-              <a:t>AI = Artificial Intelligence</a:t>
-            </a:r>
-          </a:p>
-        </p:txBody>
-      </p:sp>
-    </p:spTree>
   </p:cSld>
   <p:clrMapOvr>
     <a:masterClrMapping/>
